--- a/260418_add/supplefigure_260420/SuppFig_S07_TRUST4_diversity.pptx
+++ b/260418_add/supplefigure_260420/SuppFig_S07_TRUST4_diversity.pptx
@@ -3155,7 +3155,7 @@
                 </a:solidFill>
                 <a:latin typeface="Arial"/>
               </a:rPr>
-              <a:t>TRUST4 repertoire diversity — 6 chains × Shannon entropy by response (pre-CRT)</a:t>
+              <a:t>TRUST4 repertoire diversity — 6 chains × Shannon entropy by response (pre-CRT) with per-chain MW P</a:t>
             </a:r>
           </a:p>
         </p:txBody>
@@ -3168,7 +3168,7 @@
         </p:nvCxnSpPr>
         <p:spPr>
           <a:xfrm>
-            <a:off x="1645920" y="5760720"/>
+            <a:off x="1463040" y="5669280"/>
             <a:ext cx="9601200" cy="0"/>
           </a:xfrm>
           <a:prstGeom prst="line">
@@ -3204,8 +3204,8 @@
         </p:nvCxnSpPr>
         <p:spPr>
           <a:xfrm>
-            <a:off x="1645920" y="1188720"/>
-            <a:ext cx="0" cy="4572000"/>
+            <a:off x="1463040" y="1280160"/>
+            <a:ext cx="0" cy="4389120"/>
           </a:xfrm>
           <a:prstGeom prst="line">
             <a:avLst/>
@@ -3240,8 +3240,8 @@
         </p:nvCxnSpPr>
         <p:spPr>
           <a:xfrm>
-            <a:off x="11247120" y="1188720"/>
-            <a:ext cx="0" cy="4572000"/>
+            <a:off x="11064240" y="1280160"/>
+            <a:ext cx="0" cy="4389120"/>
           </a:xfrm>
           <a:prstGeom prst="line">
             <a:avLst/>
@@ -3276,7 +3276,7 @@
         </p:nvCxnSpPr>
         <p:spPr>
           <a:xfrm>
-            <a:off x="1645920" y="1188720"/>
+            <a:off x="1463040" y="1280160"/>
             <a:ext cx="9601200" cy="0"/>
           </a:xfrm>
           <a:prstGeom prst="line">
@@ -3312,7 +3312,7 @@
         </p:nvCxnSpPr>
         <p:spPr>
           <a:xfrm>
-            <a:off x="1581912" y="5760720"/>
+            <a:off x="1399032" y="5669280"/>
             <a:ext cx="64008" cy="0"/>
           </a:xfrm>
           <a:prstGeom prst="line">
@@ -3348,7 +3348,7 @@
         </p:nvSpPr>
         <p:spPr>
           <a:xfrm>
-            <a:off x="1143000" y="5678424"/>
+            <a:off x="960120" y="5586984"/>
             <a:ext cx="438912" cy="164592"/>
           </a:xfrm>
           <a:prstGeom prst="rect">
@@ -3384,7 +3384,7 @@
         </p:nvCxnSpPr>
         <p:spPr>
           <a:xfrm>
-            <a:off x="1581912" y="4617720"/>
+            <a:off x="1399032" y="4572000"/>
             <a:ext cx="64008" cy="0"/>
           </a:xfrm>
           <a:prstGeom prst="line">
@@ -3420,7 +3420,7 @@
         </p:nvSpPr>
         <p:spPr>
           <a:xfrm>
-            <a:off x="1143000" y="4535424"/>
+            <a:off x="960120" y="4489704"/>
             <a:ext cx="438912" cy="164592"/>
           </a:xfrm>
           <a:prstGeom prst="rect">
@@ -3456,7 +3456,7 @@
         </p:nvCxnSpPr>
         <p:spPr>
           <a:xfrm>
-            <a:off x="1581912" y="3474720"/>
+            <a:off x="1399032" y="3474720"/>
             <a:ext cx="64008" cy="0"/>
           </a:xfrm>
           <a:prstGeom prst="line">
@@ -3492,7 +3492,7 @@
         </p:nvSpPr>
         <p:spPr>
           <a:xfrm>
-            <a:off x="1143000" y="3392424"/>
+            <a:off x="960120" y="3392424"/>
             <a:ext cx="438912" cy="164592"/>
           </a:xfrm>
           <a:prstGeom prst="rect">
@@ -3528,7 +3528,7 @@
         </p:nvCxnSpPr>
         <p:spPr>
           <a:xfrm>
-            <a:off x="1581912" y="2331720"/>
+            <a:off x="1399032" y="2377440"/>
             <a:ext cx="64008" cy="0"/>
           </a:xfrm>
           <a:prstGeom prst="line">
@@ -3564,7 +3564,7 @@
         </p:nvSpPr>
         <p:spPr>
           <a:xfrm>
-            <a:off x="1143000" y="2249424"/>
+            <a:off x="960120" y="2295144"/>
             <a:ext cx="438912" cy="164592"/>
           </a:xfrm>
           <a:prstGeom prst="rect">
@@ -3600,7 +3600,7 @@
         </p:nvCxnSpPr>
         <p:spPr>
           <a:xfrm>
-            <a:off x="1581912" y="1188720"/>
+            <a:off x="1399032" y="1280160"/>
             <a:ext cx="64008" cy="0"/>
           </a:xfrm>
           <a:prstGeom prst="line">
@@ -3636,7 +3636,7 @@
         </p:nvSpPr>
         <p:spPr>
           <a:xfrm>
-            <a:off x="1143000" y="1106424"/>
+            <a:off x="960120" y="1197864"/>
             <a:ext cx="438912" cy="164592"/>
           </a:xfrm>
           <a:prstGeom prst="rect">
@@ -3672,7 +3672,7 @@
         </p:nvSpPr>
         <p:spPr>
           <a:xfrm>
-            <a:off x="777240" y="2468880"/>
+            <a:off x="594360" y="2468880"/>
             <a:ext cx="365760" cy="2011680"/>
           </a:xfrm>
           <a:prstGeom prst="rect">
@@ -3702,13 +3702,501 @@
       </p:sp>
       <p:sp>
         <p:nvSpPr>
-          <p:cNvPr id="19" name="TextBox 18"/>
+          <p:cNvPr id="19" name="Rectangle 18"/>
+          <p:cNvSpPr/>
+          <p:nvPr/>
+        </p:nvSpPr>
+        <p:spPr>
+          <a:xfrm>
+            <a:off x="1463040" y="1298448"/>
+            <a:ext cx="1371600" cy="4370832"/>
+          </a:xfrm>
+          <a:prstGeom prst="rect">
+            <a:avLst/>
+          </a:prstGeom>
+          <a:solidFill>
+            <a:srgbClr val="F5F5F5"/>
+          </a:solidFill>
+          <a:ln>
+            <a:noFill/>
+          </a:ln>
+          <a:effectLst/>
+        </p:spPr>
+        <p:style>
+          <a:lnRef idx="1">
+            <a:schemeClr val="accent1"/>
+          </a:lnRef>
+          <a:fillRef idx="3">
+            <a:schemeClr val="accent1"/>
+          </a:fillRef>
+          <a:effectRef idx="2">
+            <a:schemeClr val="accent1"/>
+          </a:effectRef>
+          <a:fontRef idx="minor">
+            <a:schemeClr val="lt1"/>
+          </a:fontRef>
+        </p:style>
+        <p:txBody>
+          <a:bodyPr rtlCol="0" anchor="ctr"/>
+          <a:lstStyle/>
+          <a:p>
+            <a:pPr algn="ctr"/>
+          </a:p>
+        </p:txBody>
+      </p:sp>
+      <p:sp>
+        <p:nvSpPr>
+          <p:cNvPr id="20" name="Rectangle 19"/>
+          <p:cNvSpPr/>
+          <p:nvPr/>
+        </p:nvSpPr>
+        <p:spPr>
+          <a:xfrm>
+            <a:off x="2834640" y="1298448"/>
+            <a:ext cx="1371600" cy="4370832"/>
+          </a:xfrm>
+          <a:prstGeom prst="rect">
+            <a:avLst/>
+          </a:prstGeom>
+          <a:solidFill>
+            <a:srgbClr val="F5F5F5"/>
+          </a:solidFill>
+          <a:ln>
+            <a:noFill/>
+          </a:ln>
+          <a:effectLst/>
+        </p:spPr>
+        <p:style>
+          <a:lnRef idx="1">
+            <a:schemeClr val="accent1"/>
+          </a:lnRef>
+          <a:fillRef idx="3">
+            <a:schemeClr val="accent1"/>
+          </a:fillRef>
+          <a:effectRef idx="2">
+            <a:schemeClr val="accent1"/>
+          </a:effectRef>
+          <a:fontRef idx="minor">
+            <a:schemeClr val="lt1"/>
+          </a:fontRef>
+        </p:style>
+        <p:txBody>
+          <a:bodyPr rtlCol="0" anchor="ctr"/>
+          <a:lstStyle/>
+          <a:p>
+            <a:pPr algn="ctr"/>
+          </a:p>
+        </p:txBody>
+      </p:sp>
+      <p:sp>
+        <p:nvSpPr>
+          <p:cNvPr id="21" name="Rectangle 20"/>
+          <p:cNvSpPr/>
+          <p:nvPr/>
+        </p:nvSpPr>
+        <p:spPr>
+          <a:xfrm>
+            <a:off x="4206240" y="1298448"/>
+            <a:ext cx="1371600" cy="4370832"/>
+          </a:xfrm>
+          <a:prstGeom prst="rect">
+            <a:avLst/>
+          </a:prstGeom>
+          <a:solidFill>
+            <a:srgbClr val="FAF3E8"/>
+          </a:solidFill>
+          <a:ln>
+            <a:noFill/>
+          </a:ln>
+          <a:effectLst/>
+        </p:spPr>
+        <p:style>
+          <a:lnRef idx="1">
+            <a:schemeClr val="accent1"/>
+          </a:lnRef>
+          <a:fillRef idx="3">
+            <a:schemeClr val="accent1"/>
+          </a:fillRef>
+          <a:effectRef idx="2">
+            <a:schemeClr val="accent1"/>
+          </a:effectRef>
+          <a:fontRef idx="minor">
+            <a:schemeClr val="lt1"/>
+          </a:fontRef>
+        </p:style>
+        <p:txBody>
+          <a:bodyPr rtlCol="0" anchor="ctr"/>
+          <a:lstStyle/>
+          <a:p>
+            <a:pPr algn="ctr"/>
+          </a:p>
+        </p:txBody>
+      </p:sp>
+      <p:sp>
+        <p:nvSpPr>
+          <p:cNvPr id="22" name="Rectangle 21"/>
+          <p:cNvSpPr/>
+          <p:nvPr/>
+        </p:nvSpPr>
+        <p:spPr>
+          <a:xfrm>
+            <a:off x="5577840" y="1298448"/>
+            <a:ext cx="1371600" cy="4370832"/>
+          </a:xfrm>
+          <a:prstGeom prst="rect">
+            <a:avLst/>
+          </a:prstGeom>
+          <a:solidFill>
+            <a:srgbClr val="FAF3E8"/>
+          </a:solidFill>
+          <a:ln>
+            <a:noFill/>
+          </a:ln>
+          <a:effectLst/>
+        </p:spPr>
+        <p:style>
+          <a:lnRef idx="1">
+            <a:schemeClr val="accent1"/>
+          </a:lnRef>
+          <a:fillRef idx="3">
+            <a:schemeClr val="accent1"/>
+          </a:fillRef>
+          <a:effectRef idx="2">
+            <a:schemeClr val="accent1"/>
+          </a:effectRef>
+          <a:fontRef idx="minor">
+            <a:schemeClr val="lt1"/>
+          </a:fontRef>
+        </p:style>
+        <p:txBody>
+          <a:bodyPr rtlCol="0" anchor="ctr"/>
+          <a:lstStyle/>
+          <a:p>
+            <a:pPr algn="ctr"/>
+          </a:p>
+        </p:txBody>
+      </p:sp>
+      <p:sp>
+        <p:nvSpPr>
+          <p:cNvPr id="23" name="Rectangle 22"/>
+          <p:cNvSpPr/>
+          <p:nvPr/>
+        </p:nvSpPr>
+        <p:spPr>
+          <a:xfrm>
+            <a:off x="6949440" y="1298448"/>
+            <a:ext cx="1371600" cy="4370832"/>
+          </a:xfrm>
+          <a:prstGeom prst="rect">
+            <a:avLst/>
+          </a:prstGeom>
+          <a:solidFill>
+            <a:srgbClr val="FAEFF3"/>
+          </a:solidFill>
+          <a:ln>
+            <a:noFill/>
+          </a:ln>
+          <a:effectLst/>
+        </p:spPr>
+        <p:style>
+          <a:lnRef idx="1">
+            <a:schemeClr val="accent1"/>
+          </a:lnRef>
+          <a:fillRef idx="3">
+            <a:schemeClr val="accent1"/>
+          </a:fillRef>
+          <a:effectRef idx="2">
+            <a:schemeClr val="accent1"/>
+          </a:effectRef>
+          <a:fontRef idx="minor">
+            <a:schemeClr val="lt1"/>
+          </a:fontRef>
+        </p:style>
+        <p:txBody>
+          <a:bodyPr rtlCol="0" anchor="ctr"/>
+          <a:lstStyle/>
+          <a:p>
+            <a:pPr algn="ctr"/>
+          </a:p>
+        </p:txBody>
+      </p:sp>
+      <p:sp>
+        <p:nvSpPr>
+          <p:cNvPr id="24" name="Rectangle 23"/>
+          <p:cNvSpPr/>
+          <p:nvPr/>
+        </p:nvSpPr>
+        <p:spPr>
+          <a:xfrm>
+            <a:off x="8321040" y="1298448"/>
+            <a:ext cx="1371600" cy="4370832"/>
+          </a:xfrm>
+          <a:prstGeom prst="rect">
+            <a:avLst/>
+          </a:prstGeom>
+          <a:solidFill>
+            <a:srgbClr val="FAEFF3"/>
+          </a:solidFill>
+          <a:ln>
+            <a:noFill/>
+          </a:ln>
+          <a:effectLst/>
+        </p:spPr>
+        <p:style>
+          <a:lnRef idx="1">
+            <a:schemeClr val="accent1"/>
+          </a:lnRef>
+          <a:fillRef idx="3">
+            <a:schemeClr val="accent1"/>
+          </a:fillRef>
+          <a:effectRef idx="2">
+            <a:schemeClr val="accent1"/>
+          </a:effectRef>
+          <a:fontRef idx="minor">
+            <a:schemeClr val="lt1"/>
+          </a:fontRef>
+        </p:style>
+        <p:txBody>
+          <a:bodyPr rtlCol="0" anchor="ctr"/>
+          <a:lstStyle/>
+          <a:p>
+            <a:pPr algn="ctr"/>
+          </a:p>
+        </p:txBody>
+      </p:sp>
+      <p:sp>
+        <p:nvSpPr>
+          <p:cNvPr id="25" name="Rectangle 24"/>
+          <p:cNvSpPr/>
+          <p:nvPr/>
+        </p:nvSpPr>
+        <p:spPr>
+          <a:xfrm>
+            <a:off x="9692640" y="1298448"/>
+            <a:ext cx="1371600" cy="4370832"/>
+          </a:xfrm>
+          <a:prstGeom prst="rect">
+            <a:avLst/>
+          </a:prstGeom>
+          <a:solidFill>
+            <a:srgbClr val="FAEFF3"/>
+          </a:solidFill>
+          <a:ln>
+            <a:noFill/>
+          </a:ln>
+          <a:effectLst/>
+        </p:spPr>
+        <p:style>
+          <a:lnRef idx="1">
+            <a:schemeClr val="accent1"/>
+          </a:lnRef>
+          <a:fillRef idx="3">
+            <a:schemeClr val="accent1"/>
+          </a:fillRef>
+          <a:effectRef idx="2">
+            <a:schemeClr val="accent1"/>
+          </a:effectRef>
+          <a:fontRef idx="minor">
+            <a:schemeClr val="lt1"/>
+          </a:fontRef>
+        </p:style>
+        <p:txBody>
+          <a:bodyPr rtlCol="0" anchor="ctr"/>
+          <a:lstStyle/>
+          <a:p>
+            <a:pPr algn="ctr"/>
+          </a:p>
+        </p:txBody>
+      </p:sp>
+      <p:cxnSp>
+        <p:nvCxnSpPr>
+          <p:cNvPr id="26" name="Connector 25"/>
+          <p:cNvCxnSpPr/>
+          <p:nvPr/>
+        </p:nvCxnSpPr>
+        <p:spPr>
+          <a:xfrm>
+            <a:off x="1463040" y="5669280"/>
+            <a:ext cx="9601200" cy="0"/>
+          </a:xfrm>
+          <a:prstGeom prst="line">
+            <a:avLst/>
+          </a:prstGeom>
+          <a:ln w="12700">
+            <a:solidFill>
+              <a:srgbClr val="222222"/>
+            </a:solidFill>
+          </a:ln>
+          <a:effectLst/>
+        </p:spPr>
+        <p:style>
+          <a:lnRef idx="2">
+            <a:schemeClr val="accent1"/>
+          </a:lnRef>
+          <a:fillRef idx="0">
+            <a:schemeClr val="accent1"/>
+          </a:fillRef>
+          <a:effectRef idx="1">
+            <a:schemeClr val="accent1"/>
+          </a:effectRef>
+          <a:fontRef idx="minor">
+            <a:schemeClr val="tx1"/>
+          </a:fontRef>
+        </p:style>
+      </p:cxnSp>
+      <p:cxnSp>
+        <p:nvCxnSpPr>
+          <p:cNvPr id="27" name="Connector 26"/>
+          <p:cNvCxnSpPr/>
+          <p:nvPr/>
+        </p:nvCxnSpPr>
+        <p:spPr>
+          <a:xfrm>
+            <a:off x="1463040" y="1280160"/>
+            <a:ext cx="0" cy="4389120"/>
+          </a:xfrm>
+          <a:prstGeom prst="line">
+            <a:avLst/>
+          </a:prstGeom>
+          <a:ln w="12700">
+            <a:solidFill>
+              <a:srgbClr val="222222"/>
+            </a:solidFill>
+          </a:ln>
+          <a:effectLst/>
+        </p:spPr>
+        <p:style>
+          <a:lnRef idx="2">
+            <a:schemeClr val="accent1"/>
+          </a:lnRef>
+          <a:fillRef idx="0">
+            <a:schemeClr val="accent1"/>
+          </a:fillRef>
+          <a:effectRef idx="1">
+            <a:schemeClr val="accent1"/>
+          </a:effectRef>
+          <a:fontRef idx="minor">
+            <a:schemeClr val="tx1"/>
+          </a:fontRef>
+        </p:style>
+      </p:cxnSp>
+      <p:sp>
+        <p:nvSpPr>
+          <p:cNvPr id="28" name="TextBox 27"/>
           <p:cNvSpPr txBox="1"/>
           <p:nvPr/>
         </p:nvSpPr>
         <p:spPr>
           <a:xfrm>
-            <a:off x="1783080" y="5815584"/>
+            <a:off x="1463040" y="960120"/>
+            <a:ext cx="2743200" cy="228600"/>
+          </a:xfrm>
+          <a:prstGeom prst="rect">
+            <a:avLst/>
+          </a:prstGeom>
+          <a:noFill/>
+          <a:effectLst/>
+        </p:spPr>
+        <p:txBody>
+          <a:bodyPr wrap="square" lIns="0" rIns="0" tIns="0" bIns="0" anchor="ctr">
+            <a:spAutoFit/>
+          </a:bodyPr>
+          <a:lstStyle/>
+          <a:p>
+            <a:pPr algn="ctr"/>
+            <a:r>
+              <a:rPr sz="1000" b="1" i="0">
+                <a:solidFill>
+                  <a:srgbClr val="8A2B4C"/>
+                </a:solidFill>
+                <a:latin typeface="Arial"/>
+              </a:rPr>
+              <a:t>α/β T-cell</a:t>
+            </a:r>
+          </a:p>
+        </p:txBody>
+      </p:sp>
+      <p:sp>
+        <p:nvSpPr>
+          <p:cNvPr id="29" name="TextBox 28"/>
+          <p:cNvSpPr txBox="1"/>
+          <p:nvPr/>
+        </p:nvSpPr>
+        <p:spPr>
+          <a:xfrm>
+            <a:off x="4206240" y="960120"/>
+            <a:ext cx="2743200" cy="228600"/>
+          </a:xfrm>
+          <a:prstGeom prst="rect">
+            <a:avLst/>
+          </a:prstGeom>
+          <a:noFill/>
+          <a:effectLst/>
+        </p:spPr>
+        <p:txBody>
+          <a:bodyPr wrap="square" lIns="0" rIns="0" tIns="0" bIns="0" anchor="ctr">
+            <a:spAutoFit/>
+          </a:bodyPr>
+          <a:lstStyle/>
+          <a:p>
+            <a:pPr algn="ctr"/>
+            <a:r>
+              <a:rPr sz="1000" b="1" i="0">
+                <a:solidFill>
+                  <a:srgbClr val="D4A300"/>
+                </a:solidFill>
+                <a:latin typeface="Arial"/>
+              </a:rPr>
+              <a:t>γ/δ T-cell</a:t>
+            </a:r>
+          </a:p>
+        </p:txBody>
+      </p:sp>
+      <p:sp>
+        <p:nvSpPr>
+          <p:cNvPr id="30" name="TextBox 29"/>
+          <p:cNvSpPr txBox="1"/>
+          <p:nvPr/>
+        </p:nvSpPr>
+        <p:spPr>
+          <a:xfrm>
+            <a:off x="6949440" y="960120"/>
+            <a:ext cx="4114800" cy="228600"/>
+          </a:xfrm>
+          <a:prstGeom prst="rect">
+            <a:avLst/>
+          </a:prstGeom>
+          <a:noFill/>
+          <a:effectLst/>
+        </p:spPr>
+        <p:txBody>
+          <a:bodyPr wrap="square" lIns="0" rIns="0" tIns="0" bIns="0" anchor="ctr">
+            <a:spAutoFit/>
+          </a:bodyPr>
+          <a:lstStyle/>
+          <a:p>
+            <a:pPr algn="ctr"/>
+            <a:r>
+              <a:rPr sz="1000" b="1" i="0">
+                <a:solidFill>
+                  <a:srgbClr val="8A2B4C"/>
+                </a:solidFill>
+                <a:latin typeface="Arial"/>
+              </a:rPr>
+              <a:t>B-cell (IGH/K/L)</a:t>
+            </a:r>
+          </a:p>
+        </p:txBody>
+      </p:sp>
+      <p:sp>
+        <p:nvSpPr>
+          <p:cNvPr id="31" name="TextBox 30"/>
+          <p:cNvSpPr txBox="1"/>
+          <p:nvPr/>
+        </p:nvSpPr>
+        <p:spPr>
+          <a:xfrm>
+            <a:off x="1600200" y="5724144"/>
             <a:ext cx="1097280" cy="274320"/>
           </a:xfrm>
           <a:prstGeom prst="rect">
@@ -3736,16 +4224,52 @@
           </a:p>
         </p:txBody>
       </p:sp>
+      <p:sp>
+        <p:nvSpPr>
+          <p:cNvPr id="32" name="TextBox 31"/>
+          <p:cNvSpPr txBox="1"/>
+          <p:nvPr/>
+        </p:nvSpPr>
+        <p:spPr>
+          <a:xfrm>
+            <a:off x="1645920" y="1115568"/>
+            <a:ext cx="1005840" cy="164592"/>
+          </a:xfrm>
+          <a:prstGeom prst="rect">
+            <a:avLst/>
+          </a:prstGeom>
+          <a:noFill/>
+          <a:effectLst/>
+        </p:spPr>
+        <p:txBody>
+          <a:bodyPr wrap="square" lIns="0" rIns="0" tIns="0" bIns="0" anchor="ctr">
+            <a:spAutoFit/>
+          </a:bodyPr>
+          <a:lstStyle/>
+          <a:p>
+            <a:pPr algn="ctr"/>
+            <a:r>
+              <a:rPr sz="700" b="1" i="0">
+                <a:solidFill>
+                  <a:srgbClr val="BBBBBB"/>
+                </a:solidFill>
+                <a:latin typeface="Arial"/>
+              </a:rPr>
+              <a:t>P=0.55</a:t>
+            </a:r>
+          </a:p>
+        </p:txBody>
+      </p:sp>
       <p:cxnSp>
         <p:nvCxnSpPr>
-          <p:cNvPr id="20" name="Connector 19"/>
+          <p:cNvPr id="33" name="Connector 32"/>
           <p:cNvCxnSpPr/>
           <p:nvPr/>
         </p:nvCxnSpPr>
         <p:spPr>
           <a:xfrm flipV="1">
-            <a:off x="2103120" y="3554804"/>
-            <a:ext cx="0" cy="1874279"/>
+            <a:off x="1920240" y="3551601"/>
+            <a:ext cx="0" cy="1799307"/>
           </a:xfrm>
           <a:prstGeom prst="line">
             <a:avLst/>
@@ -3774,13 +4298,13 @@
       </p:cxnSp>
       <p:cxnSp>
         <p:nvCxnSpPr>
-          <p:cNvPr id="21" name="Connector 20"/>
+          <p:cNvPr id="34" name="Connector 33"/>
           <p:cNvCxnSpPr/>
           <p:nvPr/>
         </p:nvCxnSpPr>
         <p:spPr>
           <a:xfrm>
-            <a:off x="2016252" y="5429083"/>
+            <a:off x="1833372" y="5350908"/>
             <a:ext cx="173736" cy="0"/>
           </a:xfrm>
           <a:prstGeom prst="line">
@@ -3810,13 +4334,13 @@
       </p:cxnSp>
       <p:cxnSp>
         <p:nvCxnSpPr>
-          <p:cNvPr id="22" name="Connector 21"/>
+          <p:cNvPr id="35" name="Connector 34"/>
           <p:cNvCxnSpPr/>
           <p:nvPr/>
         </p:nvCxnSpPr>
         <p:spPr>
           <a:xfrm>
-            <a:off x="2016252" y="3554804"/>
+            <a:off x="1833372" y="3551601"/>
             <a:ext cx="173736" cy="0"/>
           </a:xfrm>
           <a:prstGeom prst="line">
@@ -3846,13 +4370,13 @@
       </p:cxnSp>
       <p:sp>
         <p:nvSpPr>
-          <p:cNvPr id="23" name="Rectangle 22"/>
-          <p:cNvSpPr/>
-          <p:nvPr/>
-        </p:nvSpPr>
-        <p:spPr>
-          <a:xfrm>
-            <a:off x="1929384" y="4369532"/>
+          <p:cNvPr id="36" name="Rectangle 35"/>
+          <p:cNvSpPr/>
+          <p:nvPr/>
+        </p:nvSpPr>
+        <p:spPr>
+          <a:xfrm>
+            <a:off x="1746504" y="4333739"/>
             <a:ext cx="347472" cy="1"/>
           </a:xfrm>
           <a:prstGeom prst="rect">
@@ -3890,13 +4414,13 @@
       </p:sp>
       <p:cxnSp>
         <p:nvCxnSpPr>
-          <p:cNvPr id="24" name="Connector 23"/>
+          <p:cNvPr id="37" name="Connector 36"/>
           <p:cNvCxnSpPr/>
           <p:nvPr/>
         </p:nvCxnSpPr>
         <p:spPr>
           <a:xfrm>
-            <a:off x="1929384" y="4123587"/>
+            <a:off x="1746504" y="4097632"/>
             <a:ext cx="347472" cy="0"/>
           </a:xfrm>
           <a:prstGeom prst="line">
@@ -3926,14 +4450,14 @@
       </p:cxnSp>
       <p:sp>
         <p:nvSpPr>
-          <p:cNvPr id="25" name="Oval 24"/>
-          <p:cNvSpPr/>
-          <p:nvPr/>
-        </p:nvSpPr>
-        <p:spPr>
-          <a:xfrm>
-            <a:off x="2119152" y="3522800"/>
-            <a:ext cx="64008" cy="64008"/>
+          <p:cNvPr id="38" name="Oval 37"/>
+          <p:cNvSpPr/>
+          <p:nvPr/>
+        </p:nvSpPr>
+        <p:spPr>
+          <a:xfrm>
+            <a:off x="1911169" y="3515025"/>
+            <a:ext cx="73152" cy="73152"/>
           </a:xfrm>
           <a:prstGeom prst="ellipse">
             <a:avLst/>
@@ -3970,14 +4494,14 @@
       </p:sp>
       <p:sp>
         <p:nvSpPr>
-          <p:cNvPr id="26" name="Oval 25"/>
-          <p:cNvSpPr/>
-          <p:nvPr/>
-        </p:nvSpPr>
-        <p:spPr>
-          <a:xfrm>
-            <a:off x="2013011" y="3652698"/>
-            <a:ext cx="64008" cy="64008"/>
+          <p:cNvPr id="39" name="Oval 38"/>
+          <p:cNvSpPr/>
+          <p:nvPr/>
+        </p:nvSpPr>
+        <p:spPr>
+          <a:xfrm>
+            <a:off x="1899196" y="3639727"/>
+            <a:ext cx="73152" cy="73152"/>
           </a:xfrm>
           <a:prstGeom prst="ellipse">
             <a:avLst/>
@@ -4014,14 +4538,14 @@
       </p:sp>
       <p:sp>
         <p:nvSpPr>
-          <p:cNvPr id="27" name="Oval 26"/>
-          <p:cNvSpPr/>
-          <p:nvPr/>
-        </p:nvSpPr>
-        <p:spPr>
-          <a:xfrm>
-            <a:off x="2016855" y="3717916"/>
-            <a:ext cx="64008" cy="64008"/>
+          <p:cNvPr id="40" name="Oval 39"/>
+          <p:cNvSpPr/>
+          <p:nvPr/>
+        </p:nvSpPr>
+        <p:spPr>
+          <a:xfrm>
+            <a:off x="1816348" y="3702336"/>
+            <a:ext cx="73152" cy="73152"/>
           </a:xfrm>
           <a:prstGeom prst="ellipse">
             <a:avLst/>
@@ -4058,14 +4582,14 @@
       </p:sp>
       <p:sp>
         <p:nvSpPr>
-          <p:cNvPr id="28" name="Oval 27"/>
-          <p:cNvSpPr/>
-          <p:nvPr/>
-        </p:nvSpPr>
-        <p:spPr>
-          <a:xfrm>
-            <a:off x="2084504" y="3772621"/>
-            <a:ext cx="64008" cy="64008"/>
+          <p:cNvPr id="41" name="Oval 40"/>
+          <p:cNvSpPr/>
+          <p:nvPr/>
+        </p:nvSpPr>
+        <p:spPr>
+          <a:xfrm>
+            <a:off x="1927604" y="3754853"/>
+            <a:ext cx="73152" cy="73152"/>
           </a:xfrm>
           <a:prstGeom prst="ellipse">
             <a:avLst/>
@@ -4102,14 +4626,14 @@
       </p:sp>
       <p:sp>
         <p:nvSpPr>
-          <p:cNvPr id="29" name="Oval 28"/>
-          <p:cNvSpPr/>
-          <p:nvPr/>
-        </p:nvSpPr>
-        <p:spPr>
-          <a:xfrm>
-            <a:off x="2062479" y="3851200"/>
-            <a:ext cx="64008" cy="64008"/>
+          <p:cNvPr id="42" name="Oval 41"/>
+          <p:cNvSpPr/>
+          <p:nvPr/>
+        </p:nvSpPr>
+        <p:spPr>
+          <a:xfrm>
+            <a:off x="1841512" y="3830289"/>
+            <a:ext cx="73152" cy="73152"/>
           </a:xfrm>
           <a:prstGeom prst="ellipse">
             <a:avLst/>
@@ -4146,14 +4670,14 @@
       </p:sp>
       <p:sp>
         <p:nvSpPr>
-          <p:cNvPr id="30" name="Oval 29"/>
-          <p:cNvSpPr/>
-          <p:nvPr/>
-        </p:nvSpPr>
-        <p:spPr>
-          <a:xfrm>
-            <a:off x="2047201" y="3887084"/>
-            <a:ext cx="64008" cy="64008"/>
+          <p:cNvPr id="43" name="Oval 42"/>
+          <p:cNvSpPr/>
+          <p:nvPr/>
+        </p:nvSpPr>
+        <p:spPr>
+          <a:xfrm>
+            <a:off x="1869570" y="3864737"/>
+            <a:ext cx="73152" cy="73152"/>
           </a:xfrm>
           <a:prstGeom prst="ellipse">
             <a:avLst/>
@@ -4190,14 +4714,14 @@
       </p:sp>
       <p:sp>
         <p:nvSpPr>
-          <p:cNvPr id="31" name="Oval 30"/>
-          <p:cNvSpPr/>
-          <p:nvPr/>
-        </p:nvSpPr>
-        <p:spPr>
-          <a:xfrm>
-            <a:off x="1998801" y="3906753"/>
-            <a:ext cx="64008" cy="64008"/>
+          <p:cNvPr id="44" name="Oval 43"/>
+          <p:cNvSpPr/>
+          <p:nvPr/>
+        </p:nvSpPr>
+        <p:spPr>
+          <a:xfrm>
+            <a:off x="1830628" y="3883619"/>
+            <a:ext cx="73152" cy="73152"/>
           </a:xfrm>
           <a:prstGeom prst="ellipse">
             <a:avLst/>
@@ -4234,14 +4758,14 @@
       </p:sp>
       <p:sp>
         <p:nvSpPr>
-          <p:cNvPr id="32" name="Oval 31"/>
-          <p:cNvSpPr/>
-          <p:nvPr/>
-        </p:nvSpPr>
-        <p:spPr>
-          <a:xfrm>
-            <a:off x="2150357" y="4048133"/>
-            <a:ext cx="64008" cy="64008"/>
+          <p:cNvPr id="45" name="Oval 44"/>
+          <p:cNvSpPr/>
+          <p:nvPr/>
+        </p:nvSpPr>
+        <p:spPr>
+          <a:xfrm>
+            <a:off x="1917202" y="4019344"/>
+            <a:ext cx="73152" cy="73152"/>
           </a:xfrm>
           <a:prstGeom prst="ellipse">
             <a:avLst/>
@@ -4278,14 +4802,14 @@
       </p:sp>
       <p:sp>
         <p:nvSpPr>
-          <p:cNvPr id="33" name="Oval 32"/>
-          <p:cNvSpPr/>
-          <p:nvPr/>
-        </p:nvSpPr>
-        <p:spPr>
-          <a:xfrm>
-            <a:off x="2090484" y="4091583"/>
-            <a:ext cx="64008" cy="64008"/>
+          <p:cNvPr id="46" name="Oval 45"/>
+          <p:cNvSpPr/>
+          <p:nvPr/>
+        </p:nvSpPr>
+        <p:spPr>
+          <a:xfrm>
+            <a:off x="1887527" y="4061056"/>
+            <a:ext cx="73152" cy="73152"/>
           </a:xfrm>
           <a:prstGeom prst="ellipse">
             <a:avLst/>
@@ -4322,14 +4846,14 @@
       </p:sp>
       <p:sp>
         <p:nvSpPr>
-          <p:cNvPr id="34" name="Oval 33"/>
-          <p:cNvSpPr/>
-          <p:nvPr/>
-        </p:nvSpPr>
-        <p:spPr>
-          <a:xfrm>
-            <a:off x="2140898" y="4096923"/>
-            <a:ext cx="64008" cy="64008"/>
+          <p:cNvPr id="47" name="Oval 46"/>
+          <p:cNvSpPr/>
+          <p:nvPr/>
+        </p:nvSpPr>
+        <p:spPr>
+          <a:xfrm>
+            <a:off x="1835968" y="4066183"/>
+            <a:ext cx="73152" cy="73152"/>
           </a:xfrm>
           <a:prstGeom prst="ellipse">
             <a:avLst/>
@@ -4366,14 +4890,14 @@
       </p:sp>
       <p:sp>
         <p:nvSpPr>
-          <p:cNvPr id="35" name="Oval 34"/>
-          <p:cNvSpPr/>
-          <p:nvPr/>
-        </p:nvSpPr>
-        <p:spPr>
-          <a:xfrm>
-            <a:off x="2077526" y="4106047"/>
-            <a:ext cx="64008" cy="64008"/>
+          <p:cNvPr id="48" name="Oval 47"/>
+          <p:cNvSpPr/>
+          <p:nvPr/>
+        </p:nvSpPr>
+        <p:spPr>
+          <a:xfrm>
+            <a:off x="1960668" y="4074942"/>
+            <a:ext cx="73152" cy="73152"/>
           </a:xfrm>
           <a:prstGeom prst="ellipse">
             <a:avLst/>
@@ -4410,14 +4934,14 @@
       </p:sp>
       <p:sp>
         <p:nvSpPr>
-          <p:cNvPr id="36" name="Oval 35"/>
-          <p:cNvSpPr/>
-          <p:nvPr/>
-        </p:nvSpPr>
-        <p:spPr>
-          <a:xfrm>
-            <a:off x="2019212" y="4168746"/>
-            <a:ext cx="64008" cy="64008"/>
+          <p:cNvPr id="49" name="Oval 48"/>
+          <p:cNvSpPr/>
+          <p:nvPr/>
+        </p:nvSpPr>
+        <p:spPr>
+          <a:xfrm>
+            <a:off x="1839729" y="4135133"/>
+            <a:ext cx="73152" cy="73152"/>
           </a:xfrm>
           <a:prstGeom prst="ellipse">
             <a:avLst/>
@@ -4454,14 +4978,14 @@
       </p:sp>
       <p:sp>
         <p:nvSpPr>
-          <p:cNvPr id="37" name="Oval 36"/>
-          <p:cNvSpPr/>
-          <p:nvPr/>
-        </p:nvSpPr>
-        <p:spPr>
-          <a:xfrm>
-            <a:off x="2010935" y="4337528"/>
-            <a:ext cx="64008" cy="64008"/>
+          <p:cNvPr id="50" name="Oval 49"/>
+          <p:cNvSpPr/>
+          <p:nvPr/>
+        </p:nvSpPr>
+        <p:spPr>
+          <a:xfrm>
+            <a:off x="1925712" y="4297163"/>
+            <a:ext cx="73152" cy="73152"/>
           </a:xfrm>
           <a:prstGeom prst="ellipse">
             <a:avLst/>
@@ -4498,14 +5022,14 @@
       </p:sp>
       <p:sp>
         <p:nvSpPr>
-          <p:cNvPr id="38" name="Oval 37"/>
-          <p:cNvSpPr/>
-          <p:nvPr/>
-        </p:nvSpPr>
-        <p:spPr>
-          <a:xfrm>
-            <a:off x="2068133" y="4380326"/>
-            <a:ext cx="64008" cy="64008"/>
+          <p:cNvPr id="51" name="Oval 50"/>
+          <p:cNvSpPr/>
+          <p:nvPr/>
+        </p:nvSpPr>
+        <p:spPr>
+          <a:xfrm>
+            <a:off x="1860811" y="4338250"/>
+            <a:ext cx="73152" cy="73152"/>
           </a:xfrm>
           <a:prstGeom prst="ellipse">
             <a:avLst/>
@@ -4542,14 +5066,14 @@
       </p:sp>
       <p:sp>
         <p:nvSpPr>
-          <p:cNvPr id="39" name="Oval 38"/>
-          <p:cNvSpPr/>
-          <p:nvPr/>
-        </p:nvSpPr>
-        <p:spPr>
-          <a:xfrm>
-            <a:off x="2010951" y="4583916"/>
-            <a:ext cx="64008" cy="64008"/>
+          <p:cNvPr id="52" name="Oval 51"/>
+          <p:cNvSpPr/>
+          <p:nvPr/>
+        </p:nvSpPr>
+        <p:spPr>
+          <a:xfrm>
+            <a:off x="1967647" y="4533696"/>
+            <a:ext cx="73152" cy="73152"/>
           </a:xfrm>
           <a:prstGeom prst="ellipse">
             <a:avLst/>
@@ -4586,14 +5110,14 @@
       </p:sp>
       <p:sp>
         <p:nvSpPr>
-          <p:cNvPr id="40" name="Oval 39"/>
-          <p:cNvSpPr/>
-          <p:nvPr/>
-        </p:nvSpPr>
-        <p:spPr>
-          <a:xfrm>
-            <a:off x="2058035" y="4818040"/>
-            <a:ext cx="64008" cy="64008"/>
+          <p:cNvPr id="53" name="Oval 52"/>
+          <p:cNvSpPr/>
+          <p:nvPr/>
+        </p:nvSpPr>
+        <p:spPr>
+          <a:xfrm>
+            <a:off x="1847515" y="4758455"/>
+            <a:ext cx="73152" cy="73152"/>
           </a:xfrm>
           <a:prstGeom prst="ellipse">
             <a:avLst/>
@@ -4630,14 +5154,14 @@
       </p:sp>
       <p:sp>
         <p:nvSpPr>
-          <p:cNvPr id="41" name="Oval 40"/>
-          <p:cNvSpPr/>
-          <p:nvPr/>
-        </p:nvSpPr>
-        <p:spPr>
-          <a:xfrm>
-            <a:off x="2057963" y="5397079"/>
-            <a:ext cx="64008" cy="64008"/>
+          <p:cNvPr id="54" name="Oval 53"/>
+          <p:cNvSpPr/>
+          <p:nvPr/>
+        </p:nvSpPr>
+        <p:spPr>
+          <a:xfrm>
+            <a:off x="1889179" y="5314332"/>
+            <a:ext cx="73152" cy="73152"/>
           </a:xfrm>
           <a:prstGeom prst="ellipse">
             <a:avLst/>
@@ -4674,14 +5198,14 @@
       </p:sp>
       <p:cxnSp>
         <p:nvCxnSpPr>
-          <p:cNvPr id="42" name="Connector 41"/>
+          <p:cNvPr id="55" name="Connector 54"/>
           <p:cNvCxnSpPr/>
           <p:nvPr/>
         </p:nvCxnSpPr>
         <p:spPr>
           <a:xfrm flipV="1">
-            <a:off x="2560320" y="3724477"/>
-            <a:ext cx="0" cy="1228751"/>
+            <a:off x="2377440" y="3714487"/>
+            <a:ext cx="0" cy="1179601"/>
           </a:xfrm>
           <a:prstGeom prst="line">
             <a:avLst/>
@@ -4710,13 +5234,13 @@
       </p:cxnSp>
       <p:cxnSp>
         <p:nvCxnSpPr>
-          <p:cNvPr id="43" name="Connector 42"/>
+          <p:cNvPr id="56" name="Connector 55"/>
           <p:cNvCxnSpPr/>
           <p:nvPr/>
         </p:nvCxnSpPr>
         <p:spPr>
           <a:xfrm>
-            <a:off x="2473452" y="4953228"/>
+            <a:off x="2290572" y="4894088"/>
             <a:ext cx="173736" cy="0"/>
           </a:xfrm>
           <a:prstGeom prst="line">
@@ -4746,13 +5270,13 @@
       </p:cxnSp>
       <p:cxnSp>
         <p:nvCxnSpPr>
-          <p:cNvPr id="44" name="Connector 43"/>
+          <p:cNvPr id="57" name="Connector 56"/>
           <p:cNvCxnSpPr/>
           <p:nvPr/>
         </p:nvCxnSpPr>
         <p:spPr>
           <a:xfrm>
-            <a:off x="2473452" y="3724477"/>
+            <a:off x="2290572" y="3714487"/>
             <a:ext cx="173736" cy="0"/>
           </a:xfrm>
           <a:prstGeom prst="line">
@@ -4782,13 +5306,13 @@
       </p:cxnSp>
       <p:sp>
         <p:nvSpPr>
-          <p:cNvPr id="45" name="Rectangle 44"/>
-          <p:cNvSpPr/>
-          <p:nvPr/>
-        </p:nvSpPr>
-        <p:spPr>
-          <a:xfrm>
-            <a:off x="2386584" y="4312007"/>
+          <p:cNvPr id="58" name="Rectangle 57"/>
+          <p:cNvSpPr/>
+          <p:nvPr/>
+        </p:nvSpPr>
+        <p:spPr>
+          <a:xfrm>
+            <a:off x="2203704" y="4278515"/>
             <a:ext cx="347472" cy="1"/>
           </a:xfrm>
           <a:prstGeom prst="rect">
@@ -4826,13 +5350,13 @@
       </p:sp>
       <p:cxnSp>
         <p:nvCxnSpPr>
-          <p:cNvPr id="46" name="Connector 45"/>
+          <p:cNvPr id="59" name="Connector 58"/>
           <p:cNvCxnSpPr/>
           <p:nvPr/>
         </p:nvCxnSpPr>
         <p:spPr>
           <a:xfrm>
-            <a:off x="2386584" y="4177608"/>
+            <a:off x="2203704" y="4149493"/>
             <a:ext cx="347472" cy="0"/>
           </a:xfrm>
           <a:prstGeom prst="line">
@@ -4862,14 +5386,14 @@
       </p:cxnSp>
       <p:sp>
         <p:nvSpPr>
-          <p:cNvPr id="47" name="Oval 46"/>
-          <p:cNvSpPr/>
-          <p:nvPr/>
-        </p:nvSpPr>
-        <p:spPr>
-          <a:xfrm>
-            <a:off x="2582394" y="3692473"/>
-            <a:ext cx="64008" cy="64008"/>
+          <p:cNvPr id="60" name="Oval 59"/>
+          <p:cNvSpPr/>
+          <p:nvPr/>
+        </p:nvSpPr>
+        <p:spPr>
+          <a:xfrm>
+            <a:off x="2283294" y="3677911"/>
+            <a:ext cx="73152" cy="73152"/>
           </a:xfrm>
           <a:prstGeom prst="ellipse">
             <a:avLst/>
@@ -4906,14 +5430,14 @@
       </p:sp>
       <p:sp>
         <p:nvSpPr>
-          <p:cNvPr id="48" name="Oval 47"/>
-          <p:cNvSpPr/>
-          <p:nvPr/>
-        </p:nvSpPr>
-        <p:spPr>
-          <a:xfrm>
-            <a:off x="2590884" y="3711226"/>
-            <a:ext cx="64008" cy="64008"/>
+          <p:cNvPr id="61" name="Oval 60"/>
+          <p:cNvSpPr/>
+          <p:nvPr/>
+        </p:nvSpPr>
+        <p:spPr>
+          <a:xfrm>
+            <a:off x="2288581" y="3695914"/>
+            <a:ext cx="73152" cy="73152"/>
           </a:xfrm>
           <a:prstGeom prst="ellipse">
             <a:avLst/>
@@ -4950,14 +5474,14 @@
       </p:sp>
       <p:sp>
         <p:nvSpPr>
-          <p:cNvPr id="49" name="Oval 48"/>
-          <p:cNvSpPr/>
-          <p:nvPr/>
-        </p:nvSpPr>
-        <p:spPr>
-          <a:xfrm>
-            <a:off x="2604219" y="3788598"/>
-            <a:ext cx="64008" cy="64008"/>
+          <p:cNvPr id="62" name="Oval 61"/>
+          <p:cNvSpPr/>
+          <p:nvPr/>
+        </p:nvSpPr>
+        <p:spPr>
+          <a:xfrm>
+            <a:off x="2395586" y="3770191"/>
+            <a:ext cx="73152" cy="73152"/>
           </a:xfrm>
           <a:prstGeom prst="ellipse">
             <a:avLst/>
@@ -4994,14 +5518,14 @@
       </p:sp>
       <p:sp>
         <p:nvSpPr>
-          <p:cNvPr id="50" name="Oval 49"/>
-          <p:cNvSpPr/>
-          <p:nvPr/>
-        </p:nvSpPr>
-        <p:spPr>
-          <a:xfrm>
-            <a:off x="2452334" y="3943366"/>
-            <a:ext cx="64008" cy="64008"/>
+          <p:cNvPr id="63" name="Oval 62"/>
+          <p:cNvSpPr/>
+          <p:nvPr/>
+        </p:nvSpPr>
+        <p:spPr>
+          <a:xfrm>
+            <a:off x="2358896" y="3918768"/>
+            <a:ext cx="73152" cy="73152"/>
           </a:xfrm>
           <a:prstGeom prst="ellipse">
             <a:avLst/>
@@ -5038,14 +5562,14 @@
       </p:sp>
       <p:sp>
         <p:nvSpPr>
-          <p:cNvPr id="51" name="Oval 50"/>
-          <p:cNvSpPr/>
-          <p:nvPr/>
-        </p:nvSpPr>
-        <p:spPr>
-          <a:xfrm>
-            <a:off x="2510187" y="4008340"/>
-            <a:ext cx="64008" cy="64008"/>
+          <p:cNvPr id="64" name="Oval 63"/>
+          <p:cNvSpPr/>
+          <p:nvPr/>
+        </p:nvSpPr>
+        <p:spPr>
+          <a:xfrm>
+            <a:off x="2397892" y="3981143"/>
+            <a:ext cx="73152" cy="73152"/>
           </a:xfrm>
           <a:prstGeom prst="ellipse">
             <a:avLst/>
@@ -5082,14 +5606,14 @@
       </p:sp>
       <p:sp>
         <p:nvSpPr>
-          <p:cNvPr id="52" name="Oval 51"/>
-          <p:cNvSpPr/>
-          <p:nvPr/>
-        </p:nvSpPr>
-        <p:spPr>
-          <a:xfrm>
-            <a:off x="2594516" y="4077409"/>
-            <a:ext cx="64008" cy="64008"/>
+          <p:cNvPr id="65" name="Oval 64"/>
+          <p:cNvSpPr/>
+          <p:nvPr/>
+        </p:nvSpPr>
+        <p:spPr>
+          <a:xfrm>
+            <a:off x="2347970" y="4047449"/>
+            <a:ext cx="73152" cy="73152"/>
           </a:xfrm>
           <a:prstGeom prst="ellipse">
             <a:avLst/>
@@ -5126,14 +5650,14 @@
       </p:sp>
       <p:sp>
         <p:nvSpPr>
-          <p:cNvPr id="53" name="Oval 52"/>
-          <p:cNvSpPr/>
-          <p:nvPr/>
-        </p:nvSpPr>
-        <p:spPr>
-          <a:xfrm>
-            <a:off x="2493441" y="4107718"/>
-            <a:ext cx="64008" cy="64008"/>
+          <p:cNvPr id="66" name="Oval 65"/>
+          <p:cNvSpPr/>
+          <p:nvPr/>
+        </p:nvSpPr>
+        <p:spPr>
+          <a:xfrm>
+            <a:off x="2374677" y="4076546"/>
+            <a:ext cx="73152" cy="73152"/>
           </a:xfrm>
           <a:prstGeom prst="ellipse">
             <a:avLst/>
@@ -5170,14 +5694,14 @@
       </p:sp>
       <p:sp>
         <p:nvSpPr>
-          <p:cNvPr id="54" name="Oval 53"/>
-          <p:cNvSpPr/>
-          <p:nvPr/>
-        </p:nvSpPr>
-        <p:spPr>
-          <a:xfrm>
-            <a:off x="2518591" y="4143522"/>
-            <a:ext cx="64008" cy="64008"/>
+          <p:cNvPr id="67" name="Oval 66"/>
+          <p:cNvSpPr/>
+          <p:nvPr/>
+        </p:nvSpPr>
+        <p:spPr>
+          <a:xfrm>
+            <a:off x="2374442" y="4110918"/>
+            <a:ext cx="73152" cy="73152"/>
           </a:xfrm>
           <a:prstGeom prst="ellipse">
             <a:avLst/>
@@ -5214,14 +5738,14 @@
       </p:sp>
       <p:sp>
         <p:nvSpPr>
-          <p:cNvPr id="55" name="Oval 54"/>
-          <p:cNvSpPr/>
-          <p:nvPr/>
-        </p:nvSpPr>
-        <p:spPr>
-          <a:xfrm>
-            <a:off x="2495449" y="4147686"/>
-            <a:ext cx="64008" cy="64008"/>
+          <p:cNvPr id="68" name="Oval 67"/>
+          <p:cNvSpPr/>
+          <p:nvPr/>
+        </p:nvSpPr>
+        <p:spPr>
+          <a:xfrm>
+            <a:off x="2310800" y="4114915"/>
+            <a:ext cx="73152" cy="73152"/>
           </a:xfrm>
           <a:prstGeom prst="ellipse">
             <a:avLst/>
@@ -5258,14 +5782,14 @@
       </p:sp>
       <p:sp>
         <p:nvSpPr>
-          <p:cNvPr id="56" name="Oval 55"/>
-          <p:cNvSpPr/>
-          <p:nvPr/>
-        </p:nvSpPr>
-        <p:spPr>
-          <a:xfrm>
-            <a:off x="2489906" y="4196072"/>
-            <a:ext cx="64008" cy="64008"/>
+          <p:cNvPr id="69" name="Oval 68"/>
+          <p:cNvSpPr/>
+          <p:nvPr/>
+        </p:nvSpPr>
+        <p:spPr>
+          <a:xfrm>
+            <a:off x="2277562" y="4161366"/>
+            <a:ext cx="73152" cy="73152"/>
           </a:xfrm>
           <a:prstGeom prst="ellipse">
             <a:avLst/>
@@ -5302,14 +5826,14 @@
       </p:sp>
       <p:sp>
         <p:nvSpPr>
-          <p:cNvPr id="57" name="Oval 56"/>
-          <p:cNvSpPr/>
-          <p:nvPr/>
-        </p:nvSpPr>
-        <p:spPr>
-          <a:xfrm>
-            <a:off x="2534540" y="4270001"/>
-            <a:ext cx="64008" cy="64008"/>
+          <p:cNvPr id="70" name="Oval 69"/>
+          <p:cNvSpPr/>
+          <p:nvPr/>
+        </p:nvSpPr>
+        <p:spPr>
+          <a:xfrm>
+            <a:off x="2278500" y="4232337"/>
+            <a:ext cx="73152" cy="73152"/>
           </a:xfrm>
           <a:prstGeom prst="ellipse">
             <a:avLst/>
@@ -5346,14 +5870,14 @@
       </p:sp>
       <p:sp>
         <p:nvSpPr>
-          <p:cNvPr id="58" name="Oval 57"/>
-          <p:cNvSpPr/>
-          <p:nvPr/>
-        </p:nvSpPr>
-        <p:spPr>
-          <a:xfrm>
-            <a:off x="2583242" y="4275665"/>
-            <a:ext cx="64008" cy="64008"/>
+          <p:cNvPr id="71" name="Oval 70"/>
+          <p:cNvSpPr/>
+          <p:nvPr/>
+        </p:nvSpPr>
+        <p:spPr>
+          <a:xfrm>
+            <a:off x="2265475" y="4237775"/>
+            <a:ext cx="73152" cy="73152"/>
           </a:xfrm>
           <a:prstGeom prst="ellipse">
             <a:avLst/>
@@ -5390,14 +5914,14 @@
       </p:sp>
       <p:sp>
         <p:nvSpPr>
-          <p:cNvPr id="59" name="Oval 58"/>
-          <p:cNvSpPr/>
-          <p:nvPr/>
-        </p:nvSpPr>
-        <p:spPr>
-          <a:xfrm>
-            <a:off x="2515957" y="4293017"/>
-            <a:ext cx="64008" cy="64008"/>
+          <p:cNvPr id="72" name="Oval 71"/>
+          <p:cNvSpPr/>
+          <p:nvPr/>
+        </p:nvSpPr>
+        <p:spPr>
+          <a:xfrm>
+            <a:off x="2260769" y="4254433"/>
+            <a:ext cx="73152" cy="73152"/>
           </a:xfrm>
           <a:prstGeom prst="ellipse">
             <a:avLst/>
@@ -5434,14 +5958,14 @@
       </p:sp>
       <p:sp>
         <p:nvSpPr>
-          <p:cNvPr id="60" name="Oval 59"/>
-          <p:cNvSpPr/>
-          <p:nvPr/>
-        </p:nvSpPr>
-        <p:spPr>
-          <a:xfrm>
-            <a:off x="2489687" y="4325966"/>
-            <a:ext cx="64008" cy="64008"/>
+          <p:cNvPr id="73" name="Oval 72"/>
+          <p:cNvSpPr/>
+          <p:nvPr/>
+        </p:nvSpPr>
+        <p:spPr>
+          <a:xfrm>
+            <a:off x="2394555" y="4286064"/>
+            <a:ext cx="73152" cy="73152"/>
           </a:xfrm>
           <a:prstGeom prst="ellipse">
             <a:avLst/>
@@ -5478,14 +6002,14 @@
       </p:sp>
       <p:sp>
         <p:nvSpPr>
-          <p:cNvPr id="61" name="Oval 60"/>
-          <p:cNvSpPr/>
-          <p:nvPr/>
-        </p:nvSpPr>
-        <p:spPr>
-          <a:xfrm>
-            <a:off x="2590599" y="4559006"/>
-            <a:ext cx="64008" cy="64008"/>
+          <p:cNvPr id="74" name="Oval 73"/>
+          <p:cNvSpPr/>
+          <p:nvPr/>
+        </p:nvSpPr>
+        <p:spPr>
+          <a:xfrm>
+            <a:off x="2349332" y="4509782"/>
+            <a:ext cx="73152" cy="73152"/>
           </a:xfrm>
           <a:prstGeom prst="ellipse">
             <a:avLst/>
@@ -5522,14 +6046,14 @@
       </p:sp>
       <p:sp>
         <p:nvSpPr>
-          <p:cNvPr id="62" name="Oval 61"/>
-          <p:cNvSpPr/>
-          <p:nvPr/>
-        </p:nvSpPr>
-        <p:spPr>
-          <a:xfrm>
-            <a:off x="2535501" y="4921224"/>
-            <a:ext cx="64008" cy="64008"/>
+          <p:cNvPr id="75" name="Oval 74"/>
+          <p:cNvSpPr/>
+          <p:nvPr/>
+        </p:nvSpPr>
+        <p:spPr>
+          <a:xfrm>
+            <a:off x="2288613" y="4857512"/>
+            <a:ext cx="73152" cy="73152"/>
           </a:xfrm>
           <a:prstGeom prst="ellipse">
             <a:avLst/>
@@ -5566,13 +6090,13 @@
       </p:sp>
       <p:sp>
         <p:nvSpPr>
-          <p:cNvPr id="63" name="TextBox 62"/>
+          <p:cNvPr id="76" name="TextBox 75"/>
           <p:cNvSpPr txBox="1"/>
           <p:nvPr/>
         </p:nvSpPr>
         <p:spPr>
           <a:xfrm>
-            <a:off x="3154680" y="5815584"/>
+            <a:off x="2971800" y="5724144"/>
             <a:ext cx="1097280" cy="274320"/>
           </a:xfrm>
           <a:prstGeom prst="rect">
@@ -5600,16 +6124,52 @@
           </a:p>
         </p:txBody>
       </p:sp>
+      <p:sp>
+        <p:nvSpPr>
+          <p:cNvPr id="77" name="TextBox 76"/>
+          <p:cNvSpPr txBox="1"/>
+          <p:nvPr/>
+        </p:nvSpPr>
+        <p:spPr>
+          <a:xfrm>
+            <a:off x="3017520" y="1115568"/>
+            <a:ext cx="1005840" cy="164592"/>
+          </a:xfrm>
+          <a:prstGeom prst="rect">
+            <a:avLst/>
+          </a:prstGeom>
+          <a:noFill/>
+          <a:effectLst/>
+        </p:spPr>
+        <p:txBody>
+          <a:bodyPr wrap="square" lIns="0" rIns="0" tIns="0" bIns="0" anchor="ctr">
+            <a:spAutoFit/>
+          </a:bodyPr>
+          <a:lstStyle/>
+          <a:p>
+            <a:pPr algn="ctr"/>
+            <a:r>
+              <a:rPr sz="700" b="1" i="0">
+                <a:solidFill>
+                  <a:srgbClr val="BBBBBB"/>
+                </a:solidFill>
+                <a:latin typeface="Arial"/>
+              </a:rPr>
+              <a:t>P=0.60</a:t>
+            </a:r>
+          </a:p>
+        </p:txBody>
+      </p:sp>
       <p:cxnSp>
         <p:nvCxnSpPr>
-          <p:cNvPr id="64" name="Connector 63"/>
+          <p:cNvPr id="78" name="Connector 77"/>
           <p:cNvCxnSpPr/>
           <p:nvPr/>
         </p:nvCxnSpPr>
         <p:spPr>
           <a:xfrm flipV="1">
-            <a:off x="3474720" y="3548634"/>
-            <a:ext cx="0" cy="897440"/>
+            <a:off x="3291840" y="3545678"/>
+            <a:ext cx="0" cy="861542"/>
           </a:xfrm>
           <a:prstGeom prst="line">
             <a:avLst/>
@@ -5638,13 +6198,13 @@
       </p:cxnSp>
       <p:cxnSp>
         <p:nvCxnSpPr>
-          <p:cNvPr id="65" name="Connector 64"/>
+          <p:cNvPr id="79" name="Connector 78"/>
           <p:cNvCxnSpPr/>
           <p:nvPr/>
         </p:nvCxnSpPr>
         <p:spPr>
           <a:xfrm>
-            <a:off x="3387852" y="4446074"/>
+            <a:off x="3204972" y="4407220"/>
             <a:ext cx="173736" cy="0"/>
           </a:xfrm>
           <a:prstGeom prst="line">
@@ -5674,13 +6234,13 @@
       </p:cxnSp>
       <p:cxnSp>
         <p:nvCxnSpPr>
-          <p:cNvPr id="66" name="Connector 65"/>
+          <p:cNvPr id="80" name="Connector 79"/>
           <p:cNvCxnSpPr/>
           <p:nvPr/>
         </p:nvCxnSpPr>
         <p:spPr>
           <a:xfrm>
-            <a:off x="3387852" y="3548634"/>
+            <a:off x="3204972" y="3545678"/>
             <a:ext cx="173736" cy="0"/>
           </a:xfrm>
           <a:prstGeom prst="line">
@@ -5710,13 +6270,13 @@
       </p:cxnSp>
       <p:sp>
         <p:nvSpPr>
-          <p:cNvPr id="67" name="Rectangle 66"/>
-          <p:cNvSpPr/>
-          <p:nvPr/>
-        </p:nvSpPr>
-        <p:spPr>
-          <a:xfrm>
-            <a:off x="3300984" y="3994612"/>
+          <p:cNvPr id="81" name="Rectangle 80"/>
+          <p:cNvSpPr/>
+          <p:nvPr/>
+        </p:nvSpPr>
+        <p:spPr>
+          <a:xfrm>
+            <a:off x="3118104" y="3973817"/>
             <a:ext cx="347472" cy="1"/>
           </a:xfrm>
           <a:prstGeom prst="rect">
@@ -5754,13 +6314,13 @@
       </p:sp>
       <p:cxnSp>
         <p:nvCxnSpPr>
-          <p:cNvPr id="68" name="Connector 67"/>
+          <p:cNvPr id="82" name="Connector 81"/>
           <p:cNvCxnSpPr/>
           <p:nvPr/>
         </p:nvCxnSpPr>
         <p:spPr>
           <a:xfrm>
-            <a:off x="3300984" y="3902660"/>
+            <a:off x="3118104" y="3885543"/>
             <a:ext cx="347472" cy="0"/>
           </a:xfrm>
           <a:prstGeom prst="line">
@@ -5790,14 +6350,14 @@
       </p:cxnSp>
       <p:sp>
         <p:nvSpPr>
-          <p:cNvPr id="69" name="Oval 68"/>
-          <p:cNvSpPr/>
-          <p:nvPr/>
-        </p:nvSpPr>
-        <p:spPr>
-          <a:xfrm>
-            <a:off x="3528369" y="3516630"/>
-            <a:ext cx="64008" cy="64008"/>
+          <p:cNvPr id="83" name="Oval 82"/>
+          <p:cNvSpPr/>
+          <p:nvPr/>
+        </p:nvSpPr>
+        <p:spPr>
+          <a:xfrm>
+            <a:off x="3311456" y="3509102"/>
+            <a:ext cx="73152" cy="73152"/>
           </a:xfrm>
           <a:prstGeom prst="ellipse">
             <a:avLst/>
@@ -5834,14 +6394,14 @@
       </p:sp>
       <p:sp>
         <p:nvSpPr>
-          <p:cNvPr id="70" name="Oval 69"/>
-          <p:cNvSpPr/>
-          <p:nvPr/>
-        </p:nvSpPr>
-        <p:spPr>
-          <a:xfrm>
-            <a:off x="3490767" y="3656984"/>
-            <a:ext cx="64008" cy="64008"/>
+          <p:cNvPr id="84" name="Oval 83"/>
+          <p:cNvSpPr/>
+          <p:nvPr/>
+        </p:nvSpPr>
+        <p:spPr>
+          <a:xfrm>
+            <a:off x="3207418" y="3643841"/>
+            <a:ext cx="73152" cy="73152"/>
           </a:xfrm>
           <a:prstGeom prst="ellipse">
             <a:avLst/>
@@ -5878,14 +6438,14 @@
       </p:sp>
       <p:sp>
         <p:nvSpPr>
-          <p:cNvPr id="71" name="Oval 70"/>
-          <p:cNvSpPr/>
-          <p:nvPr/>
-        </p:nvSpPr>
-        <p:spPr>
-          <a:xfrm>
-            <a:off x="3380128" y="3751898"/>
-            <a:ext cx="64008" cy="64008"/>
+          <p:cNvPr id="85" name="Oval 84"/>
+          <p:cNvSpPr/>
+          <p:nvPr/>
+        </p:nvSpPr>
+        <p:spPr>
+          <a:xfrm>
+            <a:off x="3282494" y="3734959"/>
+            <a:ext cx="73152" cy="73152"/>
           </a:xfrm>
           <a:prstGeom prst="ellipse">
             <a:avLst/>
@@ -5922,14 +6482,14 @@
       </p:sp>
       <p:sp>
         <p:nvSpPr>
-          <p:cNvPr id="72" name="Oval 71"/>
-          <p:cNvSpPr/>
-          <p:nvPr/>
-        </p:nvSpPr>
-        <p:spPr>
-          <a:xfrm>
-            <a:off x="3485312" y="3753314"/>
-            <a:ext cx="64008" cy="64008"/>
+          <p:cNvPr id="86" name="Oval 85"/>
+          <p:cNvSpPr/>
+          <p:nvPr/>
+        </p:nvSpPr>
+        <p:spPr>
+          <a:xfrm>
+            <a:off x="3292567" y="3736318"/>
+            <a:ext cx="73152" cy="73152"/>
           </a:xfrm>
           <a:prstGeom prst="ellipse">
             <a:avLst/>
@@ -5966,14 +6526,14 @@
       </p:sp>
       <p:sp>
         <p:nvSpPr>
-          <p:cNvPr id="73" name="Oval 72"/>
-          <p:cNvSpPr/>
-          <p:nvPr/>
-        </p:nvSpPr>
-        <p:spPr>
-          <a:xfrm>
-            <a:off x="3407846" y="3788531"/>
-            <a:ext cx="64008" cy="64008"/>
+          <p:cNvPr id="87" name="Oval 86"/>
+          <p:cNvSpPr/>
+          <p:nvPr/>
+        </p:nvSpPr>
+        <p:spPr>
+          <a:xfrm>
+            <a:off x="3187848" y="3770126"/>
+            <a:ext cx="73152" cy="73152"/>
           </a:xfrm>
           <a:prstGeom prst="ellipse">
             <a:avLst/>
@@ -6010,14 +6570,14 @@
       </p:sp>
       <p:sp>
         <p:nvSpPr>
-          <p:cNvPr id="74" name="Oval 73"/>
-          <p:cNvSpPr/>
-          <p:nvPr/>
-        </p:nvSpPr>
-        <p:spPr>
-          <a:xfrm>
-            <a:off x="3504783" y="3814273"/>
-            <a:ext cx="64008" cy="64008"/>
+          <p:cNvPr id="88" name="Oval 87"/>
+          <p:cNvSpPr/>
+          <p:nvPr/>
+        </p:nvSpPr>
+        <p:spPr>
+          <a:xfrm>
+            <a:off x="3213397" y="3794839"/>
+            <a:ext cx="73152" cy="73152"/>
           </a:xfrm>
           <a:prstGeom prst="ellipse">
             <a:avLst/>
@@ -6054,14 +6614,14 @@
       </p:sp>
       <p:sp>
         <p:nvSpPr>
-          <p:cNvPr id="75" name="Oval 74"/>
-          <p:cNvSpPr/>
-          <p:nvPr/>
-        </p:nvSpPr>
-        <p:spPr>
-          <a:xfrm>
-            <a:off x="3436850" y="3830519"/>
-            <a:ext cx="64008" cy="64008"/>
+          <p:cNvPr id="89" name="Oval 88"/>
+          <p:cNvSpPr/>
+          <p:nvPr/>
+        </p:nvSpPr>
+        <p:spPr>
+          <a:xfrm>
+            <a:off x="3220921" y="3810435"/>
+            <a:ext cx="73152" cy="73152"/>
           </a:xfrm>
           <a:prstGeom prst="ellipse">
             <a:avLst/>
@@ -6098,14 +6658,14 @@
       </p:sp>
       <p:sp>
         <p:nvSpPr>
-          <p:cNvPr id="76" name="Oval 75"/>
-          <p:cNvSpPr/>
-          <p:nvPr/>
-        </p:nvSpPr>
-        <p:spPr>
-          <a:xfrm>
-            <a:off x="3476403" y="3852076"/>
-            <a:ext cx="64008" cy="64008"/>
+          <p:cNvPr id="90" name="Oval 89"/>
+          <p:cNvSpPr/>
+          <p:nvPr/>
+        </p:nvSpPr>
+        <p:spPr>
+          <a:xfrm>
+            <a:off x="3204195" y="3831129"/>
+            <a:ext cx="73152" cy="73152"/>
           </a:xfrm>
           <a:prstGeom prst="ellipse">
             <a:avLst/>
@@ -6142,14 +6702,14 @@
       </p:sp>
       <p:sp>
         <p:nvSpPr>
-          <p:cNvPr id="77" name="Oval 76"/>
-          <p:cNvSpPr/>
-          <p:nvPr/>
-        </p:nvSpPr>
-        <p:spPr>
-          <a:xfrm>
-            <a:off x="3435775" y="3870656"/>
-            <a:ext cx="64008" cy="64008"/>
+          <p:cNvPr id="91" name="Oval 90"/>
+          <p:cNvSpPr/>
+          <p:nvPr/>
+        </p:nvSpPr>
+        <p:spPr>
+          <a:xfrm>
+            <a:off x="3315658" y="3848967"/>
+            <a:ext cx="73152" cy="73152"/>
           </a:xfrm>
           <a:prstGeom prst="ellipse">
             <a:avLst/>
@@ -6186,14 +6746,14 @@
       </p:sp>
       <p:sp>
         <p:nvSpPr>
-          <p:cNvPr id="78" name="Oval 77"/>
-          <p:cNvSpPr/>
-          <p:nvPr/>
-        </p:nvSpPr>
-        <p:spPr>
-          <a:xfrm>
-            <a:off x="3479921" y="3896527"/>
-            <a:ext cx="64008" cy="64008"/>
+          <p:cNvPr id="92" name="Oval 91"/>
+          <p:cNvSpPr/>
+          <p:nvPr/>
+        </p:nvSpPr>
+        <p:spPr>
+          <a:xfrm>
+            <a:off x="3313275" y="3873802"/>
+            <a:ext cx="73152" cy="73152"/>
           </a:xfrm>
           <a:prstGeom prst="ellipse">
             <a:avLst/>
@@ -6230,14 +6790,14 @@
       </p:sp>
       <p:sp>
         <p:nvSpPr>
-          <p:cNvPr id="79" name="Oval 78"/>
-          <p:cNvSpPr/>
-          <p:nvPr/>
-        </p:nvSpPr>
-        <p:spPr>
-          <a:xfrm>
-            <a:off x="3514700" y="3909242"/>
-            <a:ext cx="64008" cy="64008"/>
+          <p:cNvPr id="93" name="Oval 92"/>
+          <p:cNvSpPr/>
+          <p:nvPr/>
+        </p:nvSpPr>
+        <p:spPr>
+          <a:xfrm>
+            <a:off x="3203529" y="3886009"/>
+            <a:ext cx="73152" cy="73152"/>
           </a:xfrm>
           <a:prstGeom prst="ellipse">
             <a:avLst/>
@@ -6274,14 +6834,14 @@
       </p:sp>
       <p:sp>
         <p:nvSpPr>
-          <p:cNvPr id="80" name="Oval 79"/>
-          <p:cNvSpPr/>
-          <p:nvPr/>
-        </p:nvSpPr>
-        <p:spPr>
-          <a:xfrm>
-            <a:off x="3427182" y="3932258"/>
-            <a:ext cx="64008" cy="64008"/>
+          <p:cNvPr id="94" name="Oval 93"/>
+          <p:cNvSpPr/>
+          <p:nvPr/>
+        </p:nvSpPr>
+        <p:spPr>
+          <a:xfrm>
+            <a:off x="3336547" y="3908104"/>
+            <a:ext cx="73152" cy="73152"/>
           </a:xfrm>
           <a:prstGeom prst="ellipse">
             <a:avLst/>
@@ -6318,14 +6878,14 @@
       </p:sp>
       <p:sp>
         <p:nvSpPr>
-          <p:cNvPr id="81" name="Oval 80"/>
-          <p:cNvSpPr/>
-          <p:nvPr/>
-        </p:nvSpPr>
-        <p:spPr>
-          <a:xfrm>
-            <a:off x="3484010" y="3962608"/>
-            <a:ext cx="64008" cy="64008"/>
+          <p:cNvPr id="95" name="Oval 94"/>
+          <p:cNvSpPr/>
+          <p:nvPr/>
+        </p:nvSpPr>
+        <p:spPr>
+          <a:xfrm>
+            <a:off x="3169418" y="3937241"/>
+            <a:ext cx="73152" cy="73152"/>
           </a:xfrm>
           <a:prstGeom prst="ellipse">
             <a:avLst/>
@@ -6362,14 +6922,14 @@
       </p:sp>
       <p:sp>
         <p:nvSpPr>
-          <p:cNvPr id="82" name="Oval 81"/>
-          <p:cNvSpPr/>
-          <p:nvPr/>
-        </p:nvSpPr>
-        <p:spPr>
-          <a:xfrm>
-            <a:off x="3514018" y="4157865"/>
-            <a:ext cx="64008" cy="64008"/>
+          <p:cNvPr id="96" name="Oval 95"/>
+          <p:cNvSpPr/>
+          <p:nvPr/>
+        </p:nvSpPr>
+        <p:spPr>
+          <a:xfrm>
+            <a:off x="3193222" y="4124688"/>
+            <a:ext cx="73152" cy="73152"/>
           </a:xfrm>
           <a:prstGeom prst="ellipse">
             <a:avLst/>
@@ -6406,14 +6966,14 @@
       </p:sp>
       <p:sp>
         <p:nvSpPr>
-          <p:cNvPr id="83" name="Oval 82"/>
-          <p:cNvSpPr/>
-          <p:nvPr/>
-        </p:nvSpPr>
-        <p:spPr>
-          <a:xfrm>
-            <a:off x="3526855" y="4270001"/>
-            <a:ext cx="64008" cy="64008"/>
+          <p:cNvPr id="97" name="Oval 96"/>
+          <p:cNvSpPr/>
+          <p:nvPr/>
+        </p:nvSpPr>
+        <p:spPr>
+          <a:xfrm>
+            <a:off x="3290315" y="4232337"/>
+            <a:ext cx="73152" cy="73152"/>
           </a:xfrm>
           <a:prstGeom prst="ellipse">
             <a:avLst/>
@@ -6450,14 +7010,14 @@
       </p:sp>
       <p:sp>
         <p:nvSpPr>
-          <p:cNvPr id="84" name="Oval 83"/>
-          <p:cNvSpPr/>
-          <p:nvPr/>
-        </p:nvSpPr>
-        <p:spPr>
-          <a:xfrm>
-            <a:off x="3358121" y="4300560"/>
-            <a:ext cx="64008" cy="64008"/>
+          <p:cNvPr id="98" name="Oval 97"/>
+          <p:cNvSpPr/>
+          <p:nvPr/>
+        </p:nvSpPr>
+        <p:spPr>
+          <a:xfrm>
+            <a:off x="3178395" y="4261674"/>
+            <a:ext cx="73152" cy="73152"/>
           </a:xfrm>
           <a:prstGeom prst="ellipse">
             <a:avLst/>
@@ -6494,14 +7054,14 @@
       </p:sp>
       <p:sp>
         <p:nvSpPr>
-          <p:cNvPr id="85" name="Oval 84"/>
-          <p:cNvSpPr/>
-          <p:nvPr/>
-        </p:nvSpPr>
-        <p:spPr>
-          <a:xfrm>
-            <a:off x="3356781" y="4414070"/>
-            <a:ext cx="64008" cy="64008"/>
+          <p:cNvPr id="99" name="Oval 98"/>
+          <p:cNvSpPr/>
+          <p:nvPr/>
+        </p:nvSpPr>
+        <p:spPr>
+          <a:xfrm>
+            <a:off x="3205024" y="4370644"/>
+            <a:ext cx="73152" cy="73152"/>
           </a:xfrm>
           <a:prstGeom prst="ellipse">
             <a:avLst/>
@@ -6538,14 +7098,14 @@
       </p:sp>
       <p:cxnSp>
         <p:nvCxnSpPr>
-          <p:cNvPr id="86" name="Connector 85"/>
+          <p:cNvPr id="100" name="Connector 99"/>
           <p:cNvCxnSpPr/>
           <p:nvPr/>
         </p:nvCxnSpPr>
         <p:spPr>
           <a:xfrm flipV="1">
-            <a:off x="3931920" y="3596422"/>
-            <a:ext cx="0" cy="1207537"/>
+            <a:off x="3749040" y="3591554"/>
+            <a:ext cx="0" cy="1159235"/>
           </a:xfrm>
           <a:prstGeom prst="line">
             <a:avLst/>
@@ -6574,13 +7134,13 @@
       </p:cxnSp>
       <p:cxnSp>
         <p:nvCxnSpPr>
-          <p:cNvPr id="87" name="Connector 86"/>
+          <p:cNvPr id="101" name="Connector 100"/>
           <p:cNvCxnSpPr/>
           <p:nvPr/>
         </p:nvCxnSpPr>
         <p:spPr>
           <a:xfrm>
-            <a:off x="3845052" y="4803959"/>
+            <a:off x="3662172" y="4750789"/>
             <a:ext cx="173736" cy="0"/>
           </a:xfrm>
           <a:prstGeom prst="line">
@@ -6610,13 +7170,13 @@
       </p:cxnSp>
       <p:cxnSp>
         <p:nvCxnSpPr>
-          <p:cNvPr id="88" name="Connector 87"/>
+          <p:cNvPr id="102" name="Connector 101"/>
           <p:cNvCxnSpPr/>
           <p:nvPr/>
         </p:nvCxnSpPr>
         <p:spPr>
           <a:xfrm>
-            <a:off x="3845052" y="3596422"/>
+            <a:off x="3662172" y="3591554"/>
             <a:ext cx="173736" cy="0"/>
           </a:xfrm>
           <a:prstGeom prst="line">
@@ -6646,13 +7206,13 @@
       </p:cxnSp>
       <p:sp>
         <p:nvSpPr>
-          <p:cNvPr id="89" name="Rectangle 88"/>
-          <p:cNvSpPr/>
-          <p:nvPr/>
-        </p:nvSpPr>
-        <p:spPr>
-          <a:xfrm>
-            <a:off x="3758184" y="4056748"/>
+          <p:cNvPr id="103" name="Rectangle 102"/>
+          <p:cNvSpPr/>
+          <p:nvPr/>
+        </p:nvSpPr>
+        <p:spPr>
+          <a:xfrm>
+            <a:off x="3575304" y="4033467"/>
             <a:ext cx="347472" cy="1"/>
           </a:xfrm>
           <a:prstGeom prst="rect">
@@ -6690,13 +7250,13 @@
       </p:sp>
       <p:cxnSp>
         <p:nvCxnSpPr>
-          <p:cNvPr id="90" name="Connector 89"/>
+          <p:cNvPr id="104" name="Connector 103"/>
           <p:cNvCxnSpPr/>
           <p:nvPr/>
         </p:nvCxnSpPr>
         <p:spPr>
           <a:xfrm>
-            <a:off x="3758184" y="3942390"/>
+            <a:off x="3575304" y="3923683"/>
             <a:ext cx="347472" cy="0"/>
           </a:xfrm>
           <a:prstGeom prst="line">
@@ -6726,14 +7286,14 @@
       </p:cxnSp>
       <p:sp>
         <p:nvSpPr>
-          <p:cNvPr id="91" name="Oval 90"/>
-          <p:cNvSpPr/>
-          <p:nvPr/>
-        </p:nvSpPr>
-        <p:spPr>
-          <a:xfrm>
-            <a:off x="3871084" y="3564418"/>
-            <a:ext cx="64008" cy="64008"/>
+          <p:cNvPr id="105" name="Oval 104"/>
+          <p:cNvSpPr/>
+          <p:nvPr/>
+        </p:nvSpPr>
+        <p:spPr>
+          <a:xfrm>
+            <a:off x="3695807" y="3554978"/>
+            <a:ext cx="73152" cy="73152"/>
           </a:xfrm>
           <a:prstGeom prst="ellipse">
             <a:avLst/>
@@ -6770,14 +7330,14 @@
       </p:sp>
       <p:sp>
         <p:nvSpPr>
-          <p:cNvPr id="92" name="Oval 91"/>
-          <p:cNvSpPr/>
-          <p:nvPr/>
-        </p:nvSpPr>
-        <p:spPr>
-          <a:xfrm>
-            <a:off x="3899535" y="3720014"/>
-            <a:ext cx="64008" cy="64008"/>
+          <p:cNvPr id="106" name="Oval 105"/>
+          <p:cNvSpPr/>
+          <p:nvPr/>
+        </p:nvSpPr>
+        <p:spPr>
+          <a:xfrm>
+            <a:off x="3661948" y="3704350"/>
+            <a:ext cx="73152" cy="73152"/>
           </a:xfrm>
           <a:prstGeom prst="ellipse">
             <a:avLst/>
@@ -6814,14 +7374,14 @@
       </p:sp>
       <p:sp>
         <p:nvSpPr>
-          <p:cNvPr id="93" name="Oval 92"/>
-          <p:cNvSpPr/>
-          <p:nvPr/>
-        </p:nvSpPr>
-        <p:spPr>
-          <a:xfrm>
-            <a:off x="3873066" y="3720775"/>
-            <a:ext cx="64008" cy="64008"/>
+          <p:cNvPr id="107" name="Oval 106"/>
+          <p:cNvSpPr/>
+          <p:nvPr/>
+        </p:nvSpPr>
+        <p:spPr>
+          <a:xfrm>
+            <a:off x="3726471" y="3705080"/>
+            <a:ext cx="73152" cy="73152"/>
           </a:xfrm>
           <a:prstGeom prst="ellipse">
             <a:avLst/>
@@ -6858,14 +7418,14 @@
       </p:sp>
       <p:sp>
         <p:nvSpPr>
-          <p:cNvPr id="94" name="Oval 93"/>
-          <p:cNvSpPr/>
-          <p:nvPr/>
-        </p:nvSpPr>
-        <p:spPr>
-          <a:xfrm>
-            <a:off x="3961037" y="3747107"/>
-            <a:ext cx="64008" cy="64008"/>
+          <p:cNvPr id="108" name="Oval 107"/>
+          <p:cNvSpPr/>
+          <p:nvPr/>
+        </p:nvSpPr>
+        <p:spPr>
+          <a:xfrm>
+            <a:off x="3725890" y="3730359"/>
+            <a:ext cx="73152" cy="73152"/>
           </a:xfrm>
           <a:prstGeom prst="ellipse">
             <a:avLst/>
@@ -6902,14 +7462,14 @@
       </p:sp>
       <p:sp>
         <p:nvSpPr>
-          <p:cNvPr id="95" name="Oval 94"/>
-          <p:cNvSpPr/>
-          <p:nvPr/>
-        </p:nvSpPr>
-        <p:spPr>
-          <a:xfrm>
-            <a:off x="3828171" y="3865539"/>
-            <a:ext cx="64008" cy="64008"/>
+          <p:cNvPr id="109" name="Oval 108"/>
+          <p:cNvSpPr/>
+          <p:nvPr/>
+        </p:nvSpPr>
+        <p:spPr>
+          <a:xfrm>
+            <a:off x="3692511" y="3844054"/>
+            <a:ext cx="73152" cy="73152"/>
           </a:xfrm>
           <a:prstGeom prst="ellipse">
             <a:avLst/>
@@ -6946,14 +7506,14 @@
       </p:sp>
       <p:sp>
         <p:nvSpPr>
-          <p:cNvPr id="96" name="Oval 95"/>
-          <p:cNvSpPr/>
-          <p:nvPr/>
-        </p:nvSpPr>
-        <p:spPr>
-          <a:xfrm>
-            <a:off x="3959453" y="3893284"/>
-            <a:ext cx="64008" cy="64008"/>
+          <p:cNvPr id="110" name="Oval 109"/>
+          <p:cNvSpPr/>
+          <p:nvPr/>
+        </p:nvSpPr>
+        <p:spPr>
+          <a:xfrm>
+            <a:off x="3631811" y="3870689"/>
+            <a:ext cx="73152" cy="73152"/>
           </a:xfrm>
           <a:prstGeom prst="ellipse">
             <a:avLst/>
@@ -6990,14 +7550,14 @@
       </p:sp>
       <p:sp>
         <p:nvSpPr>
-          <p:cNvPr id="97" name="Oval 96"/>
-          <p:cNvSpPr/>
-          <p:nvPr/>
-        </p:nvSpPr>
-        <p:spPr>
-          <a:xfrm>
-            <a:off x="3972338" y="3894107"/>
-            <a:ext cx="64008" cy="64008"/>
+          <p:cNvPr id="111" name="Oval 110"/>
+          <p:cNvSpPr/>
+          <p:nvPr/>
+        </p:nvSpPr>
+        <p:spPr>
+          <a:xfrm>
+            <a:off x="3731793" y="3871480"/>
+            <a:ext cx="73152" cy="73152"/>
           </a:xfrm>
           <a:prstGeom prst="ellipse">
             <a:avLst/>
@@ -7034,14 +7594,14 @@
       </p:sp>
       <p:sp>
         <p:nvSpPr>
-          <p:cNvPr id="98" name="Oval 97"/>
-          <p:cNvSpPr/>
-          <p:nvPr/>
-        </p:nvSpPr>
-        <p:spPr>
-          <a:xfrm>
-            <a:off x="3828051" y="3898876"/>
-            <a:ext cx="64008" cy="64008"/>
+          <p:cNvPr id="112" name="Oval 111"/>
+          <p:cNvSpPr/>
+          <p:nvPr/>
+        </p:nvSpPr>
+        <p:spPr>
+          <a:xfrm>
+            <a:off x="3748670" y="3876058"/>
+            <a:ext cx="73152" cy="73152"/>
           </a:xfrm>
           <a:prstGeom prst="ellipse">
             <a:avLst/>
@@ -7078,14 +7638,14 @@
       </p:sp>
       <p:sp>
         <p:nvSpPr>
-          <p:cNvPr id="99" name="Oval 98"/>
-          <p:cNvSpPr/>
-          <p:nvPr/>
-        </p:nvSpPr>
-        <p:spPr>
-          <a:xfrm>
-            <a:off x="3867173" y="3921896"/>
-            <a:ext cx="64008" cy="64008"/>
+          <p:cNvPr id="113" name="Oval 112"/>
+          <p:cNvSpPr/>
+          <p:nvPr/>
+        </p:nvSpPr>
+        <p:spPr>
+          <a:xfrm>
+            <a:off x="3722611" y="3898157"/>
+            <a:ext cx="73152" cy="73152"/>
           </a:xfrm>
           <a:prstGeom prst="ellipse">
             <a:avLst/>
@@ -7122,14 +7682,14 @@
       </p:sp>
       <p:sp>
         <p:nvSpPr>
-          <p:cNvPr id="100" name="Oval 99"/>
-          <p:cNvSpPr/>
-          <p:nvPr/>
-        </p:nvSpPr>
-        <p:spPr>
-          <a:xfrm>
-            <a:off x="3932865" y="3956602"/>
-            <a:ext cx="64008" cy="64008"/>
+          <p:cNvPr id="114" name="Oval 113"/>
+          <p:cNvSpPr/>
+          <p:nvPr/>
+        </p:nvSpPr>
+        <p:spPr>
+          <a:xfrm>
+            <a:off x="3726374" y="3931475"/>
+            <a:ext cx="73152" cy="73152"/>
           </a:xfrm>
           <a:prstGeom prst="ellipse">
             <a:avLst/>
@@ -7166,14 +7726,14 @@
       </p:sp>
       <p:sp>
         <p:nvSpPr>
-          <p:cNvPr id="101" name="Oval 100"/>
-          <p:cNvSpPr/>
-          <p:nvPr/>
-        </p:nvSpPr>
-        <p:spPr>
-          <a:xfrm>
-            <a:off x="3854302" y="3961365"/>
-            <a:ext cx="64008" cy="64008"/>
+          <p:cNvPr id="115" name="Oval 114"/>
+          <p:cNvSpPr/>
+          <p:nvPr/>
+        </p:nvSpPr>
+        <p:spPr>
+          <a:xfrm>
+            <a:off x="3661811" y="3936047"/>
+            <a:ext cx="73152" cy="73152"/>
           </a:xfrm>
           <a:prstGeom prst="ellipse">
             <a:avLst/>
@@ -7210,14 +7770,14 @@
       </p:sp>
       <p:sp>
         <p:nvSpPr>
-          <p:cNvPr id="102" name="Oval 101"/>
-          <p:cNvSpPr/>
-          <p:nvPr/>
-        </p:nvSpPr>
-        <p:spPr>
-          <a:xfrm>
-            <a:off x="3931094" y="4005457"/>
-            <a:ext cx="64008" cy="64008"/>
+          <p:cNvPr id="116" name="Oval 115"/>
+          <p:cNvSpPr/>
+          <p:nvPr/>
+        </p:nvSpPr>
+        <p:spPr>
+          <a:xfrm>
+            <a:off x="3756357" y="3978376"/>
+            <a:ext cx="73152" cy="73152"/>
           </a:xfrm>
           <a:prstGeom prst="ellipse">
             <a:avLst/>
@@ -7254,14 +7814,14 @@
       </p:sp>
       <p:sp>
         <p:nvSpPr>
-          <p:cNvPr id="103" name="Oval 102"/>
-          <p:cNvSpPr/>
-          <p:nvPr/>
-        </p:nvSpPr>
-        <p:spPr>
-          <a:xfrm>
-            <a:off x="3874535" y="4082602"/>
-            <a:ext cx="64008" cy="64008"/>
+          <p:cNvPr id="117" name="Oval 116"/>
+          <p:cNvSpPr/>
+          <p:nvPr/>
+        </p:nvSpPr>
+        <p:spPr>
+          <a:xfrm>
+            <a:off x="3770936" y="4052435"/>
+            <a:ext cx="73152" cy="73152"/>
           </a:xfrm>
           <a:prstGeom prst="ellipse">
             <a:avLst/>
@@ -7298,14 +7858,14 @@
       </p:sp>
       <p:sp>
         <p:nvSpPr>
-          <p:cNvPr id="104" name="Oval 103"/>
-          <p:cNvSpPr/>
-          <p:nvPr/>
-        </p:nvSpPr>
-        <p:spPr>
-          <a:xfrm>
-            <a:off x="3853572" y="4154595"/>
-            <a:ext cx="64008" cy="64008"/>
+          <p:cNvPr id="118" name="Oval 117"/>
+          <p:cNvSpPr/>
+          <p:nvPr/>
+        </p:nvSpPr>
+        <p:spPr>
+          <a:xfrm>
+            <a:off x="3772999" y="4121548"/>
+            <a:ext cx="73152" cy="73152"/>
           </a:xfrm>
           <a:prstGeom prst="ellipse">
             <a:avLst/>
@@ -7342,14 +7902,14 @@
       </p:sp>
       <p:sp>
         <p:nvSpPr>
-          <p:cNvPr id="105" name="Oval 104"/>
-          <p:cNvSpPr/>
-          <p:nvPr/>
-        </p:nvSpPr>
-        <p:spPr>
-          <a:xfrm>
-            <a:off x="3840026" y="4572726"/>
-            <a:ext cx="64008" cy="64008"/>
+          <p:cNvPr id="119" name="Oval 118"/>
+          <p:cNvSpPr/>
+          <p:nvPr/>
+        </p:nvSpPr>
+        <p:spPr>
+          <a:xfrm>
+            <a:off x="3766762" y="4522953"/>
+            <a:ext cx="73152" cy="73152"/>
           </a:xfrm>
           <a:prstGeom prst="ellipse">
             <a:avLst/>
@@ -7386,14 +7946,14 @@
       </p:sp>
       <p:sp>
         <p:nvSpPr>
-          <p:cNvPr id="106" name="Oval 105"/>
-          <p:cNvSpPr/>
-          <p:nvPr/>
-        </p:nvSpPr>
-        <p:spPr>
-          <a:xfrm>
-            <a:off x="3909758" y="4771955"/>
-            <a:ext cx="64008" cy="64008"/>
+          <p:cNvPr id="120" name="Oval 119"/>
+          <p:cNvSpPr/>
+          <p:nvPr/>
+        </p:nvSpPr>
+        <p:spPr>
+          <a:xfrm>
+            <a:off x="3676138" y="4714213"/>
+            <a:ext cx="73152" cy="73152"/>
           </a:xfrm>
           <a:prstGeom prst="ellipse">
             <a:avLst/>
@@ -7430,13 +7990,13 @@
       </p:sp>
       <p:sp>
         <p:nvSpPr>
-          <p:cNvPr id="107" name="TextBox 106"/>
+          <p:cNvPr id="121" name="TextBox 120"/>
           <p:cNvSpPr txBox="1"/>
           <p:nvPr/>
         </p:nvSpPr>
         <p:spPr>
           <a:xfrm>
-            <a:off x="4526280" y="5815584"/>
+            <a:off x="4343400" y="5724144"/>
             <a:ext cx="1097280" cy="274320"/>
           </a:xfrm>
           <a:prstGeom prst="rect">
@@ -7464,16 +8024,52 @@
           </a:p>
         </p:txBody>
       </p:sp>
+      <p:sp>
+        <p:nvSpPr>
+          <p:cNvPr id="122" name="TextBox 121"/>
+          <p:cNvSpPr txBox="1"/>
+          <p:nvPr/>
+        </p:nvSpPr>
+        <p:spPr>
+          <a:xfrm>
+            <a:off x="4389120" y="1115568"/>
+            <a:ext cx="1005840" cy="164592"/>
+          </a:xfrm>
+          <a:prstGeom prst="rect">
+            <a:avLst/>
+          </a:prstGeom>
+          <a:noFill/>
+          <a:effectLst/>
+        </p:spPr>
+        <p:txBody>
+          <a:bodyPr wrap="square" lIns="0" rIns="0" tIns="0" bIns="0" anchor="ctr">
+            <a:spAutoFit/>
+          </a:bodyPr>
+          <a:lstStyle/>
+          <a:p>
+            <a:pPr algn="ctr"/>
+            <a:r>
+              <a:rPr sz="700" b="1" i="0">
+                <a:solidFill>
+                  <a:srgbClr val="BBBBBB"/>
+                </a:solidFill>
+                <a:latin typeface="Arial"/>
+              </a:rPr>
+              <a:t>P=0.07</a:t>
+            </a:r>
+          </a:p>
+        </p:txBody>
+      </p:sp>
       <p:cxnSp>
         <p:nvCxnSpPr>
-          <p:cNvPr id="108" name="Connector 107"/>
+          <p:cNvPr id="123" name="Connector 122"/>
           <p:cNvCxnSpPr/>
           <p:nvPr/>
         </p:nvCxnSpPr>
         <p:spPr>
           <a:xfrm flipV="1">
-            <a:off x="4846320" y="4521830"/>
-            <a:ext cx="0" cy="1238890"/>
+            <a:off x="4663440" y="4479946"/>
+            <a:ext cx="0" cy="1189334"/>
           </a:xfrm>
           <a:prstGeom prst="line">
             <a:avLst/>
@@ -7502,13 +8098,13 @@
       </p:cxnSp>
       <p:cxnSp>
         <p:nvCxnSpPr>
-          <p:cNvPr id="109" name="Connector 108"/>
+          <p:cNvPr id="124" name="Connector 123"/>
           <p:cNvCxnSpPr/>
           <p:nvPr/>
         </p:nvCxnSpPr>
         <p:spPr>
           <a:xfrm>
-            <a:off x="4759452" y="5760720"/>
+            <a:off x="4576572" y="5669280"/>
             <a:ext cx="173736" cy="0"/>
           </a:xfrm>
           <a:prstGeom prst="line">
@@ -7538,13 +8134,13 @@
       </p:cxnSp>
       <p:cxnSp>
         <p:nvCxnSpPr>
-          <p:cNvPr id="110" name="Connector 109"/>
+          <p:cNvPr id="125" name="Connector 124"/>
           <p:cNvCxnSpPr/>
           <p:nvPr/>
         </p:nvCxnSpPr>
         <p:spPr>
           <a:xfrm>
-            <a:off x="4759452" y="4521830"/>
+            <a:off x="4576572" y="4479946"/>
             <a:ext cx="173736" cy="0"/>
           </a:xfrm>
           <a:prstGeom prst="line">
@@ -7574,13 +8170,13 @@
       </p:cxnSp>
       <p:sp>
         <p:nvSpPr>
-          <p:cNvPr id="111" name="Rectangle 110"/>
-          <p:cNvSpPr/>
-          <p:nvPr/>
-        </p:nvSpPr>
-        <p:spPr>
-          <a:xfrm>
-            <a:off x="4672584" y="5066627"/>
+          <p:cNvPr id="126" name="Rectangle 125"/>
+          <p:cNvSpPr/>
+          <p:nvPr/>
+        </p:nvSpPr>
+        <p:spPr>
+          <a:xfrm>
+            <a:off x="4489704" y="5002951"/>
             <a:ext cx="347472" cy="1"/>
           </a:xfrm>
           <a:prstGeom prst="rect">
@@ -7618,13 +8214,13 @@
       </p:sp>
       <p:cxnSp>
         <p:nvCxnSpPr>
-          <p:cNvPr id="112" name="Connector 111"/>
+          <p:cNvPr id="127" name="Connector 126"/>
           <p:cNvCxnSpPr/>
           <p:nvPr/>
         </p:nvCxnSpPr>
         <p:spPr>
           <a:xfrm>
-            <a:off x="4672584" y="4947557"/>
+            <a:off x="4489704" y="4888644"/>
             <a:ext cx="347472" cy="0"/>
           </a:xfrm>
           <a:prstGeom prst="line">
@@ -7654,14 +8250,14 @@
       </p:cxnSp>
       <p:sp>
         <p:nvSpPr>
-          <p:cNvPr id="113" name="Oval 112"/>
-          <p:cNvSpPr/>
-          <p:nvPr/>
-        </p:nvSpPr>
-        <p:spPr>
-          <a:xfrm>
-            <a:off x="4892360" y="4489826"/>
-            <a:ext cx="64008" cy="64008"/>
+          <p:cNvPr id="128" name="Oval 127"/>
+          <p:cNvSpPr/>
+          <p:nvPr/>
+        </p:nvSpPr>
+        <p:spPr>
+          <a:xfrm>
+            <a:off x="4665042" y="4443370"/>
+            <a:ext cx="73152" cy="73152"/>
           </a:xfrm>
           <a:prstGeom prst="ellipse">
             <a:avLst/>
@@ -7698,14 +8294,14 @@
       </p:sp>
       <p:sp>
         <p:nvSpPr>
-          <p:cNvPr id="114" name="Oval 113"/>
-          <p:cNvSpPr/>
-          <p:nvPr/>
-        </p:nvSpPr>
-        <p:spPr>
-          <a:xfrm>
-            <a:off x="4787586" y="4616433"/>
-            <a:ext cx="64008" cy="64008"/>
+          <p:cNvPr id="129" name="Oval 128"/>
+          <p:cNvSpPr/>
+          <p:nvPr/>
+        </p:nvSpPr>
+        <p:spPr>
+          <a:xfrm>
+            <a:off x="4663767" y="4564912"/>
+            <a:ext cx="73152" cy="73152"/>
           </a:xfrm>
           <a:prstGeom prst="ellipse">
             <a:avLst/>
@@ -7742,14 +8338,14 @@
       </p:sp>
       <p:sp>
         <p:nvSpPr>
-          <p:cNvPr id="115" name="Oval 114"/>
-          <p:cNvSpPr/>
-          <p:nvPr/>
-        </p:nvSpPr>
-        <p:spPr>
-          <a:xfrm>
-            <a:off x="4746313" y="4635471"/>
-            <a:ext cx="64008" cy="64008"/>
+          <p:cNvPr id="130" name="Oval 129"/>
+          <p:cNvSpPr/>
+          <p:nvPr/>
+        </p:nvSpPr>
+        <p:spPr>
+          <a:xfrm>
+            <a:off x="4633888" y="4583189"/>
+            <a:ext cx="73152" cy="73152"/>
           </a:xfrm>
           <a:prstGeom prst="ellipse">
             <a:avLst/>
@@ -7786,14 +8382,14 @@
       </p:sp>
       <p:sp>
         <p:nvSpPr>
-          <p:cNvPr id="116" name="Oval 115"/>
-          <p:cNvSpPr/>
-          <p:nvPr/>
-        </p:nvSpPr>
-        <p:spPr>
-          <a:xfrm>
-            <a:off x="4760103" y="4673479"/>
-            <a:ext cx="64008" cy="64008"/>
+          <p:cNvPr id="131" name="Oval 130"/>
+          <p:cNvSpPr/>
+          <p:nvPr/>
+        </p:nvSpPr>
+        <p:spPr>
+          <a:xfrm>
+            <a:off x="4542269" y="4619676"/>
+            <a:ext cx="73152" cy="73152"/>
           </a:xfrm>
           <a:prstGeom prst="ellipse">
             <a:avLst/>
@@ -7830,14 +8426,14 @@
       </p:sp>
       <p:sp>
         <p:nvSpPr>
-          <p:cNvPr id="117" name="Oval 116"/>
-          <p:cNvSpPr/>
-          <p:nvPr/>
-        </p:nvSpPr>
-        <p:spPr>
-          <a:xfrm>
-            <a:off x="4775437" y="4734981"/>
-            <a:ext cx="64008" cy="64008"/>
+          <p:cNvPr id="132" name="Oval 131"/>
+          <p:cNvSpPr/>
+          <p:nvPr/>
+        </p:nvSpPr>
+        <p:spPr>
+          <a:xfrm>
+            <a:off x="4632643" y="4678718"/>
+            <a:ext cx="73152" cy="73152"/>
           </a:xfrm>
           <a:prstGeom prst="ellipse">
             <a:avLst/>
@@ -7874,14 +8470,14 @@
       </p:sp>
       <p:sp>
         <p:nvSpPr>
-          <p:cNvPr id="118" name="Oval 117"/>
-          <p:cNvSpPr/>
-          <p:nvPr/>
-        </p:nvSpPr>
-        <p:spPr>
-          <a:xfrm>
-            <a:off x="4838653" y="4817890"/>
-            <a:ext cx="64008" cy="64008"/>
+          <p:cNvPr id="133" name="Oval 132"/>
+          <p:cNvSpPr/>
+          <p:nvPr/>
+        </p:nvSpPr>
+        <p:spPr>
+          <a:xfrm>
+            <a:off x="4644157" y="4758311"/>
+            <a:ext cx="73152" cy="73152"/>
           </a:xfrm>
           <a:prstGeom prst="ellipse">
             <a:avLst/>
@@ -7918,14 +8514,14 @@
       </p:sp>
       <p:sp>
         <p:nvSpPr>
-          <p:cNvPr id="119" name="Oval 118"/>
-          <p:cNvSpPr/>
-          <p:nvPr/>
-        </p:nvSpPr>
-        <p:spPr>
-          <a:xfrm>
-            <a:off x="4889644" y="4890165"/>
-            <a:ext cx="64008" cy="64008"/>
+          <p:cNvPr id="134" name="Oval 133"/>
+          <p:cNvSpPr/>
+          <p:nvPr/>
+        </p:nvSpPr>
+        <p:spPr>
+          <a:xfrm>
+            <a:off x="4648884" y="4827695"/>
+            <a:ext cx="73152" cy="73152"/>
           </a:xfrm>
           <a:prstGeom prst="ellipse">
             <a:avLst/>
@@ -7962,14 +8558,14 @@
       </p:sp>
       <p:sp>
         <p:nvSpPr>
-          <p:cNvPr id="120" name="Oval 119"/>
-          <p:cNvSpPr/>
-          <p:nvPr/>
-        </p:nvSpPr>
-        <p:spPr>
-          <a:xfrm>
-            <a:off x="4853965" y="4890165"/>
-            <a:ext cx="64008" cy="64008"/>
+          <p:cNvPr id="135" name="Oval 134"/>
+          <p:cNvSpPr/>
+          <p:nvPr/>
+        </p:nvSpPr>
+        <p:spPr>
+          <a:xfrm>
+            <a:off x="4631427" y="4827695"/>
+            <a:ext cx="73152" cy="73152"/>
           </a:xfrm>
           <a:prstGeom prst="ellipse">
             <a:avLst/>
@@ -8006,14 +8602,14 @@
       </p:sp>
       <p:sp>
         <p:nvSpPr>
-          <p:cNvPr id="121" name="Oval 120"/>
-          <p:cNvSpPr/>
-          <p:nvPr/>
-        </p:nvSpPr>
-        <p:spPr>
-          <a:xfrm>
-            <a:off x="4781212" y="4915553"/>
-            <a:ext cx="64008" cy="64008"/>
+          <p:cNvPr id="136" name="Oval 135"/>
+          <p:cNvSpPr/>
+          <p:nvPr/>
+        </p:nvSpPr>
+        <p:spPr>
+          <a:xfrm>
+            <a:off x="4688896" y="4852068"/>
+            <a:ext cx="73152" cy="73152"/>
           </a:xfrm>
           <a:prstGeom prst="ellipse">
             <a:avLst/>
@@ -8050,14 +8646,14 @@
       </p:sp>
       <p:sp>
         <p:nvSpPr>
-          <p:cNvPr id="122" name="Oval 121"/>
-          <p:cNvSpPr/>
-          <p:nvPr/>
-        </p:nvSpPr>
-        <p:spPr>
-          <a:xfrm>
-            <a:off x="4801547" y="5006428"/>
-            <a:ext cx="64008" cy="64008"/>
+          <p:cNvPr id="137" name="Oval 136"/>
+          <p:cNvSpPr/>
+          <p:nvPr/>
+        </p:nvSpPr>
+        <p:spPr>
+          <a:xfrm>
+            <a:off x="4599349" y="4939307"/>
+            <a:ext cx="73152" cy="73152"/>
           </a:xfrm>
           <a:prstGeom prst="ellipse">
             <a:avLst/>
@@ -8094,14 +8690,14 @@
       </p:sp>
       <p:sp>
         <p:nvSpPr>
-          <p:cNvPr id="123" name="Oval 122"/>
-          <p:cNvSpPr/>
-          <p:nvPr/>
-        </p:nvSpPr>
-        <p:spPr>
-          <a:xfrm>
-            <a:off x="4855931" y="5006428"/>
-            <a:ext cx="64008" cy="64008"/>
+          <p:cNvPr id="138" name="Oval 137"/>
+          <p:cNvSpPr/>
+          <p:nvPr/>
+        </p:nvSpPr>
+        <p:spPr>
+          <a:xfrm>
+            <a:off x="4559907" y="4939307"/>
+            <a:ext cx="73152" cy="73152"/>
           </a:xfrm>
           <a:prstGeom prst="ellipse">
             <a:avLst/>
@@ -8138,14 +8734,14 @@
       </p:sp>
       <p:sp>
         <p:nvSpPr>
-          <p:cNvPr id="124" name="Oval 123"/>
-          <p:cNvSpPr/>
-          <p:nvPr/>
-        </p:nvSpPr>
-        <p:spPr>
-          <a:xfrm>
-            <a:off x="4827274" y="5006428"/>
-            <a:ext cx="64008" cy="64008"/>
+          <p:cNvPr id="139" name="Oval 138"/>
+          <p:cNvSpPr/>
+          <p:nvPr/>
+        </p:nvSpPr>
+        <p:spPr>
+          <a:xfrm>
+            <a:off x="4684027" y="4939307"/>
+            <a:ext cx="73152" cy="73152"/>
           </a:xfrm>
           <a:prstGeom prst="ellipse">
             <a:avLst/>
@@ -8182,14 +8778,14 @@
       </p:sp>
       <p:sp>
         <p:nvSpPr>
-          <p:cNvPr id="125" name="Oval 124"/>
-          <p:cNvSpPr/>
-          <p:nvPr/>
-        </p:nvSpPr>
-        <p:spPr>
-          <a:xfrm>
-            <a:off x="4825696" y="5034623"/>
-            <a:ext cx="64008" cy="64008"/>
+          <p:cNvPr id="140" name="Oval 139"/>
+          <p:cNvSpPr/>
+          <p:nvPr/>
+        </p:nvSpPr>
+        <p:spPr>
+          <a:xfrm>
+            <a:off x="4551510" y="4966375"/>
+            <a:ext cx="73152" cy="73152"/>
           </a:xfrm>
           <a:prstGeom prst="ellipse">
             <a:avLst/>
@@ -8226,14 +8822,14 @@
       </p:sp>
       <p:sp>
         <p:nvSpPr>
-          <p:cNvPr id="126" name="Oval 125"/>
-          <p:cNvSpPr/>
-          <p:nvPr/>
-        </p:nvSpPr>
-        <p:spPr>
-          <a:xfrm>
-            <a:off x="4787361" y="5367572"/>
-            <a:ext cx="64008" cy="64008"/>
+          <p:cNvPr id="141" name="Oval 140"/>
+          <p:cNvSpPr/>
+          <p:nvPr/>
+        </p:nvSpPr>
+        <p:spPr>
+          <a:xfrm>
+            <a:off x="4670809" y="5286006"/>
+            <a:ext cx="73152" cy="73152"/>
           </a:xfrm>
           <a:prstGeom prst="ellipse">
             <a:avLst/>
@@ -8270,14 +8866,14 @@
       </p:sp>
       <p:sp>
         <p:nvSpPr>
-          <p:cNvPr id="127" name="Oval 126"/>
-          <p:cNvSpPr/>
-          <p:nvPr/>
-        </p:nvSpPr>
-        <p:spPr>
-          <a:xfrm>
-            <a:off x="4748606" y="5367572"/>
-            <a:ext cx="64008" cy="64008"/>
+          <p:cNvPr id="142" name="Oval 141"/>
+          <p:cNvSpPr/>
+          <p:nvPr/>
+        </p:nvSpPr>
+        <p:spPr>
+          <a:xfrm>
+            <a:off x="4691304" y="5286006"/>
+            <a:ext cx="73152" cy="73152"/>
           </a:xfrm>
           <a:prstGeom prst="ellipse">
             <a:avLst/>
@@ -8314,14 +8910,14 @@
       </p:sp>
       <p:sp>
         <p:nvSpPr>
-          <p:cNvPr id="128" name="Oval 127"/>
-          <p:cNvSpPr/>
-          <p:nvPr/>
-        </p:nvSpPr>
-        <p:spPr>
-          <a:xfrm>
-            <a:off x="4762510" y="5435728"/>
-            <a:ext cx="64008" cy="64008"/>
+          <p:cNvPr id="143" name="Oval 142"/>
+          <p:cNvSpPr/>
+          <p:nvPr/>
+        </p:nvSpPr>
+        <p:spPr>
+          <a:xfrm>
+            <a:off x="4650744" y="5351435"/>
+            <a:ext cx="73152" cy="73152"/>
           </a:xfrm>
           <a:prstGeom prst="ellipse">
             <a:avLst/>
@@ -8358,14 +8954,14 @@
       </p:sp>
       <p:sp>
         <p:nvSpPr>
-          <p:cNvPr id="129" name="Oval 128"/>
-          <p:cNvSpPr/>
-          <p:nvPr/>
-        </p:nvSpPr>
-        <p:spPr>
-          <a:xfrm>
-            <a:off x="4818016" y="5728716"/>
-            <a:ext cx="64008" cy="64008"/>
+          <p:cNvPr id="144" name="Oval 143"/>
+          <p:cNvSpPr/>
+          <p:nvPr/>
+        </p:nvSpPr>
+        <p:spPr>
+          <a:xfrm>
+            <a:off x="4652477" y="5632704"/>
+            <a:ext cx="73152" cy="73152"/>
           </a:xfrm>
           <a:prstGeom prst="ellipse">
             <a:avLst/>
@@ -8402,14 +8998,14 @@
       </p:sp>
       <p:cxnSp>
         <p:nvCxnSpPr>
-          <p:cNvPr id="130" name="Connector 129"/>
+          <p:cNvPr id="145" name="Connector 144"/>
           <p:cNvCxnSpPr/>
           <p:nvPr/>
         </p:nvCxnSpPr>
         <p:spPr>
           <a:xfrm flipV="1">
-            <a:off x="5303520" y="4823585"/>
-            <a:ext cx="0" cy="937135"/>
+            <a:off x="5120640" y="4769630"/>
+            <a:ext cx="0" cy="899650"/>
           </a:xfrm>
           <a:prstGeom prst="line">
             <a:avLst/>
@@ -8438,13 +9034,13 @@
       </p:cxnSp>
       <p:cxnSp>
         <p:nvCxnSpPr>
-          <p:cNvPr id="131" name="Connector 130"/>
+          <p:cNvPr id="146" name="Connector 145"/>
           <p:cNvCxnSpPr/>
           <p:nvPr/>
         </p:nvCxnSpPr>
         <p:spPr>
           <a:xfrm>
-            <a:off x="5216652" y="5760720"/>
+            <a:off x="5033772" y="5669280"/>
             <a:ext cx="173736" cy="0"/>
           </a:xfrm>
           <a:prstGeom prst="line">
@@ -8474,13 +9070,13 @@
       </p:cxnSp>
       <p:cxnSp>
         <p:nvCxnSpPr>
-          <p:cNvPr id="132" name="Connector 131"/>
+          <p:cNvPr id="147" name="Connector 146"/>
           <p:cNvCxnSpPr/>
           <p:nvPr/>
         </p:nvCxnSpPr>
         <p:spPr>
           <a:xfrm>
-            <a:off x="5216652" y="4823585"/>
+            <a:off x="5033772" y="4769630"/>
             <a:ext cx="173736" cy="0"/>
           </a:xfrm>
           <a:prstGeom prst="line">
@@ -8510,13 +9106,13 @@
       </p:cxnSp>
       <p:sp>
         <p:nvSpPr>
-          <p:cNvPr id="133" name="Rectangle 132"/>
-          <p:cNvSpPr/>
-          <p:nvPr/>
-        </p:nvSpPr>
-        <p:spPr>
-          <a:xfrm>
-            <a:off x="5129784" y="5258173"/>
+          <p:cNvPr id="148" name="Rectangle 147"/>
+          <p:cNvSpPr/>
+          <p:nvPr/>
+        </p:nvSpPr>
+        <p:spPr>
+          <a:xfrm>
+            <a:off x="4946904" y="5186835"/>
             <a:ext cx="347472" cy="1"/>
           </a:xfrm>
           <a:prstGeom prst="rect">
@@ -8554,13 +9150,13 @@
       </p:sp>
       <p:cxnSp>
         <p:nvCxnSpPr>
-          <p:cNvPr id="134" name="Connector 133"/>
+          <p:cNvPr id="149" name="Connector 148"/>
           <p:cNvCxnSpPr/>
           <p:nvPr/>
         </p:nvCxnSpPr>
         <p:spPr>
           <a:xfrm>
-            <a:off x="5129784" y="5158751"/>
+            <a:off x="4946904" y="5091390"/>
             <a:ext cx="347472" cy="0"/>
           </a:xfrm>
           <a:prstGeom prst="line">
@@ -8590,14 +9186,14 @@
       </p:cxnSp>
       <p:sp>
         <p:nvSpPr>
-          <p:cNvPr id="135" name="Oval 134"/>
-          <p:cNvSpPr/>
-          <p:nvPr/>
-        </p:nvSpPr>
-        <p:spPr>
-          <a:xfrm>
-            <a:off x="5328319" y="4791581"/>
-            <a:ext cx="64008" cy="64008"/>
+          <p:cNvPr id="150" name="Oval 149"/>
+          <p:cNvSpPr/>
+          <p:nvPr/>
+        </p:nvSpPr>
+        <p:spPr>
+          <a:xfrm>
+            <a:off x="5037184" y="4733054"/>
+            <a:ext cx="73152" cy="73152"/>
           </a:xfrm>
           <a:prstGeom prst="ellipse">
             <a:avLst/>
@@ -8634,14 +9230,14 @@
       </p:sp>
       <p:sp>
         <p:nvSpPr>
-          <p:cNvPr id="136" name="Oval 135"/>
-          <p:cNvSpPr/>
-          <p:nvPr/>
-        </p:nvSpPr>
-        <p:spPr>
-          <a:xfrm>
-            <a:off x="5319399" y="4818040"/>
-            <a:ext cx="64008" cy="64008"/>
+          <p:cNvPr id="151" name="Oval 150"/>
+          <p:cNvSpPr/>
+          <p:nvPr/>
+        </p:nvSpPr>
+        <p:spPr>
+          <a:xfrm>
+            <a:off x="5032772" y="4758455"/>
+            <a:ext cx="73152" cy="73152"/>
           </a:xfrm>
           <a:prstGeom prst="ellipse">
             <a:avLst/>
@@ -8678,14 +9274,14 @@
       </p:sp>
       <p:sp>
         <p:nvSpPr>
-          <p:cNvPr id="137" name="Oval 136"/>
-          <p:cNvSpPr/>
-          <p:nvPr/>
-        </p:nvSpPr>
-        <p:spPr>
-          <a:xfrm>
-            <a:off x="5257671" y="4836809"/>
-            <a:ext cx="64008" cy="64008"/>
+          <p:cNvPr id="152" name="Oval 151"/>
+          <p:cNvSpPr/>
+          <p:nvPr/>
+        </p:nvSpPr>
+        <p:spPr>
+          <a:xfrm>
+            <a:off x="5035650" y="4776473"/>
+            <a:ext cx="73152" cy="73152"/>
           </a:xfrm>
           <a:prstGeom prst="ellipse">
             <a:avLst/>
@@ -8722,14 +9318,14 @@
       </p:sp>
       <p:sp>
         <p:nvSpPr>
-          <p:cNvPr id="138" name="Oval 137"/>
-          <p:cNvSpPr/>
-          <p:nvPr/>
-        </p:nvSpPr>
-        <p:spPr>
-          <a:xfrm>
-            <a:off x="5280174" y="5096714"/>
-            <a:ext cx="64008" cy="64008"/>
+          <p:cNvPr id="153" name="Oval 152"/>
+          <p:cNvSpPr/>
+          <p:nvPr/>
+        </p:nvSpPr>
+        <p:spPr>
+          <a:xfrm>
+            <a:off x="5013946" y="5025982"/>
+            <a:ext cx="73152" cy="73152"/>
           </a:xfrm>
           <a:prstGeom prst="ellipse">
             <a:avLst/>
@@ -8766,14 +9362,14 @@
       </p:sp>
       <p:sp>
         <p:nvSpPr>
-          <p:cNvPr id="139" name="Oval 138"/>
-          <p:cNvSpPr/>
-          <p:nvPr/>
-        </p:nvSpPr>
-        <p:spPr>
-          <a:xfrm>
-            <a:off x="5209284" y="5096714"/>
-            <a:ext cx="64008" cy="64008"/>
+          <p:cNvPr id="154" name="Oval 153"/>
+          <p:cNvSpPr/>
+          <p:nvPr/>
+        </p:nvSpPr>
+        <p:spPr>
+          <a:xfrm>
+            <a:off x="5092326" y="5025982"/>
+            <a:ext cx="73152" cy="73152"/>
           </a:xfrm>
           <a:prstGeom prst="ellipse">
             <a:avLst/>
@@ -8810,14 +9406,14 @@
       </p:sp>
       <p:sp>
         <p:nvSpPr>
-          <p:cNvPr id="140" name="Oval 139"/>
-          <p:cNvSpPr/>
-          <p:nvPr/>
-        </p:nvSpPr>
-        <p:spPr>
-          <a:xfrm>
-            <a:off x="5301718" y="5125901"/>
-            <a:ext cx="64008" cy="64008"/>
+          <p:cNvPr id="155" name="Oval 154"/>
+          <p:cNvSpPr/>
+          <p:nvPr/>
+        </p:nvSpPr>
+        <p:spPr>
+          <a:xfrm>
+            <a:off x="5070966" y="5054002"/>
+            <a:ext cx="73152" cy="73152"/>
           </a:xfrm>
           <a:prstGeom prst="ellipse">
             <a:avLst/>
@@ -8854,14 +9450,14 @@
       </p:sp>
       <p:sp>
         <p:nvSpPr>
-          <p:cNvPr id="141" name="Oval 140"/>
-          <p:cNvSpPr/>
-          <p:nvPr/>
-        </p:nvSpPr>
-        <p:spPr>
-          <a:xfrm>
-            <a:off x="5265239" y="5127592"/>
-            <a:ext cx="64008" cy="64008"/>
+          <p:cNvPr id="156" name="Oval 155"/>
+          <p:cNvSpPr/>
+          <p:nvPr/>
+        </p:nvSpPr>
+        <p:spPr>
+          <a:xfrm>
+            <a:off x="5020105" y="5055625"/>
+            <a:ext cx="73152" cy="73152"/>
           </a:xfrm>
           <a:prstGeom prst="ellipse">
             <a:avLst/>
@@ -8898,14 +9494,14 @@
       </p:sp>
       <p:sp>
         <p:nvSpPr>
-          <p:cNvPr id="142" name="Oval 141"/>
-          <p:cNvSpPr/>
-          <p:nvPr/>
-        </p:nvSpPr>
-        <p:spPr>
-          <a:xfrm>
-            <a:off x="5327976" y="5156316"/>
-            <a:ext cx="64008" cy="64008"/>
+          <p:cNvPr id="157" name="Oval 156"/>
+          <p:cNvSpPr/>
+          <p:nvPr/>
+        </p:nvSpPr>
+        <p:spPr>
+          <a:xfrm>
+            <a:off x="5093098" y="5083200"/>
+            <a:ext cx="73152" cy="73152"/>
           </a:xfrm>
           <a:prstGeom prst="ellipse">
             <a:avLst/>
@@ -8942,14 +9538,14 @@
       </p:sp>
       <p:sp>
         <p:nvSpPr>
-          <p:cNvPr id="143" name="Oval 142"/>
-          <p:cNvSpPr/>
-          <p:nvPr/>
-        </p:nvSpPr>
-        <p:spPr>
-          <a:xfrm>
-            <a:off x="5222292" y="5156316"/>
-            <a:ext cx="64008" cy="64008"/>
+          <p:cNvPr id="158" name="Oval 157"/>
+          <p:cNvSpPr/>
+          <p:nvPr/>
+        </p:nvSpPr>
+        <p:spPr>
+          <a:xfrm>
+            <a:off x="5050742" y="5083200"/>
+            <a:ext cx="73152" cy="73152"/>
           </a:xfrm>
           <a:prstGeom prst="ellipse">
             <a:avLst/>
@@ -8986,14 +9582,14 @@
       </p:sp>
       <p:sp>
         <p:nvSpPr>
-          <p:cNvPr id="144" name="Oval 143"/>
-          <p:cNvSpPr/>
-          <p:nvPr/>
-        </p:nvSpPr>
-        <p:spPr>
-          <a:xfrm>
-            <a:off x="5268604" y="5435728"/>
-            <a:ext cx="64008" cy="64008"/>
+          <p:cNvPr id="159" name="Oval 158"/>
+          <p:cNvSpPr/>
+          <p:nvPr/>
+        </p:nvSpPr>
+        <p:spPr>
+          <a:xfrm>
+            <a:off x="5055947" y="5351435"/>
+            <a:ext cx="73152" cy="73152"/>
           </a:xfrm>
           <a:prstGeom prst="ellipse">
             <a:avLst/>
@@ -9030,14 +9626,14 @@
       </p:sp>
       <p:sp>
         <p:nvSpPr>
-          <p:cNvPr id="145" name="Oval 144"/>
-          <p:cNvSpPr/>
-          <p:nvPr/>
-        </p:nvSpPr>
-        <p:spPr>
-          <a:xfrm>
-            <a:off x="5259562" y="5728716"/>
-            <a:ext cx="64008" cy="64008"/>
+          <p:cNvPr id="160" name="Oval 159"/>
+          <p:cNvSpPr/>
+          <p:nvPr/>
+        </p:nvSpPr>
+        <p:spPr>
+          <a:xfrm>
+            <a:off x="5060636" y="5632704"/>
+            <a:ext cx="73152" cy="73152"/>
           </a:xfrm>
           <a:prstGeom prst="ellipse">
             <a:avLst/>
@@ -9074,14 +9670,14 @@
       </p:sp>
       <p:sp>
         <p:nvSpPr>
-          <p:cNvPr id="146" name="Oval 145"/>
-          <p:cNvSpPr/>
-          <p:nvPr/>
-        </p:nvSpPr>
-        <p:spPr>
-          <a:xfrm>
-            <a:off x="5336012" y="5728716"/>
-            <a:ext cx="64008" cy="64008"/>
+          <p:cNvPr id="161" name="Oval 160"/>
+          <p:cNvSpPr/>
+          <p:nvPr/>
+        </p:nvSpPr>
+        <p:spPr>
+          <a:xfrm>
+            <a:off x="5093526" y="5632704"/>
+            <a:ext cx="73152" cy="73152"/>
           </a:xfrm>
           <a:prstGeom prst="ellipse">
             <a:avLst/>
@@ -9118,13 +9714,13 @@
       </p:sp>
       <p:sp>
         <p:nvSpPr>
-          <p:cNvPr id="147" name="TextBox 146"/>
+          <p:cNvPr id="162" name="TextBox 161"/>
           <p:cNvSpPr txBox="1"/>
           <p:nvPr/>
         </p:nvSpPr>
         <p:spPr>
           <a:xfrm>
-            <a:off x="5897880" y="5815584"/>
+            <a:off x="5715000" y="5724144"/>
             <a:ext cx="1097280" cy="274320"/>
           </a:xfrm>
           <a:prstGeom prst="rect">
@@ -9152,16 +9748,52 @@
           </a:p>
         </p:txBody>
       </p:sp>
+      <p:sp>
+        <p:nvSpPr>
+          <p:cNvPr id="163" name="TextBox 162"/>
+          <p:cNvSpPr txBox="1"/>
+          <p:nvPr/>
+        </p:nvSpPr>
+        <p:spPr>
+          <a:xfrm>
+            <a:off x="5760720" y="1115568"/>
+            <a:ext cx="1005840" cy="164592"/>
+          </a:xfrm>
+          <a:prstGeom prst="rect">
+            <a:avLst/>
+          </a:prstGeom>
+          <a:noFill/>
+          <a:effectLst/>
+        </p:spPr>
+        <p:txBody>
+          <a:bodyPr wrap="square" lIns="0" rIns="0" tIns="0" bIns="0" anchor="ctr">
+            <a:spAutoFit/>
+          </a:bodyPr>
+          <a:lstStyle/>
+          <a:p>
+            <a:pPr algn="ctr"/>
+            <a:r>
+              <a:rPr sz="700" b="1" i="0">
+                <a:solidFill>
+                  <a:srgbClr val="BBBBBB"/>
+                </a:solidFill>
+                <a:latin typeface="Arial"/>
+              </a:rPr>
+              <a:t>P=0.85</a:t>
+            </a:r>
+          </a:p>
+        </p:txBody>
+      </p:sp>
       <p:cxnSp>
         <p:nvCxnSpPr>
-          <p:cNvPr id="148" name="Connector 147"/>
+          <p:cNvPr id="164" name="Connector 163"/>
           <p:cNvCxnSpPr/>
           <p:nvPr/>
         </p:nvCxnSpPr>
         <p:spPr>
           <a:xfrm flipV="1">
-            <a:off x="6217920" y="4888990"/>
-            <a:ext cx="0" cy="871730"/>
+            <a:off x="6035040" y="4832419"/>
+            <a:ext cx="0" cy="836861"/>
           </a:xfrm>
           <a:prstGeom prst="line">
             <a:avLst/>
@@ -9190,13 +9822,13 @@
       </p:cxnSp>
       <p:cxnSp>
         <p:nvCxnSpPr>
-          <p:cNvPr id="149" name="Connector 148"/>
+          <p:cNvPr id="165" name="Connector 164"/>
           <p:cNvCxnSpPr/>
           <p:nvPr/>
         </p:nvCxnSpPr>
         <p:spPr>
           <a:xfrm>
-            <a:off x="6131052" y="5760720"/>
+            <a:off x="5948172" y="5669280"/>
             <a:ext cx="173736" cy="0"/>
           </a:xfrm>
           <a:prstGeom prst="line">
@@ -9226,13 +9858,13 @@
       </p:cxnSp>
       <p:cxnSp>
         <p:nvCxnSpPr>
-          <p:cNvPr id="150" name="Connector 149"/>
+          <p:cNvPr id="166" name="Connector 165"/>
           <p:cNvCxnSpPr/>
           <p:nvPr/>
         </p:nvCxnSpPr>
         <p:spPr>
           <a:xfrm>
-            <a:off x="6131052" y="4888990"/>
+            <a:off x="5948172" y="4832419"/>
             <a:ext cx="173736" cy="0"/>
           </a:xfrm>
           <a:prstGeom prst="line">
@@ -9262,13 +9894,13 @@
       </p:cxnSp>
       <p:sp>
         <p:nvSpPr>
-          <p:cNvPr id="151" name="Rectangle 150"/>
-          <p:cNvSpPr/>
-          <p:nvPr/>
-        </p:nvSpPr>
-        <p:spPr>
-          <a:xfrm>
-            <a:off x="6044184" y="5760720"/>
+          <p:cNvPr id="167" name="Rectangle 166"/>
+          <p:cNvSpPr/>
+          <p:nvPr/>
+        </p:nvSpPr>
+        <p:spPr>
+          <a:xfrm>
+            <a:off x="5861304" y="5669280"/>
             <a:ext cx="347472" cy="1"/>
           </a:xfrm>
           <a:prstGeom prst="rect">
@@ -9306,13 +9938,13 @@
       </p:sp>
       <p:cxnSp>
         <p:nvCxnSpPr>
-          <p:cNvPr id="152" name="Connector 151"/>
+          <p:cNvPr id="168" name="Connector 167"/>
           <p:cNvCxnSpPr/>
           <p:nvPr/>
         </p:nvCxnSpPr>
         <p:spPr>
           <a:xfrm>
-            <a:off x="6044184" y="5760720"/>
+            <a:off x="5861304" y="5669280"/>
             <a:ext cx="347472" cy="0"/>
           </a:xfrm>
           <a:prstGeom prst="line">
@@ -9342,14 +9974,14 @@
       </p:cxnSp>
       <p:sp>
         <p:nvSpPr>
-          <p:cNvPr id="153" name="Oval 152"/>
-          <p:cNvSpPr/>
-          <p:nvPr/>
-        </p:nvSpPr>
-        <p:spPr>
-          <a:xfrm>
-            <a:off x="6108730" y="4856986"/>
-            <a:ext cx="64008" cy="64008"/>
+          <p:cNvPr id="169" name="Oval 168"/>
+          <p:cNvSpPr/>
+          <p:nvPr/>
+        </p:nvSpPr>
+        <p:spPr>
+          <a:xfrm>
+            <a:off x="5938728" y="4795843"/>
+            <a:ext cx="73152" cy="73152"/>
           </a:xfrm>
           <a:prstGeom prst="ellipse">
             <a:avLst/>
@@ -9386,14 +10018,14 @@
       </p:sp>
       <p:sp>
         <p:nvSpPr>
-          <p:cNvPr id="154" name="Oval 153"/>
-          <p:cNvSpPr/>
-          <p:nvPr/>
-        </p:nvSpPr>
-        <p:spPr>
-          <a:xfrm>
-            <a:off x="6252706" y="5034623"/>
-            <a:ext cx="64008" cy="64008"/>
+          <p:cNvPr id="170" name="Oval 169"/>
+          <p:cNvSpPr/>
+          <p:nvPr/>
+        </p:nvSpPr>
+        <p:spPr>
+          <a:xfrm>
+            <a:off x="6040899" y="4966375"/>
+            <a:ext cx="73152" cy="73152"/>
           </a:xfrm>
           <a:prstGeom prst="ellipse">
             <a:avLst/>
@@ -9430,14 +10062,14 @@
       </p:sp>
       <p:sp>
         <p:nvSpPr>
-          <p:cNvPr id="155" name="Oval 154"/>
-          <p:cNvSpPr/>
-          <p:nvPr/>
-        </p:nvSpPr>
-        <p:spPr>
-          <a:xfrm>
-            <a:off x="6102707" y="5089147"/>
-            <a:ext cx="64008" cy="64008"/>
+          <p:cNvPr id="171" name="Oval 170"/>
+          <p:cNvSpPr/>
+          <p:nvPr/>
+        </p:nvSpPr>
+        <p:spPr>
+          <a:xfrm>
+            <a:off x="6051716" y="5018718"/>
+            <a:ext cx="73152" cy="73152"/>
           </a:xfrm>
           <a:prstGeom prst="ellipse">
             <a:avLst/>
@@ -9474,14 +10106,14 @@
       </p:sp>
       <p:sp>
         <p:nvSpPr>
-          <p:cNvPr id="156" name="Oval 155"/>
-          <p:cNvSpPr/>
-          <p:nvPr/>
-        </p:nvSpPr>
-        <p:spPr>
-          <a:xfrm>
-            <a:off x="6268024" y="5143070"/>
-            <a:ext cx="64008" cy="64008"/>
+          <p:cNvPr id="172" name="Oval 171"/>
+          <p:cNvSpPr/>
+          <p:nvPr/>
+        </p:nvSpPr>
+        <p:spPr>
+          <a:xfrm>
+            <a:off x="6060983" y="5070484"/>
+            <a:ext cx="73152" cy="73152"/>
           </a:xfrm>
           <a:prstGeom prst="ellipse">
             <a:avLst/>
@@ -9518,14 +10150,14 @@
       </p:sp>
       <p:sp>
         <p:nvSpPr>
-          <p:cNvPr id="157" name="Oval 156"/>
-          <p:cNvSpPr/>
-          <p:nvPr/>
-        </p:nvSpPr>
-        <p:spPr>
-          <a:xfrm>
-            <a:off x="6207695" y="5156316"/>
-            <a:ext cx="64008" cy="64008"/>
+          <p:cNvPr id="173" name="Oval 172"/>
+          <p:cNvSpPr/>
+          <p:nvPr/>
+        </p:nvSpPr>
+        <p:spPr>
+          <a:xfrm>
+            <a:off x="6054806" y="5083200"/>
+            <a:ext cx="73152" cy="73152"/>
           </a:xfrm>
           <a:prstGeom prst="ellipse">
             <a:avLst/>
@@ -9562,14 +10194,14 @@
       </p:sp>
       <p:sp>
         <p:nvSpPr>
-          <p:cNvPr id="158" name="Oval 157"/>
-          <p:cNvSpPr/>
-          <p:nvPr/>
-        </p:nvSpPr>
-        <p:spPr>
-          <a:xfrm>
-            <a:off x="6234576" y="5156316"/>
-            <a:ext cx="64008" cy="64008"/>
+          <p:cNvPr id="174" name="Oval 173"/>
+          <p:cNvSpPr/>
+          <p:nvPr/>
+        </p:nvSpPr>
+        <p:spPr>
+          <a:xfrm>
+            <a:off x="6042712" y="5083200"/>
+            <a:ext cx="73152" cy="73152"/>
           </a:xfrm>
           <a:prstGeom prst="ellipse">
             <a:avLst/>
@@ -9606,14 +10238,14 @@
       </p:sp>
       <p:sp>
         <p:nvSpPr>
-          <p:cNvPr id="159" name="Oval 158"/>
-          <p:cNvSpPr/>
-          <p:nvPr/>
-        </p:nvSpPr>
-        <p:spPr>
-          <a:xfrm>
-            <a:off x="6171604" y="5728716"/>
-            <a:ext cx="64008" cy="64008"/>
+          <p:cNvPr id="175" name="Oval 174"/>
+          <p:cNvSpPr/>
+          <p:nvPr/>
+        </p:nvSpPr>
+        <p:spPr>
+          <a:xfrm>
+            <a:off x="5969697" y="5632704"/>
+            <a:ext cx="73152" cy="73152"/>
           </a:xfrm>
           <a:prstGeom prst="ellipse">
             <a:avLst/>
@@ -9650,14 +10282,14 @@
       </p:sp>
       <p:sp>
         <p:nvSpPr>
-          <p:cNvPr id="160" name="Oval 159"/>
-          <p:cNvSpPr/>
-          <p:nvPr/>
-        </p:nvSpPr>
-        <p:spPr>
-          <a:xfrm>
-            <a:off x="6174228" y="5728716"/>
-            <a:ext cx="64008" cy="64008"/>
+          <p:cNvPr id="176" name="Oval 175"/>
+          <p:cNvSpPr/>
+          <p:nvPr/>
+        </p:nvSpPr>
+        <p:spPr>
+          <a:xfrm>
+            <a:off x="5982128" y="5632704"/>
+            <a:ext cx="73152" cy="73152"/>
           </a:xfrm>
           <a:prstGeom prst="ellipse">
             <a:avLst/>
@@ -9694,14 +10326,14 @@
       </p:sp>
       <p:sp>
         <p:nvSpPr>
-          <p:cNvPr id="161" name="Oval 160"/>
-          <p:cNvSpPr/>
-          <p:nvPr/>
-        </p:nvSpPr>
-        <p:spPr>
-          <a:xfrm>
-            <a:off x="6200527" y="5728716"/>
-            <a:ext cx="64008" cy="64008"/>
+          <p:cNvPr id="177" name="Oval 176"/>
+          <p:cNvSpPr/>
+          <p:nvPr/>
+        </p:nvSpPr>
+        <p:spPr>
+          <a:xfrm>
+            <a:off x="5979615" y="5632704"/>
+            <a:ext cx="73152" cy="73152"/>
           </a:xfrm>
           <a:prstGeom prst="ellipse">
             <a:avLst/>
@@ -9738,14 +10370,14 @@
       </p:sp>
       <p:sp>
         <p:nvSpPr>
-          <p:cNvPr id="162" name="Oval 161"/>
-          <p:cNvSpPr/>
-          <p:nvPr/>
-        </p:nvSpPr>
-        <p:spPr>
-          <a:xfrm>
-            <a:off x="6106440" y="5728716"/>
-            <a:ext cx="64008" cy="64008"/>
+          <p:cNvPr id="178" name="Oval 177"/>
+          <p:cNvSpPr/>
+          <p:nvPr/>
+        </p:nvSpPr>
+        <p:spPr>
+          <a:xfrm>
+            <a:off x="5914640" y="5632704"/>
+            <a:ext cx="73152" cy="73152"/>
           </a:xfrm>
           <a:prstGeom prst="ellipse">
             <a:avLst/>
@@ -9782,14 +10414,14 @@
       </p:sp>
       <p:sp>
         <p:nvSpPr>
-          <p:cNvPr id="163" name="Oval 162"/>
-          <p:cNvSpPr/>
-          <p:nvPr/>
-        </p:nvSpPr>
-        <p:spPr>
-          <a:xfrm>
-            <a:off x="6125361" y="5728716"/>
-            <a:ext cx="64008" cy="64008"/>
+          <p:cNvPr id="179" name="Oval 178"/>
+          <p:cNvSpPr/>
+          <p:nvPr/>
+        </p:nvSpPr>
+        <p:spPr>
+          <a:xfrm>
+            <a:off x="5958022" y="5632704"/>
+            <a:ext cx="73152" cy="73152"/>
           </a:xfrm>
           <a:prstGeom prst="ellipse">
             <a:avLst/>
@@ -9826,14 +10458,14 @@
       </p:sp>
       <p:sp>
         <p:nvSpPr>
-          <p:cNvPr id="164" name="Oval 163"/>
-          <p:cNvSpPr/>
-          <p:nvPr/>
-        </p:nvSpPr>
-        <p:spPr>
-          <a:xfrm>
-            <a:off x="6175603" y="5728716"/>
-            <a:ext cx="64008" cy="64008"/>
+          <p:cNvPr id="180" name="Oval 179"/>
+          <p:cNvSpPr/>
+          <p:nvPr/>
+        </p:nvSpPr>
+        <p:spPr>
+          <a:xfrm>
+            <a:off x="6058385" y="5632704"/>
+            <a:ext cx="73152" cy="73152"/>
           </a:xfrm>
           <a:prstGeom prst="ellipse">
             <a:avLst/>
@@ -9870,14 +10502,14 @@
       </p:sp>
       <p:sp>
         <p:nvSpPr>
-          <p:cNvPr id="165" name="Oval 164"/>
-          <p:cNvSpPr/>
-          <p:nvPr/>
-        </p:nvSpPr>
-        <p:spPr>
-          <a:xfrm>
-            <a:off x="6104589" y="5728716"/>
-            <a:ext cx="64008" cy="64008"/>
+          <p:cNvPr id="181" name="Oval 180"/>
+          <p:cNvSpPr/>
+          <p:nvPr/>
+        </p:nvSpPr>
+        <p:spPr>
+          <a:xfrm>
+            <a:off x="6037695" y="5632704"/>
+            <a:ext cx="73152" cy="73152"/>
           </a:xfrm>
           <a:prstGeom prst="ellipse">
             <a:avLst/>
@@ -9914,14 +10546,14 @@
       </p:sp>
       <p:cxnSp>
         <p:nvCxnSpPr>
-          <p:cNvPr id="166" name="Connector 165"/>
+          <p:cNvPr id="182" name="Connector 181"/>
           <p:cNvCxnSpPr/>
           <p:nvPr/>
         </p:nvCxnSpPr>
         <p:spPr>
           <a:xfrm flipV="1">
-            <a:off x="6675120" y="4668476"/>
-            <a:ext cx="0" cy="1092244"/>
+            <a:off x="6492240" y="4620726"/>
+            <a:ext cx="0" cy="1048554"/>
           </a:xfrm>
           <a:prstGeom prst="line">
             <a:avLst/>
@@ -9950,13 +10582,13 @@
       </p:cxnSp>
       <p:cxnSp>
         <p:nvCxnSpPr>
-          <p:cNvPr id="167" name="Connector 166"/>
+          <p:cNvPr id="183" name="Connector 182"/>
           <p:cNvCxnSpPr/>
           <p:nvPr/>
         </p:nvCxnSpPr>
         <p:spPr>
           <a:xfrm>
-            <a:off x="6588252" y="5760720"/>
+            <a:off x="6405372" y="5669280"/>
             <a:ext cx="173736" cy="0"/>
           </a:xfrm>
           <a:prstGeom prst="line">
@@ -9986,13 +10618,13 @@
       </p:cxnSp>
       <p:cxnSp>
         <p:nvCxnSpPr>
-          <p:cNvPr id="168" name="Connector 167"/>
+          <p:cNvPr id="184" name="Connector 183"/>
           <p:cNvCxnSpPr/>
           <p:nvPr/>
         </p:nvCxnSpPr>
         <p:spPr>
           <a:xfrm>
-            <a:off x="6588252" y="4668476"/>
+            <a:off x="6405372" y="4620726"/>
             <a:ext cx="173736" cy="0"/>
           </a:xfrm>
           <a:prstGeom prst="line">
@@ -10022,13 +10654,13 @@
       </p:cxnSp>
       <p:sp>
         <p:nvSpPr>
-          <p:cNvPr id="169" name="Rectangle 168"/>
-          <p:cNvSpPr/>
-          <p:nvPr/>
-        </p:nvSpPr>
-        <p:spPr>
-          <a:xfrm>
-            <a:off x="6501384" y="5760720"/>
+          <p:cNvPr id="185" name="Rectangle 184"/>
+          <p:cNvSpPr/>
+          <p:nvPr/>
+        </p:nvSpPr>
+        <p:spPr>
+          <a:xfrm>
+            <a:off x="6318504" y="5669280"/>
             <a:ext cx="347472" cy="1"/>
           </a:xfrm>
           <a:prstGeom prst="rect">
@@ -10066,13 +10698,13 @@
       </p:sp>
       <p:cxnSp>
         <p:nvCxnSpPr>
-          <p:cNvPr id="170" name="Connector 169"/>
+          <p:cNvPr id="186" name="Connector 185"/>
           <p:cNvCxnSpPr/>
           <p:nvPr/>
         </p:nvCxnSpPr>
         <p:spPr>
           <a:xfrm>
-            <a:off x="6501384" y="5429083"/>
+            <a:off x="6318504" y="5350908"/>
             <a:ext cx="347472" cy="0"/>
           </a:xfrm>
           <a:prstGeom prst="line">
@@ -10102,14 +10734,14 @@
       </p:cxnSp>
       <p:sp>
         <p:nvSpPr>
-          <p:cNvPr id="171" name="Oval 170"/>
-          <p:cNvSpPr/>
-          <p:nvPr/>
-        </p:nvSpPr>
-        <p:spPr>
-          <a:xfrm>
-            <a:off x="6623521" y="4636472"/>
-            <a:ext cx="64008" cy="64008"/>
+          <p:cNvPr id="187" name="Oval 186"/>
+          <p:cNvSpPr/>
+          <p:nvPr/>
+        </p:nvSpPr>
+        <p:spPr>
+          <a:xfrm>
+            <a:off x="6510688" y="4584150"/>
+            <a:ext cx="73152" cy="73152"/>
           </a:xfrm>
           <a:prstGeom prst="ellipse">
             <a:avLst/>
@@ -10146,14 +10778,14 @@
       </p:sp>
       <p:sp>
         <p:nvSpPr>
-          <p:cNvPr id="172" name="Oval 171"/>
-          <p:cNvSpPr/>
-          <p:nvPr/>
-        </p:nvSpPr>
-        <p:spPr>
-          <a:xfrm>
-            <a:off x="6647885" y="5006428"/>
-            <a:ext cx="64008" cy="64008"/>
+          <p:cNvPr id="188" name="Oval 187"/>
+          <p:cNvSpPr/>
+          <p:nvPr/>
+        </p:nvSpPr>
+        <p:spPr>
+          <a:xfrm>
+            <a:off x="6377109" y="4939307"/>
+            <a:ext cx="73152" cy="73152"/>
           </a:xfrm>
           <a:prstGeom prst="ellipse">
             <a:avLst/>
@@ -10190,14 +10822,14 @@
       </p:sp>
       <p:sp>
         <p:nvSpPr>
-          <p:cNvPr id="173" name="Oval 172"/>
-          <p:cNvSpPr/>
-          <p:nvPr/>
-        </p:nvSpPr>
-        <p:spPr>
-          <a:xfrm>
-            <a:off x="6675492" y="5034623"/>
-            <a:ext cx="64008" cy="64008"/>
+          <p:cNvPr id="189" name="Oval 188"/>
+          <p:cNvSpPr/>
+          <p:nvPr/>
+        </p:nvSpPr>
+        <p:spPr>
+          <a:xfrm>
+            <a:off x="6397298" y="4966375"/>
+            <a:ext cx="73152" cy="73152"/>
           </a:xfrm>
           <a:prstGeom prst="ellipse">
             <a:avLst/>
@@ -10234,14 +10866,14 @@
       </p:sp>
       <p:sp>
         <p:nvSpPr>
-          <p:cNvPr id="174" name="Oval 173"/>
-          <p:cNvSpPr/>
-          <p:nvPr/>
-        </p:nvSpPr>
-        <p:spPr>
-          <a:xfrm>
-            <a:off x="6628207" y="5161376"/>
-            <a:ext cx="64008" cy="64008"/>
+          <p:cNvPr id="190" name="Oval 189"/>
+          <p:cNvSpPr/>
+          <p:nvPr/>
+        </p:nvSpPr>
+        <p:spPr>
+          <a:xfrm>
+            <a:off x="6407981" y="5088058"/>
+            <a:ext cx="73152" cy="73152"/>
           </a:xfrm>
           <a:prstGeom prst="ellipse">
             <a:avLst/>
@@ -10278,14 +10910,14 @@
       </p:sp>
       <p:sp>
         <p:nvSpPr>
-          <p:cNvPr id="175" name="Oval 174"/>
-          <p:cNvSpPr/>
-          <p:nvPr/>
-        </p:nvSpPr>
-        <p:spPr>
-          <a:xfrm>
-            <a:off x="6644740" y="5187000"/>
-            <a:ext cx="64008" cy="64008"/>
+          <p:cNvPr id="191" name="Oval 190"/>
+          <p:cNvSpPr/>
+          <p:nvPr/>
+        </p:nvSpPr>
+        <p:spPr>
+          <a:xfrm>
+            <a:off x="6431176" y="5112656"/>
+            <a:ext cx="73152" cy="73152"/>
           </a:xfrm>
           <a:prstGeom prst="ellipse">
             <a:avLst/>
@@ -10322,14 +10954,14 @@
       </p:sp>
       <p:sp>
         <p:nvSpPr>
-          <p:cNvPr id="176" name="Oval 175"/>
-          <p:cNvSpPr/>
-          <p:nvPr/>
-        </p:nvSpPr>
-        <p:spPr>
-          <a:xfrm>
-            <a:off x="6653523" y="5397079"/>
-            <a:ext cx="64008" cy="64008"/>
+          <p:cNvPr id="192" name="Oval 191"/>
+          <p:cNvSpPr/>
+          <p:nvPr/>
+        </p:nvSpPr>
+        <p:spPr>
+          <a:xfrm>
+            <a:off x="6387793" y="5314332"/>
+            <a:ext cx="73152" cy="73152"/>
           </a:xfrm>
           <a:prstGeom prst="ellipse">
             <a:avLst/>
@@ -10366,14 +10998,14 @@
       </p:sp>
       <p:sp>
         <p:nvSpPr>
-          <p:cNvPr id="177" name="Oval 176"/>
-          <p:cNvSpPr/>
-          <p:nvPr/>
-        </p:nvSpPr>
-        <p:spPr>
-          <a:xfrm>
-            <a:off x="6580971" y="5728716"/>
-            <a:ext cx="64008" cy="64008"/>
+          <p:cNvPr id="193" name="Oval 192"/>
+          <p:cNvSpPr/>
+          <p:nvPr/>
+        </p:nvSpPr>
+        <p:spPr>
+          <a:xfrm>
+            <a:off x="6528337" y="5632704"/>
+            <a:ext cx="73152" cy="73152"/>
           </a:xfrm>
           <a:prstGeom prst="ellipse">
             <a:avLst/>
@@ -10410,14 +11042,14 @@
       </p:sp>
       <p:sp>
         <p:nvSpPr>
-          <p:cNvPr id="178" name="Oval 177"/>
-          <p:cNvSpPr/>
-          <p:nvPr/>
-        </p:nvSpPr>
-        <p:spPr>
-          <a:xfrm>
-            <a:off x="6618503" y="5728716"/>
-            <a:ext cx="64008" cy="64008"/>
+          <p:cNvPr id="194" name="Oval 193"/>
+          <p:cNvSpPr/>
+          <p:nvPr/>
+        </p:nvSpPr>
+        <p:spPr>
+          <a:xfrm>
+            <a:off x="6504916" y="5632704"/>
+            <a:ext cx="73152" cy="73152"/>
           </a:xfrm>
           <a:prstGeom prst="ellipse">
             <a:avLst/>
@@ -10454,14 +11086,14 @@
       </p:sp>
       <p:sp>
         <p:nvSpPr>
-          <p:cNvPr id="179" name="Oval 178"/>
-          <p:cNvSpPr/>
-          <p:nvPr/>
-        </p:nvSpPr>
-        <p:spPr>
-          <a:xfrm>
-            <a:off x="6669472" y="5728716"/>
-            <a:ext cx="64008" cy="64008"/>
+          <p:cNvPr id="195" name="Oval 194"/>
+          <p:cNvSpPr/>
+          <p:nvPr/>
+        </p:nvSpPr>
+        <p:spPr>
+          <a:xfrm>
+            <a:off x="6461398" y="5632704"/>
+            <a:ext cx="73152" cy="73152"/>
           </a:xfrm>
           <a:prstGeom prst="ellipse">
             <a:avLst/>
@@ -10498,14 +11130,14 @@
       </p:sp>
       <p:sp>
         <p:nvSpPr>
-          <p:cNvPr id="180" name="Oval 179"/>
-          <p:cNvSpPr/>
-          <p:nvPr/>
-        </p:nvSpPr>
-        <p:spPr>
-          <a:xfrm>
-            <a:off x="6601531" y="5728716"/>
-            <a:ext cx="64008" cy="64008"/>
+          <p:cNvPr id="196" name="Oval 195"/>
+          <p:cNvSpPr/>
+          <p:nvPr/>
+        </p:nvSpPr>
+        <p:spPr>
+          <a:xfrm>
+            <a:off x="6443436" y="5632704"/>
+            <a:ext cx="73152" cy="73152"/>
           </a:xfrm>
           <a:prstGeom prst="ellipse">
             <a:avLst/>
@@ -10542,14 +11174,14 @@
       </p:sp>
       <p:sp>
         <p:nvSpPr>
-          <p:cNvPr id="181" name="Oval 180"/>
-          <p:cNvSpPr/>
-          <p:nvPr/>
-        </p:nvSpPr>
-        <p:spPr>
-          <a:xfrm>
-            <a:off x="6708879" y="5728716"/>
-            <a:ext cx="64008" cy="64008"/>
+          <p:cNvPr id="197" name="Oval 196"/>
+          <p:cNvSpPr/>
+          <p:nvPr/>
+        </p:nvSpPr>
+        <p:spPr>
+          <a:xfrm>
+            <a:off x="6494347" y="5632704"/>
+            <a:ext cx="73152" cy="73152"/>
           </a:xfrm>
           <a:prstGeom prst="ellipse">
             <a:avLst/>
@@ -10586,13 +11218,13 @@
       </p:sp>
       <p:sp>
         <p:nvSpPr>
-          <p:cNvPr id="182" name="TextBox 181"/>
+          <p:cNvPr id="198" name="TextBox 197"/>
           <p:cNvSpPr txBox="1"/>
           <p:nvPr/>
         </p:nvSpPr>
         <p:spPr>
           <a:xfrm>
-            <a:off x="7269480" y="5815584"/>
+            <a:off x="7086600" y="5724144"/>
             <a:ext cx="1097280" cy="274320"/>
           </a:xfrm>
           <a:prstGeom prst="rect">
@@ -10620,16 +11252,52 @@
           </a:p>
         </p:txBody>
       </p:sp>
+      <p:sp>
+        <p:nvSpPr>
+          <p:cNvPr id="199" name="TextBox 198"/>
+          <p:cNvSpPr txBox="1"/>
+          <p:nvPr/>
+        </p:nvSpPr>
+        <p:spPr>
+          <a:xfrm>
+            <a:off x="7132320" y="1115568"/>
+            <a:ext cx="1005840" cy="164592"/>
+          </a:xfrm>
+          <a:prstGeom prst="rect">
+            <a:avLst/>
+          </a:prstGeom>
+          <a:noFill/>
+          <a:effectLst/>
+        </p:spPr>
+        <p:txBody>
+          <a:bodyPr wrap="square" lIns="0" rIns="0" tIns="0" bIns="0" anchor="ctr">
+            <a:spAutoFit/>
+          </a:bodyPr>
+          <a:lstStyle/>
+          <a:p>
+            <a:pPr algn="ctr"/>
+            <a:r>
+              <a:rPr sz="700" b="1" i="0">
+                <a:solidFill>
+                  <a:srgbClr val="BBBBBB"/>
+                </a:solidFill>
+                <a:latin typeface="Arial"/>
+              </a:rPr>
+              <a:t>P=0.44</a:t>
+            </a:r>
+          </a:p>
+        </p:txBody>
+      </p:sp>
       <p:cxnSp>
         <p:nvCxnSpPr>
-          <p:cNvPr id="183" name="Connector 182"/>
+          <p:cNvPr id="200" name="Connector 199"/>
           <p:cNvCxnSpPr/>
           <p:nvPr/>
         </p:nvCxnSpPr>
         <p:spPr>
           <a:xfrm flipV="1">
-            <a:off x="7589520" y="1809614"/>
-            <a:ext cx="0" cy="1304632"/>
+            <a:off x="7406640" y="1876218"/>
+            <a:ext cx="0" cy="1252447"/>
           </a:xfrm>
           <a:prstGeom prst="line">
             <a:avLst/>
@@ -10658,13 +11326,13 @@
       </p:cxnSp>
       <p:cxnSp>
         <p:nvCxnSpPr>
-          <p:cNvPr id="184" name="Connector 183"/>
+          <p:cNvPr id="201" name="Connector 200"/>
           <p:cNvCxnSpPr/>
           <p:nvPr/>
         </p:nvCxnSpPr>
         <p:spPr>
           <a:xfrm>
-            <a:off x="7502652" y="3114246"/>
+            <a:off x="7319772" y="3128665"/>
             <a:ext cx="173736" cy="0"/>
           </a:xfrm>
           <a:prstGeom prst="line">
@@ -10694,13 +11362,13 @@
       </p:cxnSp>
       <p:cxnSp>
         <p:nvCxnSpPr>
-          <p:cNvPr id="185" name="Connector 184"/>
+          <p:cNvPr id="202" name="Connector 201"/>
           <p:cNvCxnSpPr/>
           <p:nvPr/>
         </p:nvCxnSpPr>
         <p:spPr>
           <a:xfrm>
-            <a:off x="7502652" y="1809614"/>
+            <a:off x="7319772" y="1876218"/>
             <a:ext cx="173736" cy="0"/>
           </a:xfrm>
           <a:prstGeom prst="line">
@@ -10730,13 +11398,13 @@
       </p:cxnSp>
       <p:sp>
         <p:nvSpPr>
-          <p:cNvPr id="186" name="Rectangle 185"/>
-          <p:cNvSpPr/>
-          <p:nvPr/>
-        </p:nvSpPr>
-        <p:spPr>
-          <a:xfrm>
-            <a:off x="7415784" y="2747944"/>
+          <p:cNvPr id="203" name="Rectangle 202"/>
+          <p:cNvSpPr/>
+          <p:nvPr/>
+        </p:nvSpPr>
+        <p:spPr>
+          <a:xfrm>
+            <a:off x="7232904" y="2777015"/>
             <a:ext cx="347472" cy="1"/>
           </a:xfrm>
           <a:prstGeom prst="rect">
@@ -10774,13 +11442,13 @@
       </p:sp>
       <p:cxnSp>
         <p:nvCxnSpPr>
-          <p:cNvPr id="187" name="Connector 186"/>
+          <p:cNvPr id="204" name="Connector 203"/>
           <p:cNvCxnSpPr/>
           <p:nvPr/>
         </p:nvCxnSpPr>
         <p:spPr>
           <a:xfrm>
-            <a:off x="7415784" y="2512875"/>
+            <a:off x="7232904" y="2551349"/>
             <a:ext cx="347472" cy="0"/>
           </a:xfrm>
           <a:prstGeom prst="line">
@@ -10810,14 +11478,14 @@
       </p:cxnSp>
       <p:sp>
         <p:nvSpPr>
-          <p:cNvPr id="188" name="Oval 187"/>
-          <p:cNvSpPr/>
-          <p:nvPr/>
-        </p:nvSpPr>
-        <p:spPr>
-          <a:xfrm>
-            <a:off x="7479424" y="1777610"/>
-            <a:ext cx="64008" cy="64008"/>
+          <p:cNvPr id="205" name="Oval 204"/>
+          <p:cNvSpPr/>
+          <p:nvPr/>
+        </p:nvSpPr>
+        <p:spPr>
+          <a:xfrm>
+            <a:off x="7429874" y="1839642"/>
+            <a:ext cx="73152" cy="73152"/>
           </a:xfrm>
           <a:prstGeom prst="ellipse">
             <a:avLst/>
@@ -10854,14 +11522,14 @@
       </p:sp>
       <p:sp>
         <p:nvSpPr>
-          <p:cNvPr id="189" name="Oval 188"/>
-          <p:cNvSpPr/>
-          <p:nvPr/>
-        </p:nvSpPr>
-        <p:spPr>
-          <a:xfrm>
-            <a:off x="7619006" y="1909625"/>
-            <a:ext cx="64008" cy="64008"/>
+          <p:cNvPr id="206" name="Oval 205"/>
+          <p:cNvSpPr/>
+          <p:nvPr/>
+        </p:nvSpPr>
+        <p:spPr>
+          <a:xfrm>
+            <a:off x="7432861" y="1966376"/>
+            <a:ext cx="73152" cy="73152"/>
           </a:xfrm>
           <a:prstGeom prst="ellipse">
             <a:avLst/>
@@ -10898,14 +11566,14 @@
       </p:sp>
       <p:sp>
         <p:nvSpPr>
-          <p:cNvPr id="190" name="Oval 189"/>
-          <p:cNvSpPr/>
-          <p:nvPr/>
-        </p:nvSpPr>
-        <p:spPr>
-          <a:xfrm>
-            <a:off x="7488257" y="2104513"/>
-            <a:ext cx="64008" cy="64008"/>
+          <p:cNvPr id="207" name="Oval 206"/>
+          <p:cNvSpPr/>
+          <p:nvPr/>
+        </p:nvSpPr>
+        <p:spPr>
+          <a:xfrm>
+            <a:off x="7359944" y="2153469"/>
+            <a:ext cx="73152" cy="73152"/>
           </a:xfrm>
           <a:prstGeom prst="ellipse">
             <a:avLst/>
@@ -10942,14 +11610,14 @@
       </p:sp>
       <p:sp>
         <p:nvSpPr>
-          <p:cNvPr id="191" name="Oval 190"/>
-          <p:cNvSpPr/>
-          <p:nvPr/>
-        </p:nvSpPr>
-        <p:spPr>
-          <a:xfrm>
-            <a:off x="7501428" y="2183141"/>
-            <a:ext cx="64008" cy="64008"/>
+          <p:cNvPr id="208" name="Oval 207"/>
+          <p:cNvSpPr/>
+          <p:nvPr/>
+        </p:nvSpPr>
+        <p:spPr>
+          <a:xfrm>
+            <a:off x="7401114" y="2228952"/>
+            <a:ext cx="73152" cy="73152"/>
           </a:xfrm>
           <a:prstGeom prst="ellipse">
             <a:avLst/>
@@ -10986,14 +11654,14 @@
       </p:sp>
       <p:sp>
         <p:nvSpPr>
-          <p:cNvPr id="192" name="Oval 191"/>
-          <p:cNvSpPr/>
-          <p:nvPr/>
-        </p:nvSpPr>
-        <p:spPr>
-          <a:xfrm>
-            <a:off x="7503387" y="2226357"/>
-            <a:ext cx="64008" cy="64008"/>
+          <p:cNvPr id="209" name="Oval 208"/>
+          <p:cNvSpPr/>
+          <p:nvPr/>
+        </p:nvSpPr>
+        <p:spPr>
+          <a:xfrm>
+            <a:off x="7338647" y="2270439"/>
+            <a:ext cx="73152" cy="73152"/>
           </a:xfrm>
           <a:prstGeom prst="ellipse">
             <a:avLst/>
@@ -11030,14 +11698,14 @@
       </p:sp>
       <p:sp>
         <p:nvSpPr>
-          <p:cNvPr id="193" name="Oval 192"/>
-          <p:cNvSpPr/>
-          <p:nvPr/>
-        </p:nvSpPr>
-        <p:spPr>
-          <a:xfrm>
-            <a:off x="7525952" y="2254929"/>
-            <a:ext cx="64008" cy="64008"/>
+          <p:cNvPr id="210" name="Oval 209"/>
+          <p:cNvSpPr/>
+          <p:nvPr/>
+        </p:nvSpPr>
+        <p:spPr>
+          <a:xfrm>
+            <a:off x="7379764" y="2297868"/>
+            <a:ext cx="73152" cy="73152"/>
           </a:xfrm>
           <a:prstGeom prst="ellipse">
             <a:avLst/>
@@ -11074,14 +11742,14 @@
       </p:sp>
       <p:sp>
         <p:nvSpPr>
-          <p:cNvPr id="194" name="Oval 193"/>
-          <p:cNvSpPr/>
-          <p:nvPr/>
-        </p:nvSpPr>
-        <p:spPr>
-          <a:xfrm>
-            <a:off x="7544895" y="2322934"/>
-            <a:ext cx="64008" cy="64008"/>
+          <p:cNvPr id="211" name="Oval 210"/>
+          <p:cNvSpPr/>
+          <p:nvPr/>
+        </p:nvSpPr>
+        <p:spPr>
+          <a:xfrm>
+            <a:off x="7408614" y="2363154"/>
+            <a:ext cx="73152" cy="73152"/>
           </a:xfrm>
           <a:prstGeom prst="ellipse">
             <a:avLst/>
@@ -11118,14 +11786,14 @@
       </p:sp>
       <p:sp>
         <p:nvSpPr>
-          <p:cNvPr id="195" name="Oval 194"/>
-          <p:cNvSpPr/>
-          <p:nvPr/>
-        </p:nvSpPr>
-        <p:spPr>
-          <a:xfrm>
-            <a:off x="7471514" y="2326677"/>
-            <a:ext cx="64008" cy="64008"/>
+          <p:cNvPr id="212" name="Oval 211"/>
+          <p:cNvSpPr/>
+          <p:nvPr/>
+        </p:nvSpPr>
+        <p:spPr>
+          <a:xfrm>
+            <a:off x="7410616" y="2366747"/>
+            <a:ext cx="73152" cy="73152"/>
           </a:xfrm>
           <a:prstGeom prst="ellipse">
             <a:avLst/>
@@ -11162,14 +11830,14 @@
       </p:sp>
       <p:sp>
         <p:nvSpPr>
-          <p:cNvPr id="196" name="Oval 195"/>
-          <p:cNvSpPr/>
-          <p:nvPr/>
-        </p:nvSpPr>
-        <p:spPr>
-          <a:xfrm>
-            <a:off x="7523787" y="2480871"/>
-            <a:ext cx="64008" cy="64008"/>
+          <p:cNvPr id="213" name="Oval 212"/>
+          <p:cNvSpPr/>
+          <p:nvPr/>
+        </p:nvSpPr>
+        <p:spPr>
+          <a:xfrm>
+            <a:off x="7336178" y="2514773"/>
+            <a:ext cx="73152" cy="73152"/>
           </a:xfrm>
           <a:prstGeom prst="ellipse">
             <a:avLst/>
@@ -11206,14 +11874,14 @@
       </p:sp>
       <p:sp>
         <p:nvSpPr>
-          <p:cNvPr id="197" name="Oval 196"/>
-          <p:cNvSpPr/>
-          <p:nvPr/>
-        </p:nvSpPr>
-        <p:spPr>
-          <a:xfrm>
-            <a:off x="7473269" y="2504386"/>
-            <a:ext cx="64008" cy="64008"/>
+          <p:cNvPr id="214" name="Oval 213"/>
+          <p:cNvSpPr/>
+          <p:nvPr/>
+        </p:nvSpPr>
+        <p:spPr>
+          <a:xfrm>
+            <a:off x="7434097" y="2537347"/>
+            <a:ext cx="73152" cy="73152"/>
           </a:xfrm>
           <a:prstGeom prst="ellipse">
             <a:avLst/>
@@ -11250,14 +11918,14 @@
       </p:sp>
       <p:sp>
         <p:nvSpPr>
-          <p:cNvPr id="198" name="Oval 197"/>
-          <p:cNvSpPr/>
-          <p:nvPr/>
-        </p:nvSpPr>
-        <p:spPr>
-          <a:xfrm>
-            <a:off x="7572252" y="2584152"/>
-            <a:ext cx="64008" cy="64008"/>
+          <p:cNvPr id="215" name="Oval 214"/>
+          <p:cNvSpPr/>
+          <p:nvPr/>
+        </p:nvSpPr>
+        <p:spPr>
+          <a:xfrm>
+            <a:off x="7345501" y="2613923"/>
+            <a:ext cx="73152" cy="73152"/>
           </a:xfrm>
           <a:prstGeom prst="ellipse">
             <a:avLst/>
@@ -11294,14 +11962,14 @@
       </p:sp>
       <p:sp>
         <p:nvSpPr>
-          <p:cNvPr id="199" name="Oval 198"/>
-          <p:cNvSpPr/>
-          <p:nvPr/>
-        </p:nvSpPr>
-        <p:spPr>
-          <a:xfrm>
-            <a:off x="7555764" y="2589173"/>
-            <a:ext cx="64008" cy="64008"/>
+          <p:cNvPr id="216" name="Oval 215"/>
+          <p:cNvSpPr/>
+          <p:nvPr/>
+        </p:nvSpPr>
+        <p:spPr>
+          <a:xfrm>
+            <a:off x="7451973" y="2618743"/>
+            <a:ext cx="73152" cy="73152"/>
           </a:xfrm>
           <a:prstGeom prst="ellipse">
             <a:avLst/>
@@ -11338,14 +12006,14 @@
       </p:sp>
       <p:sp>
         <p:nvSpPr>
-          <p:cNvPr id="200" name="Oval 199"/>
-          <p:cNvSpPr/>
-          <p:nvPr/>
-        </p:nvSpPr>
-        <p:spPr>
-          <a:xfrm>
-            <a:off x="7635587" y="2715940"/>
-            <a:ext cx="64008" cy="64008"/>
+          <p:cNvPr id="217" name="Oval 216"/>
+          <p:cNvSpPr/>
+          <p:nvPr/>
+        </p:nvSpPr>
+        <p:spPr>
+          <a:xfrm>
+            <a:off x="7317709" y="2740439"/>
+            <a:ext cx="73152" cy="73152"/>
           </a:xfrm>
           <a:prstGeom prst="ellipse">
             <a:avLst/>
@@ -11382,14 +12050,14 @@
       </p:sp>
       <p:sp>
         <p:nvSpPr>
-          <p:cNvPr id="201" name="Oval 200"/>
-          <p:cNvSpPr/>
-          <p:nvPr/>
-        </p:nvSpPr>
-        <p:spPr>
-          <a:xfrm>
-            <a:off x="7521138" y="2864400"/>
-            <a:ext cx="64008" cy="64008"/>
+          <p:cNvPr id="218" name="Oval 217"/>
+          <p:cNvSpPr/>
+          <p:nvPr/>
+        </p:nvSpPr>
+        <p:spPr>
+          <a:xfrm>
+            <a:off x="7329811" y="2882961"/>
+            <a:ext cx="73152" cy="73152"/>
           </a:xfrm>
           <a:prstGeom prst="ellipse">
             <a:avLst/>
@@ -11426,14 +12094,14 @@
       </p:sp>
       <p:sp>
         <p:nvSpPr>
-          <p:cNvPr id="202" name="Oval 201"/>
-          <p:cNvSpPr/>
-          <p:nvPr/>
-        </p:nvSpPr>
-        <p:spPr>
-          <a:xfrm>
-            <a:off x="7615759" y="2947804"/>
-            <a:ext cx="64008" cy="64008"/>
+          <p:cNvPr id="219" name="Oval 218"/>
+          <p:cNvSpPr/>
+          <p:nvPr/>
+        </p:nvSpPr>
+        <p:spPr>
+          <a:xfrm>
+            <a:off x="7381323" y="2963029"/>
+            <a:ext cx="73152" cy="73152"/>
           </a:xfrm>
           <a:prstGeom prst="ellipse">
             <a:avLst/>
@@ -11470,14 +12138,14 @@
       </p:sp>
       <p:sp>
         <p:nvSpPr>
-          <p:cNvPr id="203" name="Oval 202"/>
-          <p:cNvSpPr/>
-          <p:nvPr/>
-        </p:nvSpPr>
-        <p:spPr>
-          <a:xfrm>
-            <a:off x="7472558" y="3036633"/>
-            <a:ext cx="64008" cy="64008"/>
+          <p:cNvPr id="220" name="Oval 219"/>
+          <p:cNvSpPr/>
+          <p:nvPr/>
+        </p:nvSpPr>
+        <p:spPr>
+          <a:xfrm>
+            <a:off x="7369470" y="3048304"/>
+            <a:ext cx="73152" cy="73152"/>
           </a:xfrm>
           <a:prstGeom prst="ellipse">
             <a:avLst/>
@@ -11514,14 +12182,14 @@
       </p:sp>
       <p:sp>
         <p:nvSpPr>
-          <p:cNvPr id="204" name="Oval 203"/>
-          <p:cNvSpPr/>
-          <p:nvPr/>
-        </p:nvSpPr>
-        <p:spPr>
-          <a:xfrm>
-            <a:off x="7545378" y="3082242"/>
-            <a:ext cx="64008" cy="64008"/>
+          <p:cNvPr id="221" name="Oval 220"/>
+          <p:cNvSpPr/>
+          <p:nvPr/>
+        </p:nvSpPr>
+        <p:spPr>
+          <a:xfrm>
+            <a:off x="7351928" y="3092089"/>
+            <a:ext cx="73152" cy="73152"/>
           </a:xfrm>
           <a:prstGeom prst="ellipse">
             <a:avLst/>
@@ -11558,14 +12226,14 @@
       </p:sp>
       <p:cxnSp>
         <p:nvCxnSpPr>
-          <p:cNvPr id="205" name="Connector 204"/>
+          <p:cNvPr id="222" name="Connector 221"/>
           <p:cNvCxnSpPr/>
           <p:nvPr/>
         </p:nvCxnSpPr>
         <p:spPr>
           <a:xfrm flipV="1">
-            <a:off x="8046720" y="1836977"/>
-            <a:ext cx="0" cy="1900578"/>
+            <a:off x="7863840" y="1902487"/>
+            <a:ext cx="0" cy="1824555"/>
           </a:xfrm>
           <a:prstGeom prst="line">
             <a:avLst/>
@@ -11594,13 +12262,13 @@
       </p:cxnSp>
       <p:cxnSp>
         <p:nvCxnSpPr>
-          <p:cNvPr id="206" name="Connector 205"/>
+          <p:cNvPr id="223" name="Connector 222"/>
           <p:cNvCxnSpPr/>
           <p:nvPr/>
         </p:nvCxnSpPr>
         <p:spPr>
           <a:xfrm>
-            <a:off x="7959852" y="3737555"/>
+            <a:off x="7776972" y="3727042"/>
             <a:ext cx="173736" cy="0"/>
           </a:xfrm>
           <a:prstGeom prst="line">
@@ -11630,13 +12298,13 @@
       </p:cxnSp>
       <p:cxnSp>
         <p:nvCxnSpPr>
-          <p:cNvPr id="207" name="Connector 206"/>
+          <p:cNvPr id="224" name="Connector 223"/>
           <p:cNvCxnSpPr/>
           <p:nvPr/>
         </p:nvCxnSpPr>
         <p:spPr>
           <a:xfrm>
-            <a:off x="7959852" y="1836977"/>
+            <a:off x="7776972" y="1902487"/>
             <a:ext cx="173736" cy="0"/>
           </a:xfrm>
           <a:prstGeom prst="line">
@@ -11666,13 +12334,13 @@
       </p:cxnSp>
       <p:sp>
         <p:nvSpPr>
-          <p:cNvPr id="208" name="Rectangle 207"/>
-          <p:cNvSpPr/>
-          <p:nvPr/>
-        </p:nvSpPr>
-        <p:spPr>
-          <a:xfrm>
-            <a:off x="7872984" y="3058141"/>
+          <p:cNvPr id="225" name="Rectangle 224"/>
+          <p:cNvSpPr/>
+          <p:nvPr/>
+        </p:nvSpPr>
+        <p:spPr>
+          <a:xfrm>
+            <a:off x="7690104" y="3074804"/>
             <a:ext cx="347472" cy="1"/>
           </a:xfrm>
           <a:prstGeom prst="rect">
@@ -11710,13 +12378,13 @@
       </p:sp>
       <p:cxnSp>
         <p:nvCxnSpPr>
-          <p:cNvPr id="209" name="Connector 208"/>
+          <p:cNvPr id="226" name="Connector 225"/>
           <p:cNvCxnSpPr/>
           <p:nvPr/>
         </p:nvCxnSpPr>
         <p:spPr>
           <a:xfrm>
-            <a:off x="7872984" y="2603689"/>
+            <a:off x="7690104" y="2638530"/>
             <a:ext cx="347472" cy="0"/>
           </a:xfrm>
           <a:prstGeom prst="line">
@@ -11746,14 +12414,14 @@
       </p:cxnSp>
       <p:sp>
         <p:nvSpPr>
-          <p:cNvPr id="210" name="Oval 209"/>
-          <p:cNvSpPr/>
-          <p:nvPr/>
-        </p:nvSpPr>
-        <p:spPr>
-          <a:xfrm>
-            <a:off x="7948957" y="1804973"/>
-            <a:ext cx="64008" cy="64008"/>
+          <p:cNvPr id="227" name="Oval 226"/>
+          <p:cNvSpPr/>
+          <p:nvPr/>
+        </p:nvSpPr>
+        <p:spPr>
+          <a:xfrm>
+            <a:off x="7771746" y="1865911"/>
+            <a:ext cx="73152" cy="73152"/>
           </a:xfrm>
           <a:prstGeom prst="ellipse">
             <a:avLst/>
@@ -11790,14 +12458,14 @@
       </p:sp>
       <p:sp>
         <p:nvSpPr>
-          <p:cNvPr id="211" name="Oval 210"/>
-          <p:cNvSpPr/>
-          <p:nvPr/>
-        </p:nvSpPr>
-        <p:spPr>
-          <a:xfrm>
-            <a:off x="8021608" y="1964536"/>
-            <a:ext cx="64008" cy="64008"/>
+          <p:cNvPr id="228" name="Oval 227"/>
+          <p:cNvSpPr/>
+          <p:nvPr/>
+        </p:nvSpPr>
+        <p:spPr>
+          <a:xfrm>
+            <a:off x="7811471" y="2019091"/>
+            <a:ext cx="73152" cy="73152"/>
           </a:xfrm>
           <a:prstGeom prst="ellipse">
             <a:avLst/>
@@ -11834,14 +12502,14 @@
       </p:sp>
       <p:sp>
         <p:nvSpPr>
-          <p:cNvPr id="212" name="Oval 211"/>
-          <p:cNvSpPr/>
-          <p:nvPr/>
-        </p:nvSpPr>
-        <p:spPr>
-          <a:xfrm>
-            <a:off x="7974636" y="2031283"/>
-            <a:ext cx="64008" cy="64008"/>
+          <p:cNvPr id="229" name="Oval 228"/>
+          <p:cNvSpPr/>
+          <p:nvPr/>
+        </p:nvSpPr>
+        <p:spPr>
+          <a:xfrm>
+            <a:off x="7837208" y="2083168"/>
+            <a:ext cx="73152" cy="73152"/>
           </a:xfrm>
           <a:prstGeom prst="ellipse">
             <a:avLst/>
@@ -11878,14 +12546,14 @@
       </p:sp>
       <p:sp>
         <p:nvSpPr>
-          <p:cNvPr id="213" name="Oval 212"/>
-          <p:cNvSpPr/>
-          <p:nvPr/>
-        </p:nvSpPr>
-        <p:spPr>
-          <a:xfrm>
-            <a:off x="8094886" y="2092960"/>
-            <a:ext cx="64008" cy="64008"/>
+          <p:cNvPr id="230" name="Oval 229"/>
+          <p:cNvSpPr/>
+          <p:nvPr/>
+        </p:nvSpPr>
+        <p:spPr>
+          <a:xfrm>
+            <a:off x="7869280" y="2142378"/>
+            <a:ext cx="73152" cy="73152"/>
           </a:xfrm>
           <a:prstGeom prst="ellipse">
             <a:avLst/>
@@ -11922,14 +12590,14 @@
       </p:sp>
       <p:sp>
         <p:nvSpPr>
-          <p:cNvPr id="214" name="Oval 213"/>
-          <p:cNvSpPr/>
-          <p:nvPr/>
-        </p:nvSpPr>
-        <p:spPr>
-          <a:xfrm>
-            <a:off x="8008087" y="2258505"/>
-            <a:ext cx="64008" cy="64008"/>
+          <p:cNvPr id="231" name="Oval 230"/>
+          <p:cNvSpPr/>
+          <p:nvPr/>
+        </p:nvSpPr>
+        <p:spPr>
+          <a:xfrm>
+            <a:off x="7829809" y="2301301"/>
+            <a:ext cx="73152" cy="73152"/>
           </a:xfrm>
           <a:prstGeom prst="ellipse">
             <a:avLst/>
@@ -11966,14 +12634,14 @@
       </p:sp>
       <p:sp>
         <p:nvSpPr>
-          <p:cNvPr id="215" name="Oval 214"/>
-          <p:cNvSpPr/>
-          <p:nvPr/>
-        </p:nvSpPr>
-        <p:spPr>
-          <a:xfrm>
-            <a:off x="8040213" y="2370392"/>
-            <a:ext cx="64008" cy="64008"/>
+          <p:cNvPr id="232" name="Oval 231"/>
+          <p:cNvSpPr/>
+          <p:nvPr/>
+        </p:nvSpPr>
+        <p:spPr>
+          <a:xfrm>
+            <a:off x="7819550" y="2408713"/>
+            <a:ext cx="73152" cy="73152"/>
           </a:xfrm>
           <a:prstGeom prst="ellipse">
             <a:avLst/>
@@ -12010,14 +12678,14 @@
       </p:sp>
       <p:sp>
         <p:nvSpPr>
-          <p:cNvPr id="216" name="Oval 215"/>
-          <p:cNvSpPr/>
-          <p:nvPr/>
-        </p:nvSpPr>
-        <p:spPr>
-          <a:xfrm>
-            <a:off x="7968147" y="2430504"/>
-            <a:ext cx="64008" cy="64008"/>
+          <p:cNvPr id="233" name="Oval 232"/>
+          <p:cNvSpPr/>
+          <p:nvPr/>
+        </p:nvSpPr>
+        <p:spPr>
+          <a:xfrm>
+            <a:off x="7902156" y="2466420"/>
+            <a:ext cx="73152" cy="73152"/>
           </a:xfrm>
           <a:prstGeom prst="ellipse">
             <a:avLst/>
@@ -12054,14 +12722,14 @@
       </p:sp>
       <p:sp>
         <p:nvSpPr>
-          <p:cNvPr id="217" name="Oval 216"/>
-          <p:cNvSpPr/>
-          <p:nvPr/>
-        </p:nvSpPr>
-        <p:spPr>
-          <a:xfrm>
-            <a:off x="8083733" y="2500478"/>
-            <a:ext cx="64008" cy="64008"/>
+          <p:cNvPr id="234" name="Oval 233"/>
+          <p:cNvSpPr/>
+          <p:nvPr/>
+        </p:nvSpPr>
+        <p:spPr>
+          <a:xfrm>
+            <a:off x="7867432" y="2533595"/>
+            <a:ext cx="73152" cy="73152"/>
           </a:xfrm>
           <a:prstGeom prst="ellipse">
             <a:avLst/>
@@ -12098,14 +12766,14 @@
       </p:sp>
       <p:sp>
         <p:nvSpPr>
-          <p:cNvPr id="218" name="Oval 217"/>
-          <p:cNvSpPr/>
-          <p:nvPr/>
-        </p:nvSpPr>
-        <p:spPr>
-          <a:xfrm>
-            <a:off x="7998782" y="2642893"/>
-            <a:ext cx="64008" cy="64008"/>
+          <p:cNvPr id="235" name="Oval 234"/>
+          <p:cNvSpPr/>
+          <p:nvPr/>
+        </p:nvSpPr>
+        <p:spPr>
+          <a:xfrm>
+            <a:off x="7750201" y="2670313"/>
+            <a:ext cx="73152" cy="73152"/>
           </a:xfrm>
           <a:prstGeom prst="ellipse">
             <a:avLst/>
@@ -12142,14 +12810,14 @@
       </p:sp>
       <p:sp>
         <p:nvSpPr>
-          <p:cNvPr id="219" name="Oval 218"/>
-          <p:cNvSpPr/>
-          <p:nvPr/>
-        </p:nvSpPr>
-        <p:spPr>
-          <a:xfrm>
-            <a:off x="7969790" y="2696198"/>
-            <a:ext cx="64008" cy="64008"/>
+          <p:cNvPr id="236" name="Oval 235"/>
+          <p:cNvSpPr/>
+          <p:nvPr/>
+        </p:nvSpPr>
+        <p:spPr>
+          <a:xfrm>
+            <a:off x="7893975" y="2721487"/>
+            <a:ext cx="73152" cy="73152"/>
           </a:xfrm>
           <a:prstGeom prst="ellipse">
             <a:avLst/>
@@ -12186,14 +12854,14 @@
       </p:sp>
       <p:sp>
         <p:nvSpPr>
-          <p:cNvPr id="220" name="Oval 219"/>
-          <p:cNvSpPr/>
-          <p:nvPr/>
-        </p:nvSpPr>
-        <p:spPr>
-          <a:xfrm>
-            <a:off x="7956037" y="2843869"/>
-            <a:ext cx="64008" cy="64008"/>
+          <p:cNvPr id="237" name="Oval 236"/>
+          <p:cNvSpPr/>
+          <p:nvPr/>
+        </p:nvSpPr>
+        <p:spPr>
+          <a:xfrm>
+            <a:off x="7844322" y="2863251"/>
+            <a:ext cx="73152" cy="73152"/>
           </a:xfrm>
           <a:prstGeom prst="ellipse">
             <a:avLst/>
@@ -12230,14 +12898,14 @@
       </p:sp>
       <p:sp>
         <p:nvSpPr>
-          <p:cNvPr id="221" name="Oval 220"/>
-          <p:cNvSpPr/>
-          <p:nvPr/>
-        </p:nvSpPr>
-        <p:spPr>
-          <a:xfrm>
-            <a:off x="8048119" y="2982337"/>
-            <a:ext cx="64008" cy="64008"/>
+          <p:cNvPr id="238" name="Oval 237"/>
+          <p:cNvSpPr/>
+          <p:nvPr/>
+        </p:nvSpPr>
+        <p:spPr>
+          <a:xfrm>
+            <a:off x="7874470" y="2996180"/>
+            <a:ext cx="73152" cy="73152"/>
           </a:xfrm>
           <a:prstGeom prst="ellipse">
             <a:avLst/>
@@ -12274,14 +12942,14 @@
       </p:sp>
       <p:sp>
         <p:nvSpPr>
-          <p:cNvPr id="222" name="Oval 221"/>
-          <p:cNvSpPr/>
-          <p:nvPr/>
-        </p:nvSpPr>
-        <p:spPr>
-          <a:xfrm>
-            <a:off x="8091522" y="3157537"/>
-            <a:ext cx="64008" cy="64008"/>
+          <p:cNvPr id="239" name="Oval 238"/>
+          <p:cNvSpPr/>
+          <p:nvPr/>
+        </p:nvSpPr>
+        <p:spPr>
+          <a:xfrm>
+            <a:off x="7907088" y="3164372"/>
+            <a:ext cx="73152" cy="73152"/>
           </a:xfrm>
           <a:prstGeom prst="ellipse">
             <a:avLst/>
@@ -12318,14 +12986,14 @@
       </p:sp>
       <p:sp>
         <p:nvSpPr>
-          <p:cNvPr id="223" name="Oval 222"/>
-          <p:cNvSpPr/>
-          <p:nvPr/>
-        </p:nvSpPr>
-        <p:spPr>
-          <a:xfrm>
-            <a:off x="7991885" y="3554929"/>
-            <a:ext cx="64008" cy="64008"/>
+          <p:cNvPr id="240" name="Oval 239"/>
+          <p:cNvSpPr/>
+          <p:nvPr/>
+        </p:nvSpPr>
+        <p:spPr>
+          <a:xfrm>
+            <a:off x="7869008" y="3545869"/>
+            <a:ext cx="73152" cy="73152"/>
           </a:xfrm>
           <a:prstGeom prst="ellipse">
             <a:avLst/>
@@ -12362,14 +13030,14 @@
       </p:sp>
       <p:sp>
         <p:nvSpPr>
-          <p:cNvPr id="224" name="Oval 223"/>
-          <p:cNvSpPr/>
-          <p:nvPr/>
-        </p:nvSpPr>
-        <p:spPr>
-          <a:xfrm>
-            <a:off x="7973379" y="3647934"/>
-            <a:ext cx="64008" cy="64008"/>
+          <p:cNvPr id="241" name="Oval 240"/>
+          <p:cNvSpPr/>
+          <p:nvPr/>
+        </p:nvSpPr>
+        <p:spPr>
+          <a:xfrm>
+            <a:off x="7891577" y="3635154"/>
+            <a:ext cx="73152" cy="73152"/>
           </a:xfrm>
           <a:prstGeom prst="ellipse">
             <a:avLst/>
@@ -12406,14 +13074,14 @@
       </p:sp>
       <p:sp>
         <p:nvSpPr>
-          <p:cNvPr id="225" name="Oval 224"/>
-          <p:cNvSpPr/>
-          <p:nvPr/>
-        </p:nvSpPr>
-        <p:spPr>
-          <a:xfrm>
-            <a:off x="8079231" y="3705551"/>
-            <a:ext cx="64008" cy="64008"/>
+          <p:cNvPr id="242" name="Oval 241"/>
+          <p:cNvSpPr/>
+          <p:nvPr/>
+        </p:nvSpPr>
+        <p:spPr>
+          <a:xfrm>
+            <a:off x="7841336" y="3690466"/>
+            <a:ext cx="73152" cy="73152"/>
           </a:xfrm>
           <a:prstGeom prst="ellipse">
             <a:avLst/>
@@ -12450,13 +13118,13 @@
       </p:sp>
       <p:sp>
         <p:nvSpPr>
-          <p:cNvPr id="226" name="TextBox 225"/>
+          <p:cNvPr id="243" name="TextBox 242"/>
           <p:cNvSpPr txBox="1"/>
           <p:nvPr/>
         </p:nvSpPr>
         <p:spPr>
           <a:xfrm>
-            <a:off x="8641080" y="5815584"/>
+            <a:off x="8458200" y="5724144"/>
             <a:ext cx="1097280" cy="274320"/>
           </a:xfrm>
           <a:prstGeom prst="rect">
@@ -12484,16 +13152,52 @@
           </a:p>
         </p:txBody>
       </p:sp>
+      <p:sp>
+        <p:nvSpPr>
+          <p:cNvPr id="244" name="TextBox 243"/>
+          <p:cNvSpPr txBox="1"/>
+          <p:nvPr/>
+        </p:nvSpPr>
+        <p:spPr>
+          <a:xfrm>
+            <a:off x="8503920" y="1115568"/>
+            <a:ext cx="1005840" cy="164592"/>
+          </a:xfrm>
+          <a:prstGeom prst="rect">
+            <a:avLst/>
+          </a:prstGeom>
+          <a:noFill/>
+          <a:effectLst/>
+        </p:spPr>
+        <p:txBody>
+          <a:bodyPr wrap="square" lIns="0" rIns="0" tIns="0" bIns="0" anchor="ctr">
+            <a:spAutoFit/>
+          </a:bodyPr>
+          <a:lstStyle/>
+          <a:p>
+            <a:pPr algn="ctr"/>
+            <a:r>
+              <a:rPr sz="700" b="1" i="0">
+                <a:solidFill>
+                  <a:srgbClr val="BBBBBB"/>
+                </a:solidFill>
+                <a:latin typeface="Arial"/>
+              </a:rPr>
+              <a:t>P=0.42</a:t>
+            </a:r>
+          </a:p>
+        </p:txBody>
+      </p:sp>
       <p:cxnSp>
         <p:nvCxnSpPr>
-          <p:cNvPr id="227" name="Connector 226"/>
+          <p:cNvPr id="245" name="Connector 244"/>
           <p:cNvCxnSpPr/>
           <p:nvPr/>
         </p:nvCxnSpPr>
         <p:spPr>
           <a:xfrm flipV="1">
-            <a:off x="8961120" y="1761060"/>
-            <a:ext cx="0" cy="1569015"/>
+            <a:off x="8778240" y="1829607"/>
+            <a:ext cx="0" cy="1506254"/>
           </a:xfrm>
           <a:prstGeom prst="line">
             <a:avLst/>
@@ -12522,13 +13226,13 @@
       </p:cxnSp>
       <p:cxnSp>
         <p:nvCxnSpPr>
-          <p:cNvPr id="228" name="Connector 227"/>
+          <p:cNvPr id="246" name="Connector 245"/>
           <p:cNvCxnSpPr/>
           <p:nvPr/>
         </p:nvCxnSpPr>
         <p:spPr>
           <a:xfrm>
-            <a:off x="8874252" y="3330075"/>
+            <a:off x="8691372" y="3335861"/>
             <a:ext cx="173736" cy="0"/>
           </a:xfrm>
           <a:prstGeom prst="line">
@@ -12558,13 +13262,13 @@
       </p:cxnSp>
       <p:cxnSp>
         <p:nvCxnSpPr>
-          <p:cNvPr id="229" name="Connector 228"/>
+          <p:cNvPr id="247" name="Connector 246"/>
           <p:cNvCxnSpPr/>
           <p:nvPr/>
         </p:nvCxnSpPr>
         <p:spPr>
           <a:xfrm>
-            <a:off x="8874252" y="1761060"/>
+            <a:off x="8691372" y="1829607"/>
             <a:ext cx="173736" cy="0"/>
           </a:xfrm>
           <a:prstGeom prst="line">
@@ -12594,13 +13298,13 @@
       </p:cxnSp>
       <p:sp>
         <p:nvSpPr>
-          <p:cNvPr id="230" name="Rectangle 229"/>
-          <p:cNvSpPr/>
-          <p:nvPr/>
-        </p:nvSpPr>
-        <p:spPr>
-          <a:xfrm>
-            <a:off x="8787384" y="2764219"/>
+          <p:cNvPr id="248" name="Rectangle 247"/>
+          <p:cNvSpPr/>
+          <p:nvPr/>
+        </p:nvSpPr>
+        <p:spPr>
+          <a:xfrm>
+            <a:off x="8604504" y="2792639"/>
             <a:ext cx="347472" cy="1"/>
           </a:xfrm>
           <a:prstGeom prst="rect">
@@ -12638,13 +13342,13 @@
       </p:sp>
       <p:cxnSp>
         <p:nvCxnSpPr>
-          <p:cNvPr id="231" name="Connector 230"/>
+          <p:cNvPr id="249" name="Connector 248"/>
           <p:cNvCxnSpPr/>
           <p:nvPr/>
         </p:nvCxnSpPr>
         <p:spPr>
           <a:xfrm>
-            <a:off x="8787384" y="2305517"/>
+            <a:off x="8604504" y="2352285"/>
             <a:ext cx="347472" cy="0"/>
           </a:xfrm>
           <a:prstGeom prst="line">
@@ -12674,14 +13378,14 @@
       </p:cxnSp>
       <p:sp>
         <p:nvSpPr>
-          <p:cNvPr id="232" name="Oval 231"/>
-          <p:cNvSpPr/>
-          <p:nvPr/>
-        </p:nvSpPr>
-        <p:spPr>
-          <a:xfrm>
-            <a:off x="9010284" y="1729056"/>
-            <a:ext cx="64008" cy="64008"/>
+          <p:cNvPr id="250" name="Oval 249"/>
+          <p:cNvSpPr/>
+          <p:nvPr/>
+        </p:nvSpPr>
+        <p:spPr>
+          <a:xfrm>
+            <a:off x="8793296" y="1793031"/>
+            <a:ext cx="73152" cy="73152"/>
           </a:xfrm>
           <a:prstGeom prst="ellipse">
             <a:avLst/>
@@ -12718,14 +13422,14 @@
       </p:sp>
       <p:sp>
         <p:nvSpPr>
-          <p:cNvPr id="233" name="Oval 232"/>
-          <p:cNvSpPr/>
-          <p:nvPr/>
-        </p:nvSpPr>
-        <p:spPr>
-          <a:xfrm>
-            <a:off x="8901262" y="1752613"/>
-            <a:ext cx="64008" cy="64008"/>
+          <p:cNvPr id="251" name="Oval 250"/>
+          <p:cNvSpPr/>
+          <p:nvPr/>
+        </p:nvSpPr>
+        <p:spPr>
+          <a:xfrm>
+            <a:off x="8656046" y="1815645"/>
+            <a:ext cx="73152" cy="73152"/>
           </a:xfrm>
           <a:prstGeom prst="ellipse">
             <a:avLst/>
@@ -12762,14 +13466,14 @@
       </p:sp>
       <p:sp>
         <p:nvSpPr>
-          <p:cNvPr id="234" name="Oval 233"/>
-          <p:cNvSpPr/>
-          <p:nvPr/>
-        </p:nvSpPr>
-        <p:spPr>
-          <a:xfrm>
-            <a:off x="8886666" y="1877997"/>
-            <a:ext cx="64008" cy="64008"/>
+          <p:cNvPr id="252" name="Oval 251"/>
+          <p:cNvSpPr/>
+          <p:nvPr/>
+        </p:nvSpPr>
+        <p:spPr>
+          <a:xfrm>
+            <a:off x="8715933" y="1936014"/>
+            <a:ext cx="73152" cy="73152"/>
           </a:xfrm>
           <a:prstGeom prst="ellipse">
             <a:avLst/>
@@ -12806,14 +13510,14 @@
       </p:sp>
       <p:sp>
         <p:nvSpPr>
-          <p:cNvPr id="235" name="Oval 234"/>
-          <p:cNvSpPr/>
-          <p:nvPr/>
-        </p:nvSpPr>
-        <p:spPr>
-          <a:xfrm>
-            <a:off x="8912339" y="1975234"/>
-            <a:ext cx="64008" cy="64008"/>
+          <p:cNvPr id="253" name="Oval 252"/>
+          <p:cNvSpPr/>
+          <p:nvPr/>
+        </p:nvSpPr>
+        <p:spPr>
+          <a:xfrm>
+            <a:off x="8821192" y="2029361"/>
+            <a:ext cx="73152" cy="73152"/>
           </a:xfrm>
           <a:prstGeom prst="ellipse">
             <a:avLst/>
@@ -12850,14 +13554,14 @@
       </p:sp>
       <p:sp>
         <p:nvSpPr>
-          <p:cNvPr id="236" name="Oval 235"/>
-          <p:cNvSpPr/>
-          <p:nvPr/>
-        </p:nvSpPr>
-        <p:spPr>
-          <a:xfrm>
-            <a:off x="8963696" y="2005802"/>
-            <a:ext cx="64008" cy="64008"/>
+          <p:cNvPr id="254" name="Oval 253"/>
+          <p:cNvSpPr/>
+          <p:nvPr/>
+        </p:nvSpPr>
+        <p:spPr>
+          <a:xfrm>
+            <a:off x="8707390" y="2058707"/>
+            <a:ext cx="73152" cy="73152"/>
           </a:xfrm>
           <a:prstGeom prst="ellipse">
             <a:avLst/>
@@ -12894,14 +13598,14 @@
       </p:sp>
       <p:sp>
         <p:nvSpPr>
-          <p:cNvPr id="237" name="Oval 236"/>
-          <p:cNvSpPr/>
-          <p:nvPr/>
-        </p:nvSpPr>
-        <p:spPr>
-          <a:xfrm>
-            <a:off x="9006980" y="2110564"/>
-            <a:ext cx="64008" cy="64008"/>
+          <p:cNvPr id="255" name="Oval 254"/>
+          <p:cNvSpPr/>
+          <p:nvPr/>
+        </p:nvSpPr>
+        <p:spPr>
+          <a:xfrm>
+            <a:off x="8752881" y="2159278"/>
+            <a:ext cx="73152" cy="73152"/>
           </a:xfrm>
           <a:prstGeom prst="ellipse">
             <a:avLst/>
@@ -12938,14 +13642,14 @@
       </p:sp>
       <p:sp>
         <p:nvSpPr>
-          <p:cNvPr id="238" name="Oval 237"/>
-          <p:cNvSpPr/>
-          <p:nvPr/>
-        </p:nvSpPr>
-        <p:spPr>
-          <a:xfrm>
-            <a:off x="9001319" y="2195235"/>
-            <a:ext cx="64008" cy="64008"/>
+          <p:cNvPr id="256" name="Oval 255"/>
+          <p:cNvSpPr/>
+          <p:nvPr/>
+        </p:nvSpPr>
+        <p:spPr>
+          <a:xfrm>
+            <a:off x="8818168" y="2240563"/>
+            <a:ext cx="73152" cy="73152"/>
           </a:xfrm>
           <a:prstGeom prst="ellipse">
             <a:avLst/>
@@ -12982,14 +13686,14 @@
       </p:sp>
       <p:sp>
         <p:nvSpPr>
-          <p:cNvPr id="239" name="Oval 238"/>
-          <p:cNvSpPr/>
-          <p:nvPr/>
-        </p:nvSpPr>
-        <p:spPr>
-          <a:xfrm>
-            <a:off x="8930238" y="2218463"/>
-            <a:ext cx="64008" cy="64008"/>
+          <p:cNvPr id="257" name="Oval 256"/>
+          <p:cNvSpPr/>
+          <p:nvPr/>
+        </p:nvSpPr>
+        <p:spPr>
+          <a:xfrm>
+            <a:off x="8709609" y="2262861"/>
+            <a:ext cx="73152" cy="73152"/>
           </a:xfrm>
           <a:prstGeom prst="ellipse">
             <a:avLst/>
@@ -13026,14 +13730,14 @@
       </p:sp>
       <p:sp>
         <p:nvSpPr>
-          <p:cNvPr id="240" name="Oval 239"/>
-          <p:cNvSpPr/>
-          <p:nvPr/>
-        </p:nvSpPr>
-        <p:spPr>
-          <a:xfrm>
-            <a:off x="8904107" y="2273513"/>
-            <a:ext cx="64008" cy="64008"/>
+          <p:cNvPr id="258" name="Oval 257"/>
+          <p:cNvSpPr/>
+          <p:nvPr/>
+        </p:nvSpPr>
+        <p:spPr>
+          <a:xfrm>
+            <a:off x="8711006" y="2315709"/>
+            <a:ext cx="73152" cy="73152"/>
           </a:xfrm>
           <a:prstGeom prst="ellipse">
             <a:avLst/>
@@ -13070,14 +13774,14 @@
       </p:sp>
       <p:sp>
         <p:nvSpPr>
-          <p:cNvPr id="241" name="Oval 240"/>
-          <p:cNvSpPr/>
-          <p:nvPr/>
-        </p:nvSpPr>
-        <p:spPr>
-          <a:xfrm>
-            <a:off x="8894548" y="2297860"/>
-            <a:ext cx="64008" cy="64008"/>
+          <p:cNvPr id="259" name="Oval 258"/>
+          <p:cNvSpPr/>
+          <p:nvPr/>
+        </p:nvSpPr>
+        <p:spPr>
+          <a:xfrm>
+            <a:off x="8693608" y="2339082"/>
+            <a:ext cx="73152" cy="73152"/>
           </a:xfrm>
           <a:prstGeom prst="ellipse">
             <a:avLst/>
@@ -13114,14 +13818,14 @@
       </p:sp>
       <p:sp>
         <p:nvSpPr>
-          <p:cNvPr id="242" name="Oval 241"/>
-          <p:cNvSpPr/>
-          <p:nvPr/>
-        </p:nvSpPr>
-        <p:spPr>
-          <a:xfrm>
-            <a:off x="8922572" y="2536872"/>
-            <a:ext cx="64008" cy="64008"/>
+          <p:cNvPr id="260" name="Oval 259"/>
+          <p:cNvSpPr/>
+          <p:nvPr/>
+        </p:nvSpPr>
+        <p:spPr>
+          <a:xfrm>
+            <a:off x="8716408" y="2568534"/>
+            <a:ext cx="73152" cy="73152"/>
           </a:xfrm>
           <a:prstGeom prst="ellipse">
             <a:avLst/>
@@ -13158,14 +13862,14 @@
       </p:sp>
       <p:sp>
         <p:nvSpPr>
-          <p:cNvPr id="243" name="Oval 242"/>
-          <p:cNvSpPr/>
-          <p:nvPr/>
-        </p:nvSpPr>
-        <p:spPr>
-          <a:xfrm>
-            <a:off x="8850947" y="2609815"/>
-            <a:ext cx="64008" cy="64008"/>
+          <p:cNvPr id="261" name="Oval 260"/>
+          <p:cNvSpPr/>
+          <p:nvPr/>
+        </p:nvSpPr>
+        <p:spPr>
+          <a:xfrm>
+            <a:off x="8825297" y="2638559"/>
+            <a:ext cx="73152" cy="73152"/>
           </a:xfrm>
           <a:prstGeom prst="ellipse">
             <a:avLst/>
@@ -13202,14 +13906,14 @@
       </p:sp>
       <p:sp>
         <p:nvSpPr>
-          <p:cNvPr id="244" name="Oval 243"/>
-          <p:cNvSpPr/>
-          <p:nvPr/>
-        </p:nvSpPr>
-        <p:spPr>
-          <a:xfrm>
-            <a:off x="8953748" y="2732215"/>
-            <a:ext cx="64008" cy="64008"/>
+          <p:cNvPr id="262" name="Oval 261"/>
+          <p:cNvSpPr/>
+          <p:nvPr/>
+        </p:nvSpPr>
+        <p:spPr>
+          <a:xfrm>
+            <a:off x="8727202" y="2756063"/>
+            <a:ext cx="73152" cy="73152"/>
           </a:xfrm>
           <a:prstGeom prst="ellipse">
             <a:avLst/>
@@ -13246,14 +13950,14 @@
       </p:sp>
       <p:sp>
         <p:nvSpPr>
-          <p:cNvPr id="245" name="Oval 244"/>
-          <p:cNvSpPr/>
-          <p:nvPr/>
-        </p:nvSpPr>
-        <p:spPr>
-          <a:xfrm>
-            <a:off x="8889604" y="2754552"/>
-            <a:ext cx="64008" cy="64008"/>
+          <p:cNvPr id="263" name="Oval 262"/>
+          <p:cNvSpPr/>
+          <p:nvPr/>
+        </p:nvSpPr>
+        <p:spPr>
+          <a:xfrm>
+            <a:off x="8664691" y="2777507"/>
+            <a:ext cx="73152" cy="73152"/>
           </a:xfrm>
           <a:prstGeom prst="ellipse">
             <a:avLst/>
@@ -13290,14 +13994,14 @@
       </p:sp>
       <p:sp>
         <p:nvSpPr>
-          <p:cNvPr id="246" name="Oval 245"/>
-          <p:cNvSpPr/>
-          <p:nvPr/>
-        </p:nvSpPr>
-        <p:spPr>
-          <a:xfrm>
-            <a:off x="9000870" y="2826149"/>
-            <a:ext cx="64008" cy="64008"/>
+          <p:cNvPr id="264" name="Oval 263"/>
+          <p:cNvSpPr/>
+          <p:nvPr/>
+        </p:nvSpPr>
+        <p:spPr>
+          <a:xfrm>
+            <a:off x="8785928" y="2846239"/>
+            <a:ext cx="73152" cy="73152"/>
           </a:xfrm>
           <a:prstGeom prst="ellipse">
             <a:avLst/>
@@ -13334,14 +14038,14 @@
       </p:sp>
       <p:sp>
         <p:nvSpPr>
-          <p:cNvPr id="247" name="Oval 246"/>
-          <p:cNvSpPr/>
-          <p:nvPr/>
-        </p:nvSpPr>
-        <p:spPr>
-          <a:xfrm>
-            <a:off x="8918797" y="3048007"/>
-            <a:ext cx="64008" cy="64008"/>
+          <p:cNvPr id="265" name="Oval 264"/>
+          <p:cNvSpPr/>
+          <p:nvPr/>
+        </p:nvSpPr>
+        <p:spPr>
+          <a:xfrm>
+            <a:off x="8763161" y="3059223"/>
+            <a:ext cx="73152" cy="73152"/>
           </a:xfrm>
           <a:prstGeom prst="ellipse">
             <a:avLst/>
@@ -13378,14 +14082,14 @@
       </p:sp>
       <p:sp>
         <p:nvSpPr>
-          <p:cNvPr id="248" name="Oval 247"/>
-          <p:cNvSpPr/>
-          <p:nvPr/>
-        </p:nvSpPr>
-        <p:spPr>
-          <a:xfrm>
-            <a:off x="8847842" y="3298071"/>
-            <a:ext cx="64008" cy="64008"/>
+          <p:cNvPr id="266" name="Oval 265"/>
+          <p:cNvSpPr/>
+          <p:nvPr/>
+        </p:nvSpPr>
+        <p:spPr>
+          <a:xfrm>
+            <a:off x="8788422" y="3299285"/>
+            <a:ext cx="73152" cy="73152"/>
           </a:xfrm>
           <a:prstGeom prst="ellipse">
             <a:avLst/>
@@ -13422,14 +14126,14 @@
       </p:sp>
       <p:cxnSp>
         <p:nvCxnSpPr>
-          <p:cNvPr id="249" name="Connector 248"/>
+          <p:cNvPr id="267" name="Connector 266"/>
           <p:cNvCxnSpPr/>
           <p:nvPr/>
         </p:nvCxnSpPr>
         <p:spPr>
           <a:xfrm flipV="1">
-            <a:off x="9418320" y="1604356"/>
-            <a:ext cx="0" cy="2339290"/>
+            <a:off x="9235440" y="1679171"/>
+            <a:ext cx="0" cy="2245718"/>
           </a:xfrm>
           <a:prstGeom prst="line">
             <a:avLst/>
@@ -13458,13 +14162,13 @@
       </p:cxnSp>
       <p:cxnSp>
         <p:nvCxnSpPr>
-          <p:cNvPr id="250" name="Connector 249"/>
+          <p:cNvPr id="268" name="Connector 267"/>
           <p:cNvCxnSpPr/>
           <p:nvPr/>
         </p:nvCxnSpPr>
         <p:spPr>
           <a:xfrm>
-            <a:off x="9331452" y="3943646"/>
+            <a:off x="9148572" y="3924889"/>
             <a:ext cx="173736" cy="0"/>
           </a:xfrm>
           <a:prstGeom prst="line">
@@ -13494,13 +14198,13 @@
       </p:cxnSp>
       <p:cxnSp>
         <p:nvCxnSpPr>
-          <p:cNvPr id="251" name="Connector 250"/>
+          <p:cNvPr id="269" name="Connector 268"/>
           <p:cNvCxnSpPr/>
           <p:nvPr/>
         </p:nvCxnSpPr>
         <p:spPr>
           <a:xfrm>
-            <a:off x="9331452" y="1604356"/>
+            <a:off x="9148572" y="1679171"/>
             <a:ext cx="173736" cy="0"/>
           </a:xfrm>
           <a:prstGeom prst="line">
@@ -13530,13 +14234,13 @@
       </p:cxnSp>
       <p:sp>
         <p:nvSpPr>
-          <p:cNvPr id="252" name="Rectangle 251"/>
-          <p:cNvSpPr/>
-          <p:nvPr/>
-        </p:nvSpPr>
-        <p:spPr>
-          <a:xfrm>
-            <a:off x="9244584" y="3189693"/>
+          <p:cNvPr id="270" name="Rectangle 269"/>
+          <p:cNvSpPr/>
+          <p:nvPr/>
+        </p:nvSpPr>
+        <p:spPr>
+          <a:xfrm>
+            <a:off x="9061704" y="3201094"/>
             <a:ext cx="347472" cy="1"/>
           </a:xfrm>
           <a:prstGeom prst="rect">
@@ -13574,13 +14278,13 @@
       </p:sp>
       <p:cxnSp>
         <p:nvCxnSpPr>
-          <p:cNvPr id="253" name="Connector 252"/>
+          <p:cNvPr id="271" name="Connector 270"/>
           <p:cNvCxnSpPr/>
           <p:nvPr/>
         </p:nvCxnSpPr>
         <p:spPr>
           <a:xfrm>
-            <a:off x="9244584" y="2643005"/>
+            <a:off x="9061704" y="2676274"/>
             <a:ext cx="347472" cy="0"/>
           </a:xfrm>
           <a:prstGeom prst="line">
@@ -13610,14 +14314,14 @@
       </p:cxnSp>
       <p:sp>
         <p:nvSpPr>
-          <p:cNvPr id="254" name="Oval 253"/>
-          <p:cNvSpPr/>
-          <p:nvPr/>
-        </p:nvSpPr>
-        <p:spPr>
-          <a:xfrm>
-            <a:off x="9305507" y="1572352"/>
-            <a:ext cx="64008" cy="64008"/>
+          <p:cNvPr id="272" name="Oval 271"/>
+          <p:cNvSpPr/>
+          <p:nvPr/>
+        </p:nvSpPr>
+        <p:spPr>
+          <a:xfrm>
+            <a:off x="9276756" y="1642595"/>
+            <a:ext cx="73152" cy="73152"/>
           </a:xfrm>
           <a:prstGeom prst="ellipse">
             <a:avLst/>
@@ -13654,14 +14358,14 @@
       </p:sp>
       <p:sp>
         <p:nvSpPr>
-          <p:cNvPr id="255" name="Oval 254"/>
-          <p:cNvSpPr/>
-          <p:nvPr/>
-        </p:nvSpPr>
-        <p:spPr>
-          <a:xfrm>
-            <a:off x="9458637" y="1730891"/>
-            <a:ext cx="64008" cy="64008"/>
+          <p:cNvPr id="273" name="Oval 272"/>
+          <p:cNvSpPr/>
+          <p:nvPr/>
+        </p:nvSpPr>
+        <p:spPr>
+          <a:xfrm>
+            <a:off x="9243449" y="1794792"/>
+            <a:ext cx="73152" cy="73152"/>
           </a:xfrm>
           <a:prstGeom prst="ellipse">
             <a:avLst/>
@@ -13698,14 +14402,14 @@
       </p:sp>
       <p:sp>
         <p:nvSpPr>
-          <p:cNvPr id="256" name="Oval 255"/>
-          <p:cNvSpPr/>
-          <p:nvPr/>
-        </p:nvSpPr>
-        <p:spPr>
-          <a:xfrm>
-            <a:off x="9365840" y="1749145"/>
-            <a:ext cx="64008" cy="64008"/>
+          <p:cNvPr id="274" name="Oval 273"/>
+          <p:cNvSpPr/>
+          <p:nvPr/>
+        </p:nvSpPr>
+        <p:spPr>
+          <a:xfrm>
+            <a:off x="9246969" y="1812316"/>
+            <a:ext cx="73152" cy="73152"/>
           </a:xfrm>
           <a:prstGeom prst="ellipse">
             <a:avLst/>
@@ -13742,14 +14446,14 @@
       </p:sp>
       <p:sp>
         <p:nvSpPr>
-          <p:cNvPr id="257" name="Oval 256"/>
-          <p:cNvSpPr/>
-          <p:nvPr/>
-        </p:nvSpPr>
-        <p:spPr>
-          <a:xfrm>
-            <a:off x="9386686" y="1840854"/>
-            <a:ext cx="64008" cy="64008"/>
+          <p:cNvPr id="275" name="Oval 274"/>
+          <p:cNvSpPr/>
+          <p:nvPr/>
+        </p:nvSpPr>
+        <p:spPr>
+          <a:xfrm>
+            <a:off x="9115069" y="1900356"/>
+            <a:ext cx="73152" cy="73152"/>
           </a:xfrm>
           <a:prstGeom prst="ellipse">
             <a:avLst/>
@@ -13786,14 +14490,14 @@
       </p:sp>
       <p:sp>
         <p:nvSpPr>
-          <p:cNvPr id="258" name="Oval 257"/>
-          <p:cNvSpPr/>
-          <p:nvPr/>
-        </p:nvSpPr>
-        <p:spPr>
-          <a:xfrm>
-            <a:off x="9444652" y="1871627"/>
-            <a:ext cx="64008" cy="64008"/>
+          <p:cNvPr id="276" name="Oval 275"/>
+          <p:cNvSpPr/>
+          <p:nvPr/>
+        </p:nvSpPr>
+        <p:spPr>
+          <a:xfrm>
+            <a:off x="9178076" y="1929899"/>
+            <a:ext cx="73152" cy="73152"/>
           </a:xfrm>
           <a:prstGeom prst="ellipse">
             <a:avLst/>
@@ -13830,14 +14534,14 @@
       </p:sp>
       <p:sp>
         <p:nvSpPr>
-          <p:cNvPr id="259" name="Oval 258"/>
-          <p:cNvSpPr/>
-          <p:nvPr/>
-        </p:nvSpPr>
-        <p:spPr>
-          <a:xfrm>
-            <a:off x="9311446" y="2361993"/>
-            <a:ext cx="64008" cy="64008"/>
+          <p:cNvPr id="277" name="Oval 276"/>
+          <p:cNvSpPr/>
+          <p:nvPr/>
+        </p:nvSpPr>
+        <p:spPr>
+          <a:xfrm>
+            <a:off x="9216278" y="2400650"/>
+            <a:ext cx="73152" cy="73152"/>
           </a:xfrm>
           <a:prstGeom prst="ellipse">
             <a:avLst/>
@@ -13874,14 +14578,14 @@
       </p:sp>
       <p:sp>
         <p:nvSpPr>
-          <p:cNvPr id="260" name="Oval 259"/>
-          <p:cNvSpPr/>
-          <p:nvPr/>
-        </p:nvSpPr>
-        <p:spPr>
-          <a:xfrm>
-            <a:off x="9372745" y="2479319"/>
-            <a:ext cx="64008" cy="64008"/>
+          <p:cNvPr id="278" name="Oval 277"/>
+          <p:cNvSpPr/>
+          <p:nvPr/>
+        </p:nvSpPr>
+        <p:spPr>
+          <a:xfrm>
+            <a:off x="9218962" y="2513283"/>
+            <a:ext cx="73152" cy="73152"/>
           </a:xfrm>
           <a:prstGeom prst="ellipse">
             <a:avLst/>
@@ -13918,14 +14622,14 @@
       </p:sp>
       <p:sp>
         <p:nvSpPr>
-          <p:cNvPr id="261" name="Oval 260"/>
-          <p:cNvSpPr/>
-          <p:nvPr/>
-        </p:nvSpPr>
-        <p:spPr>
-          <a:xfrm>
-            <a:off x="9468587" y="2555369"/>
-            <a:ext cx="64008" cy="64008"/>
+          <p:cNvPr id="279" name="Oval 278"/>
+          <p:cNvSpPr/>
+          <p:nvPr/>
+        </p:nvSpPr>
+        <p:spPr>
+          <a:xfrm>
+            <a:off x="9226585" y="2586291"/>
+            <a:ext cx="73152" cy="73152"/>
           </a:xfrm>
           <a:prstGeom prst="ellipse">
             <a:avLst/>
@@ -13962,14 +14666,14 @@
       </p:sp>
       <p:sp>
         <p:nvSpPr>
-          <p:cNvPr id="262" name="Oval 261"/>
-          <p:cNvSpPr/>
-          <p:nvPr/>
-        </p:nvSpPr>
-        <p:spPr>
-          <a:xfrm>
-            <a:off x="9332028" y="2666633"/>
-            <a:ext cx="64008" cy="64008"/>
+          <p:cNvPr id="280" name="Oval 279"/>
+          <p:cNvSpPr/>
+          <p:nvPr/>
+        </p:nvSpPr>
+        <p:spPr>
+          <a:xfrm>
+            <a:off x="9177907" y="2693105"/>
+            <a:ext cx="73152" cy="73152"/>
           </a:xfrm>
           <a:prstGeom prst="ellipse">
             <a:avLst/>
@@ -14006,14 +14710,14 @@
       </p:sp>
       <p:sp>
         <p:nvSpPr>
-          <p:cNvPr id="263" name="Oval 262"/>
-          <p:cNvSpPr/>
-          <p:nvPr/>
-        </p:nvSpPr>
-        <p:spPr>
-          <a:xfrm>
-            <a:off x="9387224" y="2742794"/>
-            <a:ext cx="64008" cy="64008"/>
+          <p:cNvPr id="281" name="Oval 280"/>
+          <p:cNvSpPr/>
+          <p:nvPr/>
+        </p:nvSpPr>
+        <p:spPr>
+          <a:xfrm>
+            <a:off x="9223414" y="2766219"/>
+            <a:ext cx="73152" cy="73152"/>
           </a:xfrm>
           <a:prstGeom prst="ellipse">
             <a:avLst/>
@@ -14050,14 +14754,14 @@
       </p:sp>
       <p:sp>
         <p:nvSpPr>
-          <p:cNvPr id="264" name="Oval 263"/>
-          <p:cNvSpPr/>
-          <p:nvPr/>
-        </p:nvSpPr>
-        <p:spPr>
-          <a:xfrm>
-            <a:off x="9362961" y="2954238"/>
-            <a:ext cx="64008" cy="64008"/>
+          <p:cNvPr id="282" name="Oval 281"/>
+          <p:cNvSpPr/>
+          <p:nvPr/>
+        </p:nvSpPr>
+        <p:spPr>
+          <a:xfrm>
+            <a:off x="9145267" y="2969205"/>
+            <a:ext cx="73152" cy="73152"/>
           </a:xfrm>
           <a:prstGeom prst="ellipse">
             <a:avLst/>
@@ -14094,14 +14798,14 @@
       </p:sp>
       <p:sp>
         <p:nvSpPr>
-          <p:cNvPr id="265" name="Oval 264"/>
-          <p:cNvSpPr/>
-          <p:nvPr/>
-        </p:nvSpPr>
-        <p:spPr>
-          <a:xfrm>
-            <a:off x="9400395" y="3145422"/>
-            <a:ext cx="64008" cy="64008"/>
+          <p:cNvPr id="283" name="Oval 282"/>
+          <p:cNvSpPr/>
+          <p:nvPr/>
+        </p:nvSpPr>
+        <p:spPr>
+          <a:xfrm>
+            <a:off x="9258777" y="3152742"/>
+            <a:ext cx="73152" cy="73152"/>
           </a:xfrm>
           <a:prstGeom prst="ellipse">
             <a:avLst/>
@@ -14138,14 +14842,14 @@
       </p:sp>
       <p:sp>
         <p:nvSpPr>
-          <p:cNvPr id="266" name="Oval 265"/>
-          <p:cNvSpPr/>
-          <p:nvPr/>
-        </p:nvSpPr>
-        <p:spPr>
-          <a:xfrm>
-            <a:off x="9332377" y="3194490"/>
-            <a:ext cx="64008" cy="64008"/>
+          <p:cNvPr id="284" name="Oval 283"/>
+          <p:cNvSpPr/>
+          <p:nvPr/>
+        </p:nvSpPr>
+        <p:spPr>
+          <a:xfrm>
+            <a:off x="9285596" y="3199847"/>
+            <a:ext cx="73152" cy="73152"/>
           </a:xfrm>
           <a:prstGeom prst="ellipse">
             <a:avLst/>
@@ -14182,14 +14886,14 @@
       </p:sp>
       <p:sp>
         <p:nvSpPr>
-          <p:cNvPr id="267" name="Oval 266"/>
-          <p:cNvSpPr/>
-          <p:nvPr/>
-        </p:nvSpPr>
-        <p:spPr>
-          <a:xfrm>
-            <a:off x="9416287" y="3267452"/>
-            <a:ext cx="64008" cy="64008"/>
+          <p:cNvPr id="285" name="Oval 284"/>
+          <p:cNvSpPr/>
+          <p:nvPr/>
+        </p:nvSpPr>
+        <p:spPr>
+          <a:xfrm>
+            <a:off x="9278126" y="3269891"/>
+            <a:ext cx="73152" cy="73152"/>
           </a:xfrm>
           <a:prstGeom prst="ellipse">
             <a:avLst/>
@@ -14226,14 +14930,14 @@
       </p:sp>
       <p:sp>
         <p:nvSpPr>
-          <p:cNvPr id="268" name="Oval 267"/>
-          <p:cNvSpPr/>
-          <p:nvPr/>
-        </p:nvSpPr>
-        <p:spPr>
-          <a:xfrm>
-            <a:off x="9300877" y="3631215"/>
-            <a:ext cx="64008" cy="64008"/>
+          <p:cNvPr id="286" name="Oval 285"/>
+          <p:cNvSpPr/>
+          <p:nvPr/>
+        </p:nvSpPr>
+        <p:spPr>
+          <a:xfrm>
+            <a:off x="9207784" y="3619103"/>
+            <a:ext cx="73152" cy="73152"/>
           </a:xfrm>
           <a:prstGeom prst="ellipse">
             <a:avLst/>
@@ -14270,14 +14974,14 @@
       </p:sp>
       <p:sp>
         <p:nvSpPr>
-          <p:cNvPr id="269" name="Oval 268"/>
-          <p:cNvSpPr/>
-          <p:nvPr/>
-        </p:nvSpPr>
-        <p:spPr>
-          <a:xfrm>
-            <a:off x="9443722" y="3911642"/>
-            <a:ext cx="64008" cy="64008"/>
+          <p:cNvPr id="287" name="Oval 286"/>
+          <p:cNvSpPr/>
+          <p:nvPr/>
+        </p:nvSpPr>
+        <p:spPr>
+          <a:xfrm>
+            <a:off x="9128537" y="3888313"/>
+            <a:ext cx="73152" cy="73152"/>
           </a:xfrm>
           <a:prstGeom prst="ellipse">
             <a:avLst/>
@@ -14314,13 +15018,13 @@
       </p:sp>
       <p:sp>
         <p:nvSpPr>
-          <p:cNvPr id="270" name="TextBox 269"/>
+          <p:cNvPr id="288" name="TextBox 287"/>
           <p:cNvSpPr txBox="1"/>
           <p:nvPr/>
         </p:nvSpPr>
         <p:spPr>
           <a:xfrm>
-            <a:off x="10012680" y="5815584"/>
+            <a:off x="9829800" y="5724144"/>
             <a:ext cx="1097280" cy="274320"/>
           </a:xfrm>
           <a:prstGeom prst="rect">
@@ -14348,16 +15052,52 @@
           </a:p>
         </p:txBody>
       </p:sp>
+      <p:sp>
+        <p:nvSpPr>
+          <p:cNvPr id="289" name="TextBox 288"/>
+          <p:cNvSpPr txBox="1"/>
+          <p:nvPr/>
+        </p:nvSpPr>
+        <p:spPr>
+          <a:xfrm>
+            <a:off x="9875520" y="1115568"/>
+            <a:ext cx="1005840" cy="164592"/>
+          </a:xfrm>
+          <a:prstGeom prst="rect">
+            <a:avLst/>
+          </a:prstGeom>
+          <a:noFill/>
+          <a:effectLst/>
+        </p:spPr>
+        <p:txBody>
+          <a:bodyPr wrap="square" lIns="0" rIns="0" tIns="0" bIns="0" anchor="ctr">
+            <a:spAutoFit/>
+          </a:bodyPr>
+          <a:lstStyle/>
+          <a:p>
+            <a:pPr algn="ctr"/>
+            <a:r>
+              <a:rPr sz="700" b="1" i="0">
+                <a:solidFill>
+                  <a:srgbClr val="BBBBBB"/>
+                </a:solidFill>
+                <a:latin typeface="Arial"/>
+              </a:rPr>
+              <a:t>P=0.18</a:t>
+            </a:r>
+          </a:p>
+        </p:txBody>
+      </p:sp>
       <p:cxnSp>
         <p:nvCxnSpPr>
-          <p:cNvPr id="271" name="Connector 270"/>
+          <p:cNvPr id="290" name="Connector 289"/>
           <p:cNvCxnSpPr/>
           <p:nvPr/>
         </p:nvCxnSpPr>
         <p:spPr>
           <a:xfrm flipV="1">
-            <a:off x="10332720" y="1929624"/>
-            <a:ext cx="0" cy="1300132"/>
+            <a:off x="10149840" y="1991428"/>
+            <a:ext cx="0" cy="1248126"/>
           </a:xfrm>
           <a:prstGeom prst="line">
             <a:avLst/>
@@ -14386,13 +15126,13 @@
       </p:cxnSp>
       <p:cxnSp>
         <p:nvCxnSpPr>
-          <p:cNvPr id="272" name="Connector 271"/>
+          <p:cNvPr id="291" name="Connector 290"/>
           <p:cNvCxnSpPr/>
           <p:nvPr/>
         </p:nvCxnSpPr>
         <p:spPr>
           <a:xfrm>
-            <a:off x="10245852" y="3229756"/>
+            <a:off x="10062972" y="3239554"/>
             <a:ext cx="173736" cy="0"/>
           </a:xfrm>
           <a:prstGeom prst="line">
@@ -14422,13 +15162,13 @@
       </p:cxnSp>
       <p:cxnSp>
         <p:nvCxnSpPr>
-          <p:cNvPr id="273" name="Connector 272"/>
+          <p:cNvPr id="292" name="Connector 291"/>
           <p:cNvCxnSpPr/>
           <p:nvPr/>
         </p:nvCxnSpPr>
         <p:spPr>
           <a:xfrm>
-            <a:off x="10245852" y="1929624"/>
+            <a:off x="10062972" y="1991428"/>
             <a:ext cx="173736" cy="0"/>
           </a:xfrm>
           <a:prstGeom prst="line">
@@ -14458,13 +15198,13 @@
       </p:cxnSp>
       <p:sp>
         <p:nvSpPr>
-          <p:cNvPr id="274" name="Rectangle 273"/>
-          <p:cNvSpPr/>
-          <p:nvPr/>
-        </p:nvSpPr>
-        <p:spPr>
-          <a:xfrm>
-            <a:off x="10158984" y="2926543"/>
+          <p:cNvPr id="293" name="Rectangle 292"/>
+          <p:cNvSpPr/>
+          <p:nvPr/>
+        </p:nvSpPr>
+        <p:spPr>
+          <a:xfrm>
+            <a:off x="9976104" y="2948470"/>
             <a:ext cx="347472" cy="1"/>
           </a:xfrm>
           <a:prstGeom prst="rect">
@@ -14502,13 +15242,13 @@
       </p:sp>
       <p:cxnSp>
         <p:nvCxnSpPr>
-          <p:cNvPr id="275" name="Connector 274"/>
+          <p:cNvPr id="294" name="Connector 293"/>
           <p:cNvCxnSpPr/>
           <p:nvPr/>
         </p:nvCxnSpPr>
         <p:spPr>
           <a:xfrm>
-            <a:off x="10158984" y="2498296"/>
+            <a:off x="9976104" y="2537353"/>
             <a:ext cx="347472" cy="0"/>
           </a:xfrm>
           <a:prstGeom prst="line">
@@ -14538,14 +15278,14 @@
       </p:cxnSp>
       <p:sp>
         <p:nvSpPr>
-          <p:cNvPr id="276" name="Oval 275"/>
-          <p:cNvSpPr/>
-          <p:nvPr/>
-        </p:nvSpPr>
-        <p:spPr>
-          <a:xfrm>
-            <a:off x="10326515" y="1897620"/>
-            <a:ext cx="64008" cy="64008"/>
+          <p:cNvPr id="295" name="Oval 294"/>
+          <p:cNvSpPr/>
+          <p:nvPr/>
+        </p:nvSpPr>
+        <p:spPr>
+          <a:xfrm>
+            <a:off x="10197992" y="1954852"/>
+            <a:ext cx="73152" cy="73152"/>
           </a:xfrm>
           <a:prstGeom prst="ellipse">
             <a:avLst/>
@@ -14582,14 +15322,14 @@
       </p:sp>
       <p:sp>
         <p:nvSpPr>
-          <p:cNvPr id="277" name="Oval 276"/>
-          <p:cNvSpPr/>
-          <p:nvPr/>
-        </p:nvSpPr>
-        <p:spPr>
-          <a:xfrm>
-            <a:off x="10234136" y="1899022"/>
-            <a:ext cx="64008" cy="64008"/>
+          <p:cNvPr id="296" name="Oval 295"/>
+          <p:cNvSpPr/>
+          <p:nvPr/>
+        </p:nvSpPr>
+        <p:spPr>
+          <a:xfrm>
+            <a:off x="10090287" y="1956197"/>
+            <a:ext cx="73152" cy="73152"/>
           </a:xfrm>
           <a:prstGeom prst="ellipse">
             <a:avLst/>
@@ -14626,14 +15366,14 @@
       </p:sp>
       <p:sp>
         <p:nvSpPr>
-          <p:cNvPr id="278" name="Oval 277"/>
-          <p:cNvSpPr/>
-          <p:nvPr/>
-        </p:nvSpPr>
-        <p:spPr>
-          <a:xfrm>
-            <a:off x="10359104" y="2039677"/>
-            <a:ext cx="64008" cy="64008"/>
+          <p:cNvPr id="297" name="Oval 296"/>
+          <p:cNvSpPr/>
+          <p:nvPr/>
+        </p:nvSpPr>
+        <p:spPr>
+          <a:xfrm>
+            <a:off x="10198465" y="2091226"/>
+            <a:ext cx="73152" cy="73152"/>
           </a:xfrm>
           <a:prstGeom prst="ellipse">
             <a:avLst/>
@@ -14670,14 +15410,14 @@
       </p:sp>
       <p:sp>
         <p:nvSpPr>
-          <p:cNvPr id="279" name="Oval 278"/>
-          <p:cNvSpPr/>
-          <p:nvPr/>
-        </p:nvSpPr>
-        <p:spPr>
-          <a:xfrm>
-            <a:off x="10380930" y="2281466"/>
-            <a:ext cx="64008" cy="64008"/>
+          <p:cNvPr id="298" name="Oval 297"/>
+          <p:cNvSpPr/>
+          <p:nvPr/>
+        </p:nvSpPr>
+        <p:spPr>
+          <a:xfrm>
+            <a:off x="10122123" y="2323344"/>
+            <a:ext cx="73152" cy="73152"/>
           </a:xfrm>
           <a:prstGeom prst="ellipse">
             <a:avLst/>
@@ -14714,14 +15454,14 @@
       </p:sp>
       <p:sp>
         <p:nvSpPr>
-          <p:cNvPr id="280" name="Oval 279"/>
-          <p:cNvSpPr/>
-          <p:nvPr/>
-        </p:nvSpPr>
-        <p:spPr>
-          <a:xfrm>
-            <a:off x="10218385" y="2331223"/>
-            <a:ext cx="64008" cy="64008"/>
+          <p:cNvPr id="299" name="Oval 298"/>
+          <p:cNvSpPr/>
+          <p:nvPr/>
+        </p:nvSpPr>
+        <p:spPr>
+          <a:xfrm>
+            <a:off x="10140085" y="2371111"/>
+            <a:ext cx="73152" cy="73152"/>
           </a:xfrm>
           <a:prstGeom prst="ellipse">
             <a:avLst/>
@@ -14758,14 +15498,14 @@
       </p:sp>
       <p:sp>
         <p:nvSpPr>
-          <p:cNvPr id="281" name="Oval 280"/>
-          <p:cNvSpPr/>
-          <p:nvPr/>
-        </p:nvSpPr>
-        <p:spPr>
-          <a:xfrm>
-            <a:off x="10229904" y="2373582"/>
-            <a:ext cx="64008" cy="64008"/>
+          <p:cNvPr id="300" name="Oval 299"/>
+          <p:cNvSpPr/>
+          <p:nvPr/>
+        </p:nvSpPr>
+        <p:spPr>
+          <a:xfrm>
+            <a:off x="10073520" y="2411776"/>
+            <a:ext cx="73152" cy="73152"/>
           </a:xfrm>
           <a:prstGeom prst="ellipse">
             <a:avLst/>
@@ -14802,14 +15542,14 @@
       </p:sp>
       <p:sp>
         <p:nvSpPr>
-          <p:cNvPr id="282" name="Oval 281"/>
-          <p:cNvSpPr/>
-          <p:nvPr/>
-        </p:nvSpPr>
-        <p:spPr>
-          <a:xfrm>
-            <a:off x="10256288" y="2374824"/>
-            <a:ext cx="64008" cy="64008"/>
+          <p:cNvPr id="301" name="Oval 300"/>
+          <p:cNvSpPr/>
+          <p:nvPr/>
+        </p:nvSpPr>
+        <p:spPr>
+          <a:xfrm>
+            <a:off x="10044490" y="2412968"/>
+            <a:ext cx="73152" cy="73152"/>
           </a:xfrm>
           <a:prstGeom prst="ellipse">
             <a:avLst/>
@@ -14846,14 +15586,14 @@
       </p:sp>
       <p:sp>
         <p:nvSpPr>
-          <p:cNvPr id="283" name="Oval 282"/>
-          <p:cNvSpPr/>
-          <p:nvPr/>
-        </p:nvSpPr>
-        <p:spPr>
-          <a:xfrm>
-            <a:off x="10306070" y="2407852"/>
-            <a:ext cx="64008" cy="64008"/>
+          <p:cNvPr id="302" name="Oval 301"/>
+          <p:cNvSpPr/>
+          <p:nvPr/>
+        </p:nvSpPr>
+        <p:spPr>
+          <a:xfrm>
+            <a:off x="10036998" y="2444674"/>
+            <a:ext cx="73152" cy="73152"/>
           </a:xfrm>
           <a:prstGeom prst="ellipse">
             <a:avLst/>
@@ -14890,14 +15630,14 @@
       </p:sp>
       <p:sp>
         <p:nvSpPr>
-          <p:cNvPr id="284" name="Oval 283"/>
-          <p:cNvSpPr/>
-          <p:nvPr/>
-        </p:nvSpPr>
-        <p:spPr>
-          <a:xfrm>
-            <a:off x="10302963" y="2466292"/>
-            <a:ext cx="64008" cy="64008"/>
+          <p:cNvPr id="303" name="Oval 302"/>
+          <p:cNvSpPr/>
+          <p:nvPr/>
+        </p:nvSpPr>
+        <p:spPr>
+          <a:xfrm>
+            <a:off x="10134658" y="2500777"/>
+            <a:ext cx="73152" cy="73152"/>
           </a:xfrm>
           <a:prstGeom prst="ellipse">
             <a:avLst/>
@@ -14934,14 +15674,14 @@
       </p:sp>
       <p:sp>
         <p:nvSpPr>
-          <p:cNvPr id="285" name="Oval 284"/>
-          <p:cNvSpPr/>
-          <p:nvPr/>
-        </p:nvSpPr>
-        <p:spPr>
-          <a:xfrm>
-            <a:off x="10259974" y="2497222"/>
-            <a:ext cx="64008" cy="64008"/>
+          <p:cNvPr id="304" name="Oval 303"/>
+          <p:cNvSpPr/>
+          <p:nvPr/>
+        </p:nvSpPr>
+        <p:spPr>
+          <a:xfrm>
+            <a:off x="10160069" y="2530470"/>
+            <a:ext cx="73152" cy="73152"/>
           </a:xfrm>
           <a:prstGeom prst="ellipse">
             <a:avLst/>
@@ -14978,14 +15718,14 @@
       </p:sp>
       <p:sp>
         <p:nvSpPr>
-          <p:cNvPr id="286" name="Oval 285"/>
-          <p:cNvSpPr/>
-          <p:nvPr/>
-        </p:nvSpPr>
-        <p:spPr>
-          <a:xfrm>
-            <a:off x="10363332" y="2823943"/>
-            <a:ext cx="64008" cy="64008"/>
+          <p:cNvPr id="305" name="Oval 304"/>
+          <p:cNvSpPr/>
+          <p:nvPr/>
+        </p:nvSpPr>
+        <p:spPr>
+          <a:xfrm>
+            <a:off x="10095286" y="2844122"/>
+            <a:ext cx="73152" cy="73152"/>
           </a:xfrm>
           <a:prstGeom prst="ellipse">
             <a:avLst/>
@@ -15022,14 +15762,14 @@
       </p:sp>
       <p:sp>
         <p:nvSpPr>
-          <p:cNvPr id="287" name="Oval 286"/>
-          <p:cNvSpPr/>
-          <p:nvPr/>
-        </p:nvSpPr>
-        <p:spPr>
-          <a:xfrm>
-            <a:off x="10321702" y="2842188"/>
-            <a:ext cx="64008" cy="64008"/>
+          <p:cNvPr id="306" name="Oval 305"/>
+          <p:cNvSpPr/>
+          <p:nvPr/>
+        </p:nvSpPr>
+        <p:spPr>
+          <a:xfrm>
+            <a:off x="10054115" y="2861637"/>
+            <a:ext cx="73152" cy="73152"/>
           </a:xfrm>
           <a:prstGeom prst="ellipse">
             <a:avLst/>
@@ -15066,14 +15806,14 @@
       </p:sp>
       <p:sp>
         <p:nvSpPr>
-          <p:cNvPr id="288" name="Oval 287"/>
-          <p:cNvSpPr/>
-          <p:nvPr/>
-        </p:nvSpPr>
-        <p:spPr>
-          <a:xfrm>
-            <a:off x="10360372" y="2894539"/>
-            <a:ext cx="64008" cy="64008"/>
+          <p:cNvPr id="307" name="Oval 306"/>
+          <p:cNvSpPr/>
+          <p:nvPr/>
+        </p:nvSpPr>
+        <p:spPr>
+          <a:xfrm>
+            <a:off x="10188476" y="2911894"/>
+            <a:ext cx="73152" cy="73152"/>
           </a:xfrm>
           <a:prstGeom prst="ellipse">
             <a:avLst/>
@@ -15110,14 +15850,14 @@
       </p:sp>
       <p:sp>
         <p:nvSpPr>
-          <p:cNvPr id="289" name="Oval 288"/>
-          <p:cNvSpPr/>
-          <p:nvPr/>
-        </p:nvSpPr>
-        <p:spPr>
-          <a:xfrm>
-            <a:off x="10222625" y="2916760"/>
-            <a:ext cx="64008" cy="64008"/>
+          <p:cNvPr id="308" name="Oval 307"/>
+          <p:cNvSpPr/>
+          <p:nvPr/>
+        </p:nvSpPr>
+        <p:spPr>
+          <a:xfrm>
+            <a:off x="10196883" y="2933226"/>
+            <a:ext cx="73152" cy="73152"/>
           </a:xfrm>
           <a:prstGeom prst="ellipse">
             <a:avLst/>
@@ -15154,14 +15894,14 @@
       </p:sp>
       <p:sp>
         <p:nvSpPr>
-          <p:cNvPr id="290" name="Oval 289"/>
-          <p:cNvSpPr/>
-          <p:nvPr/>
-        </p:nvSpPr>
-        <p:spPr>
-          <a:xfrm>
-            <a:off x="10358263" y="2927429"/>
-            <a:ext cx="64008" cy="64008"/>
+          <p:cNvPr id="309" name="Oval 308"/>
+          <p:cNvSpPr/>
+          <p:nvPr/>
+        </p:nvSpPr>
+        <p:spPr>
+          <a:xfrm>
+            <a:off x="10086981" y="2943468"/>
+            <a:ext cx="73152" cy="73152"/>
           </a:xfrm>
           <a:prstGeom prst="ellipse">
             <a:avLst/>
@@ -15198,14 +15938,14 @@
       </p:sp>
       <p:sp>
         <p:nvSpPr>
-          <p:cNvPr id="291" name="Oval 290"/>
-          <p:cNvSpPr/>
-          <p:nvPr/>
-        </p:nvSpPr>
-        <p:spPr>
-          <a:xfrm>
-            <a:off x="10284940" y="3027758"/>
-            <a:ext cx="64008" cy="64008"/>
+          <p:cNvPr id="310" name="Oval 309"/>
+          <p:cNvSpPr/>
+          <p:nvPr/>
+        </p:nvSpPr>
+        <p:spPr>
+          <a:xfrm>
+            <a:off x="10110920" y="3039784"/>
+            <a:ext cx="73152" cy="73152"/>
           </a:xfrm>
           <a:prstGeom prst="ellipse">
             <a:avLst/>
@@ -15242,14 +15982,14 @@
       </p:sp>
       <p:sp>
         <p:nvSpPr>
-          <p:cNvPr id="292" name="Oval 291"/>
-          <p:cNvSpPr/>
-          <p:nvPr/>
-        </p:nvSpPr>
-        <p:spPr>
-          <a:xfrm>
-            <a:off x="10262251" y="3197752"/>
-            <a:ext cx="64008" cy="64008"/>
+          <p:cNvPr id="311" name="Oval 310"/>
+          <p:cNvSpPr/>
+          <p:nvPr/>
+        </p:nvSpPr>
+        <p:spPr>
+          <a:xfrm>
+            <a:off x="10036428" y="3202978"/>
+            <a:ext cx="73152" cy="73152"/>
           </a:xfrm>
           <a:prstGeom prst="ellipse">
             <a:avLst/>
@@ -15286,14 +16026,14 @@
       </p:sp>
       <p:cxnSp>
         <p:nvCxnSpPr>
-          <p:cNvPr id="293" name="Connector 292"/>
+          <p:cNvPr id="312" name="Connector 311"/>
           <p:cNvCxnSpPr/>
           <p:nvPr/>
         </p:nvCxnSpPr>
         <p:spPr>
           <a:xfrm flipV="1">
-            <a:off x="10789920" y="2038444"/>
-            <a:ext cx="0" cy="2150656"/>
+            <a:off x="10607040" y="2095895"/>
+            <a:ext cx="0" cy="2064630"/>
           </a:xfrm>
           <a:prstGeom prst="line">
             <a:avLst/>
@@ -15322,13 +16062,13 @@
       </p:cxnSp>
       <p:cxnSp>
         <p:nvCxnSpPr>
-          <p:cNvPr id="294" name="Connector 293"/>
+          <p:cNvPr id="313" name="Connector 312"/>
           <p:cNvCxnSpPr/>
           <p:nvPr/>
         </p:nvCxnSpPr>
         <p:spPr>
           <a:xfrm>
-            <a:off x="10703052" y="4189100"/>
+            <a:off x="10520172" y="4160525"/>
             <a:ext cx="173736" cy="0"/>
           </a:xfrm>
           <a:prstGeom prst="line">
@@ -15358,13 +16098,13 @@
       </p:cxnSp>
       <p:cxnSp>
         <p:nvCxnSpPr>
-          <p:cNvPr id="295" name="Connector 294"/>
+          <p:cNvPr id="314" name="Connector 313"/>
           <p:cNvCxnSpPr/>
           <p:nvPr/>
         </p:nvCxnSpPr>
         <p:spPr>
           <a:xfrm>
-            <a:off x="10703052" y="2038444"/>
+            <a:off x="10520172" y="2095895"/>
             <a:ext cx="173736" cy="0"/>
           </a:xfrm>
           <a:prstGeom prst="line">
@@ -15394,13 +16134,13 @@
       </p:cxnSp>
       <p:sp>
         <p:nvSpPr>
-          <p:cNvPr id="296" name="Rectangle 295"/>
-          <p:cNvSpPr/>
-          <p:nvPr/>
-        </p:nvSpPr>
-        <p:spPr>
-          <a:xfrm>
-            <a:off x="10616184" y="3359586"/>
+          <p:cNvPr id="315" name="Rectangle 314"/>
+          <p:cNvSpPr/>
+          <p:nvPr/>
+        </p:nvSpPr>
+        <p:spPr>
+          <a:xfrm>
+            <a:off x="10433304" y="3364192"/>
             <a:ext cx="347472" cy="1"/>
           </a:xfrm>
           <a:prstGeom prst="rect">
@@ -15438,13 +16178,13 @@
       </p:sp>
       <p:cxnSp>
         <p:nvCxnSpPr>
-          <p:cNvPr id="297" name="Connector 296"/>
+          <p:cNvPr id="316" name="Connector 315"/>
           <p:cNvCxnSpPr/>
           <p:nvPr/>
         </p:nvCxnSpPr>
         <p:spPr>
           <a:xfrm>
-            <a:off x="10616184" y="2914620"/>
+            <a:off x="10433304" y="2937024"/>
             <a:ext cx="347472" cy="0"/>
           </a:xfrm>
           <a:prstGeom prst="line">
@@ -15474,14 +16214,14 @@
       </p:cxnSp>
       <p:sp>
         <p:nvSpPr>
-          <p:cNvPr id="298" name="Oval 297"/>
-          <p:cNvSpPr/>
-          <p:nvPr/>
-        </p:nvSpPr>
-        <p:spPr>
-          <a:xfrm>
-            <a:off x="10806358" y="2006440"/>
-            <a:ext cx="64008" cy="64008"/>
+          <p:cNvPr id="317" name="Oval 316"/>
+          <p:cNvSpPr/>
+          <p:nvPr/>
+        </p:nvSpPr>
+        <p:spPr>
+          <a:xfrm>
+            <a:off x="10567055" y="2059319"/>
+            <a:ext cx="73152" cy="73152"/>
           </a:xfrm>
           <a:prstGeom prst="ellipse">
             <a:avLst/>
@@ -15518,14 +16258,14 @@
       </p:sp>
       <p:sp>
         <p:nvSpPr>
-          <p:cNvPr id="299" name="Oval 298"/>
-          <p:cNvSpPr/>
-          <p:nvPr/>
-        </p:nvSpPr>
-        <p:spPr>
-          <a:xfrm>
-            <a:off x="10700974" y="2019935"/>
-            <a:ext cx="64008" cy="64008"/>
+          <p:cNvPr id="318" name="Oval 317"/>
+          <p:cNvSpPr/>
+          <p:nvPr/>
+        </p:nvSpPr>
+        <p:spPr>
+          <a:xfrm>
+            <a:off x="10593191" y="2072274"/>
+            <a:ext cx="73152" cy="73152"/>
           </a:xfrm>
           <a:prstGeom prst="ellipse">
             <a:avLst/>
@@ -15562,14 +16302,14 @@
       </p:sp>
       <p:sp>
         <p:nvSpPr>
-          <p:cNvPr id="300" name="Oval 299"/>
-          <p:cNvSpPr/>
-          <p:nvPr/>
-        </p:nvSpPr>
-        <p:spPr>
-          <a:xfrm>
-            <a:off x="10795021" y="2057772"/>
-            <a:ext cx="64008" cy="64008"/>
+          <p:cNvPr id="319" name="Oval 318"/>
+          <p:cNvSpPr/>
+          <p:nvPr/>
+        </p:nvSpPr>
+        <p:spPr>
+          <a:xfrm>
+            <a:off x="10551842" y="2108597"/>
+            <a:ext cx="73152" cy="73152"/>
           </a:xfrm>
           <a:prstGeom prst="ellipse">
             <a:avLst/>
@@ -15606,14 +16346,14 @@
       </p:sp>
       <p:sp>
         <p:nvSpPr>
-          <p:cNvPr id="301" name="Oval 300"/>
-          <p:cNvSpPr/>
-          <p:nvPr/>
-        </p:nvSpPr>
-        <p:spPr>
-          <a:xfrm>
-            <a:off x="10801408" y="2186282"/>
-            <a:ext cx="64008" cy="64008"/>
+          <p:cNvPr id="320" name="Oval 319"/>
+          <p:cNvSpPr/>
+          <p:nvPr/>
+        </p:nvSpPr>
+        <p:spPr>
+          <a:xfrm>
+            <a:off x="10528505" y="2231967"/>
+            <a:ext cx="73152" cy="73152"/>
           </a:xfrm>
           <a:prstGeom prst="ellipse">
             <a:avLst/>
@@ -15650,14 +16390,14 @@
       </p:sp>
       <p:sp>
         <p:nvSpPr>
-          <p:cNvPr id="302" name="Oval 301"/>
-          <p:cNvSpPr/>
-          <p:nvPr/>
-        </p:nvSpPr>
-        <p:spPr>
-          <a:xfrm>
-            <a:off x="10700776" y="2264218"/>
-            <a:ext cx="64008" cy="64008"/>
+          <p:cNvPr id="321" name="Oval 320"/>
+          <p:cNvSpPr/>
+          <p:nvPr/>
+        </p:nvSpPr>
+        <p:spPr>
+          <a:xfrm>
+            <a:off x="10534080" y="2306786"/>
+            <a:ext cx="73152" cy="73152"/>
           </a:xfrm>
           <a:prstGeom prst="ellipse">
             <a:avLst/>
@@ -15694,14 +16434,14 @@
       </p:sp>
       <p:sp>
         <p:nvSpPr>
-          <p:cNvPr id="303" name="Oval 302"/>
-          <p:cNvSpPr/>
-          <p:nvPr/>
-        </p:nvSpPr>
-        <p:spPr>
-          <a:xfrm>
-            <a:off x="10827745" y="2473651"/>
-            <a:ext cx="64008" cy="64008"/>
+          <p:cNvPr id="322" name="Oval 321"/>
+          <p:cNvSpPr/>
+          <p:nvPr/>
+        </p:nvSpPr>
+        <p:spPr>
+          <a:xfrm>
+            <a:off x="10524110" y="2507841"/>
+            <a:ext cx="73152" cy="73152"/>
           </a:xfrm>
           <a:prstGeom prst="ellipse">
             <a:avLst/>
@@ -15738,14 +16478,14 @@
       </p:sp>
       <p:sp>
         <p:nvSpPr>
-          <p:cNvPr id="304" name="Oval 303"/>
-          <p:cNvSpPr/>
-          <p:nvPr/>
-        </p:nvSpPr>
-        <p:spPr>
-          <a:xfrm>
-            <a:off x="10695681" y="2577298"/>
-            <a:ext cx="64008" cy="64008"/>
+          <p:cNvPr id="323" name="Oval 322"/>
+          <p:cNvSpPr/>
+          <p:nvPr/>
+        </p:nvSpPr>
+        <p:spPr>
+          <a:xfrm>
+            <a:off x="10507166" y="2607343"/>
+            <a:ext cx="73152" cy="73152"/>
           </a:xfrm>
           <a:prstGeom prst="ellipse">
             <a:avLst/>
@@ -15782,14 +16522,14 @@
       </p:sp>
       <p:sp>
         <p:nvSpPr>
-          <p:cNvPr id="305" name="Oval 304"/>
-          <p:cNvSpPr/>
-          <p:nvPr/>
-        </p:nvSpPr>
-        <p:spPr>
-          <a:xfrm>
-            <a:off x="10777240" y="2846110"/>
-            <a:ext cx="64008" cy="64008"/>
+          <p:cNvPr id="324" name="Oval 323"/>
+          <p:cNvSpPr/>
+          <p:nvPr/>
+        </p:nvSpPr>
+        <p:spPr>
+          <a:xfrm>
+            <a:off x="10585546" y="2865402"/>
+            <a:ext cx="73152" cy="73152"/>
           </a:xfrm>
           <a:prstGeom prst="ellipse">
             <a:avLst/>
@@ -15826,14 +16566,14 @@
       </p:sp>
       <p:sp>
         <p:nvSpPr>
-          <p:cNvPr id="306" name="Oval 305"/>
-          <p:cNvSpPr/>
-          <p:nvPr/>
-        </p:nvSpPr>
-        <p:spPr>
-          <a:xfrm>
-            <a:off x="10829312" y="2919121"/>
-            <a:ext cx="64008" cy="64008"/>
+          <p:cNvPr id="325" name="Oval 324"/>
+          <p:cNvSpPr/>
+          <p:nvPr/>
+        </p:nvSpPr>
+        <p:spPr>
+          <a:xfrm>
+            <a:off x="10545132" y="2935493"/>
+            <a:ext cx="73152" cy="73152"/>
           </a:xfrm>
           <a:prstGeom prst="ellipse">
             <a:avLst/>
@@ -15870,14 +16610,14 @@
       </p:sp>
       <p:sp>
         <p:nvSpPr>
-          <p:cNvPr id="307" name="Oval 306"/>
-          <p:cNvSpPr/>
-          <p:nvPr/>
-        </p:nvSpPr>
-        <p:spPr>
-          <a:xfrm>
-            <a:off x="10704192" y="3019590"/>
-            <a:ext cx="64008" cy="64008"/>
+          <p:cNvPr id="326" name="Oval 325"/>
+          <p:cNvSpPr/>
+          <p:nvPr/>
+        </p:nvSpPr>
+        <p:spPr>
+          <a:xfrm>
+            <a:off x="10643068" y="3031943"/>
+            <a:ext cx="73152" cy="73152"/>
           </a:xfrm>
           <a:prstGeom prst="ellipse">
             <a:avLst/>
@@ -15914,14 +16654,14 @@
       </p:sp>
       <p:sp>
         <p:nvSpPr>
-          <p:cNvPr id="308" name="Oval 307"/>
-          <p:cNvSpPr/>
-          <p:nvPr/>
-        </p:nvSpPr>
-        <p:spPr>
-          <a:xfrm>
-            <a:off x="10767888" y="3189904"/>
-            <a:ext cx="64008" cy="64008"/>
+          <p:cNvPr id="327" name="Oval 326"/>
+          <p:cNvSpPr/>
+          <p:nvPr/>
+        </p:nvSpPr>
+        <p:spPr>
+          <a:xfrm>
+            <a:off x="10552164" y="3195444"/>
+            <a:ext cx="73152" cy="73152"/>
           </a:xfrm>
           <a:prstGeom prst="ellipse">
             <a:avLst/>
@@ -15958,14 +16698,14 @@
       </p:sp>
       <p:sp>
         <p:nvSpPr>
-          <p:cNvPr id="309" name="Oval 308"/>
-          <p:cNvSpPr/>
-          <p:nvPr/>
-        </p:nvSpPr>
-        <p:spPr>
-          <a:xfrm>
-            <a:off x="10777385" y="3283096"/>
-            <a:ext cx="64008" cy="64008"/>
+          <p:cNvPr id="328" name="Oval 327"/>
+          <p:cNvSpPr/>
+          <p:nvPr/>
+        </p:nvSpPr>
+        <p:spPr>
+          <a:xfrm>
+            <a:off x="10544796" y="3284909"/>
+            <a:ext cx="73152" cy="73152"/>
           </a:xfrm>
           <a:prstGeom prst="ellipse">
             <a:avLst/>
@@ -16002,14 +16742,14 @@
       </p:sp>
       <p:sp>
         <p:nvSpPr>
-          <p:cNvPr id="310" name="Oval 309"/>
-          <p:cNvSpPr/>
-          <p:nvPr/>
-        </p:nvSpPr>
-        <p:spPr>
-          <a:xfrm>
-            <a:off x="10760162" y="3461040"/>
-            <a:ext cx="64008" cy="64008"/>
+          <p:cNvPr id="329" name="Oval 328"/>
+          <p:cNvSpPr/>
+          <p:nvPr/>
+        </p:nvSpPr>
+        <p:spPr>
+          <a:xfrm>
+            <a:off x="10573055" y="3455735"/>
+            <a:ext cx="73152" cy="73152"/>
           </a:xfrm>
           <a:prstGeom prst="ellipse">
             <a:avLst/>
@@ -16046,14 +16786,14 @@
       </p:sp>
       <p:sp>
         <p:nvSpPr>
-          <p:cNvPr id="311" name="Oval 310"/>
-          <p:cNvSpPr/>
-          <p:nvPr/>
-        </p:nvSpPr>
-        <p:spPr>
-          <a:xfrm>
-            <a:off x="10781942" y="3576697"/>
-            <a:ext cx="64008" cy="64008"/>
+          <p:cNvPr id="330" name="Oval 329"/>
+          <p:cNvSpPr/>
+          <p:nvPr/>
+        </p:nvSpPr>
+        <p:spPr>
+          <a:xfrm>
+            <a:off x="10511335" y="3566766"/>
+            <a:ext cx="73152" cy="73152"/>
           </a:xfrm>
           <a:prstGeom prst="ellipse">
             <a:avLst/>
@@ -16090,14 +16830,14 @@
       </p:sp>
       <p:sp>
         <p:nvSpPr>
-          <p:cNvPr id="312" name="Oval 311"/>
-          <p:cNvSpPr/>
-          <p:nvPr/>
-        </p:nvSpPr>
-        <p:spPr>
-          <a:xfrm>
-            <a:off x="10754870" y="3821001"/>
-            <a:ext cx="64008" cy="64008"/>
+          <p:cNvPr id="331" name="Oval 330"/>
+          <p:cNvSpPr/>
+          <p:nvPr/>
+        </p:nvSpPr>
+        <p:spPr>
+          <a:xfrm>
+            <a:off x="10645469" y="3801298"/>
+            <a:ext cx="73152" cy="73152"/>
           </a:xfrm>
           <a:prstGeom prst="ellipse">
             <a:avLst/>
@@ -16134,14 +16874,14 @@
       </p:sp>
       <p:sp>
         <p:nvSpPr>
-          <p:cNvPr id="313" name="Oval 312"/>
-          <p:cNvSpPr/>
-          <p:nvPr/>
-        </p:nvSpPr>
-        <p:spPr>
-          <a:xfrm>
-            <a:off x="10721224" y="4157096"/>
-            <a:ext cx="64008" cy="64008"/>
+          <p:cNvPr id="332" name="Oval 331"/>
+          <p:cNvSpPr/>
+          <p:nvPr/>
+        </p:nvSpPr>
+        <p:spPr>
+          <a:xfrm>
+            <a:off x="10558466" y="4123949"/>
+            <a:ext cx="73152" cy="73152"/>
           </a:xfrm>
           <a:prstGeom prst="ellipse">
             <a:avLst/>
@@ -16173,6 +16913,42 @@
           <a:lstStyle/>
           <a:p>
             <a:pPr algn="ctr"/>
+          </a:p>
+        </p:txBody>
+      </p:sp>
+      <p:sp>
+        <p:nvSpPr>
+          <p:cNvPr id="333" name="TextBox 332"/>
+          <p:cNvSpPr txBox="1"/>
+          <p:nvPr/>
+        </p:nvSpPr>
+        <p:spPr>
+          <a:xfrm>
+            <a:off x="1463040" y="5943600"/>
+            <a:ext cx="9601200" cy="274320"/>
+          </a:xfrm>
+          <a:prstGeom prst="rect">
+            <a:avLst/>
+          </a:prstGeom>
+          <a:noFill/>
+          <a:effectLst/>
+        </p:spPr>
+        <p:txBody>
+          <a:bodyPr wrap="square" lIns="0" rIns="0" tIns="0" bIns="0" anchor="ctr">
+            <a:spAutoFit/>
+          </a:bodyPr>
+          <a:lstStyle/>
+          <a:p>
+            <a:pPr algn="l"/>
+            <a:r>
+              <a:rPr sz="800" b="0" i="1">
+                <a:solidFill>
+                  <a:srgbClr val="222222"/>
+                </a:solidFill>
+                <a:latin typeface="Arial"/>
+              </a:rPr>
+              <a:t>Per-chain Mann–Whitney P (good vs bad) shown above each panel. Chain families: α/β T-cell (teal), γ/δ (gold), B-cell (coral).</a:t>
+            </a:r>
           </a:p>
         </p:txBody>
       </p:sp>
